--- a/slides/gemmba_presentation.pptx
+++ b/slides/gemmba_presentation.pptx
@@ -19,6 +19,9 @@
     <p:sldId id="264" r:id="rId10"/>
     <p:sldId id="265" r:id="rId11"/>
     <p:sldId id="266" r:id="rId12"/>
+    <p:sldId id="269" r:id="rId20"/>
+    <p:sldId id="270" r:id="rId21"/>
+    <p:sldId id="271" r:id="rId22"/>
     <p:sldId id="267" r:id="rId13"/>
     <p:sldId id="268" r:id="rId14"/>
   </p:sldIdLst>
@@ -158,7 +161,14 @@
             <p14:sldId id="266"/>
           </p14:sldIdLst>
         </p14:section>
-        <p14:section name="7. まとめと今後の展望" id="{46E1A5A1-B24C-0CC0-DF52-11DF60A68D47}">
+        <p14:section name="7. 導入先からの評価" id="{56A0C880-46BF-4D7E-9386-C1046E19C688}">
+          <p14:sldIdLst>
+            <p14:sldId id="269"/>
+            <p14:sldId id="270"/>
+            <p14:sldId id="271"/>
+          </p14:sldIdLst>
+        </p14:section>
+        <p14:section name="8. まとめと今後の展望" id="{46E1A5A1-B24C-0CC0-DF52-11DF60A68D47}">
           <p14:sldIdLst>
             <p14:sldId id="267"/>
             <p14:sldId id="268"/>
@@ -1620,6 +1630,280 @@
     <p:extLst>
       <p:ext uri="{BB962C8B-B14F-4D97-AF65-F5344CB8AC3E}">
         <p14:creationId xmlns:p14="http://schemas.microsoft.com/office/powerpoint/2010/main" val="1456275994"/>
+      </p:ext>
+    </p:extLst>
+  </p:cSld>
+  <p:clrMapOvr>
+    <a:masterClrMapping/>
+  </p:clrMapOvr>
+</p:notes>
+</file>
+
+<file path=ppt/notesSlides/notesSlide14.xml><?xml version="1.0" encoding="utf-8"?>
+<p:notes xmlns:a="http://schemas.openxmlformats.org/drawingml/2006/main" xmlns:r="http://schemas.openxmlformats.org/officeDocument/2006/relationships" xmlns:p="http://schemas.openxmlformats.org/presentationml/2006/main">
+  <p:cSld>
+    <p:spTree>
+      <p:nvGrpSpPr>
+        <p:cNvPr id="1" name=""/>
+        <p:cNvGrpSpPr/>
+        <p:nvPr/>
+      </p:nvGrpSpPr>
+      <p:grpSpPr>
+        <a:xfrm>
+          <a:off x="0" y="0"/>
+          <a:ext cx="0" cy="0"/>
+          <a:chOff x="0" y="0"/>
+          <a:chExt cx="0" cy="0"/>
+        </a:xfrm>
+      </p:grpSpPr>
+      <p:sp>
+        <p:nvSpPr>
+          <p:cNvPr id="2" name="Slide Image Placeholder 1"/>
+          <p:cNvSpPr>
+            <a:spLocks noGrp="1" noRot="1" noChangeAspect="1"/>
+          </p:cNvSpPr>
+          <p:nvPr>
+            <p:ph type="sldImg"/>
+          </p:nvPr>
+        </p:nvSpPr>
+        <p:spPr/>
+      </p:sp>
+      <p:sp>
+        <p:nvSpPr>
+          <p:cNvPr id="3" name="Notes Placeholder 2"/>
+          <p:cNvSpPr>
+            <a:spLocks noGrp="1"/>
+          </p:cNvSpPr>
+          <p:nvPr>
+            <p:ph type="body" idx="1"/>
+          </p:nvPr>
+        </p:nvSpPr>
+        <p:spPr/>
+        <p:txBody>
+          <a:bodyPr/>
+          <a:lstStyle/>
+          <a:p>
+            <a:r>
+              <a:rPr lang="en-US" dirty="0"/>
+              <a:t>【1 分】
+実際に導入先の工場で使っていただき、評価をいただきました。まず良かった点です。
+導入が簡単だった、操作が分かりやすかった、という声をいただきました。IT 担当者がいなくても導入できる、操作はタッチとボタンだけ、という設計の方針が伝わったと考えています。
+また、作業にかかった時間が自動で記録されること、急ぎの仕事を見落とさないこと、ダッシュボードで空いている機械がすぐ見つかることも便利だと言っていただきました。</a:t>
+            </a:r>
+            <a:endParaRPr lang="en-US" dirty="0"/>
+          </a:p>
+        </p:txBody>
+      </p:sp>
+      <p:sp>
+        <p:nvSpPr>
+          <p:cNvPr id="4" name="Slide Number Placeholder 3"/>
+          <p:cNvSpPr>
+            <a:spLocks noGrp="1"/>
+          </p:cNvSpPr>
+          <p:nvPr>
+            <p:ph type="sldNum" sz="quarter" idx="10"/>
+          </p:nvPr>
+        </p:nvSpPr>
+        <p:spPr/>
+        <p:txBody>
+          <a:bodyPr/>
+          <a:lstStyle/>
+          <a:p>
+            <a:fld id="{F7021451-1387-4CA6-816F-3879F97B5CBC}" type="slidenum">
+              <a:rPr lang="en-US"/>
+              <a:t>1</a:t>
+            </a:fld>
+            <a:endParaRPr lang="en-US"/>
+          </a:p>
+        </p:txBody>
+      </p:sp>
+    </p:spTree>
+    <p:extLst>
+      <p:ext uri="{BB962C8B-B14F-4D97-AF65-F5344CB8AC3E}">
+        <p14:creationId xmlns:p14="http://schemas.microsoft.com/office/powerpoint/2010/main" val="1024086991"/>
+      </p:ext>
+    </p:extLst>
+  </p:cSld>
+  <p:clrMapOvr>
+    <a:masterClrMapping/>
+  </p:clrMapOvr>
+</p:notes>
+</file>
+
+<file path=ppt/notesSlides/notesSlide15.xml><?xml version="1.0" encoding="utf-8"?>
+<p:notes xmlns:a="http://schemas.openxmlformats.org/drawingml/2006/main" xmlns:r="http://schemas.openxmlformats.org/officeDocument/2006/relationships" xmlns:p="http://schemas.openxmlformats.org/presentationml/2006/main">
+  <p:cSld>
+    <p:spTree>
+      <p:nvGrpSpPr>
+        <p:cNvPr id="1" name=""/>
+        <p:cNvGrpSpPr/>
+        <p:nvPr/>
+      </p:nvGrpSpPr>
+      <p:grpSpPr>
+        <a:xfrm>
+          <a:off x="0" y="0"/>
+          <a:ext cx="0" cy="0"/>
+          <a:chOff x="0" y="0"/>
+          <a:chExt cx="0" cy="0"/>
+        </a:xfrm>
+      </p:grpSpPr>
+      <p:sp>
+        <p:nvSpPr>
+          <p:cNvPr id="2" name="Slide Image Placeholder 1"/>
+          <p:cNvSpPr>
+            <a:spLocks noGrp="1" noRot="1" noChangeAspect="1"/>
+          </p:cNvSpPr>
+          <p:nvPr>
+            <p:ph type="sldImg"/>
+          </p:nvPr>
+        </p:nvSpPr>
+        <p:spPr/>
+      </p:sp>
+      <p:sp>
+        <p:nvSpPr>
+          <p:cNvPr id="3" name="Notes Placeholder 2"/>
+          <p:cNvSpPr>
+            <a:spLocks noGrp="1"/>
+          </p:cNvSpPr>
+          <p:nvPr>
+            <p:ph type="body" idx="1"/>
+          </p:nvPr>
+        </p:nvSpPr>
+        <p:spPr/>
+        <p:txBody>
+          <a:bodyPr/>
+          <a:lstStyle/>
+          <a:p>
+            <a:r>
+              <a:rPr lang="en-US" dirty="0"/>
+              <a:t>【1 分 30 秒】
+次に悪かった点です。このうち二つは直しました。
+一つ目は、作業の終わりにタッチを忘れる人がいたことです。忘れると、機材が使用中のまま残り、次の人が使えません。そこで、別の機材でタッチしたときに前の作業を終えるか確認するようにしました。また、見込みより長く使用中のままの機材は、機材の画面と管理画面で知らせます。管理者が代わりに終了するときは、終わった時刻を入れてもらいます。忘れていた時間まで作業時間に数えると、AI がその人を遅いと学習してしまうためです。
+二つ目は、毎週やる点検などを毎回入れるのが面倒だったことです。定期タスクを一度登録すれば、予定日に自動で追加されるようにしました。前の回が終わっていない間は追加しないので、同じ仕事が積み上がりません。</a:t>
+            </a:r>
+            <a:endParaRPr lang="en-US" dirty="0"/>
+          </a:p>
+        </p:txBody>
+      </p:sp>
+      <p:sp>
+        <p:nvSpPr>
+          <p:cNvPr id="4" name="Slide Number Placeholder 3"/>
+          <p:cNvSpPr>
+            <a:spLocks noGrp="1"/>
+          </p:cNvSpPr>
+          <p:nvPr>
+            <p:ph type="sldNum" sz="quarter" idx="10"/>
+          </p:nvPr>
+        </p:nvSpPr>
+        <p:spPr/>
+        <p:txBody>
+          <a:bodyPr/>
+          <a:lstStyle/>
+          <a:p>
+            <a:fld id="{F7021451-1387-4CA6-816F-3879F97B5CBC}" type="slidenum">
+              <a:rPr lang="en-US"/>
+              <a:t>2</a:t>
+            </a:fld>
+            <a:endParaRPr lang="en-US"/>
+          </a:p>
+        </p:txBody>
+      </p:sp>
+    </p:spTree>
+    <p:extLst>
+      <p:ext uri="{BB962C8B-B14F-4D97-AF65-F5344CB8AC3E}">
+        <p14:creationId xmlns:p14="http://schemas.microsoft.com/office/powerpoint/2010/main" val="1024086991"/>
+      </p:ext>
+    </p:extLst>
+  </p:cSld>
+  <p:clrMapOvr>
+    <a:masterClrMapping/>
+  </p:clrMapOvr>
+</p:notes>
+</file>
+
+<file path=ppt/notesSlides/notesSlide16.xml><?xml version="1.0" encoding="utf-8"?>
+<p:notes xmlns:a="http://schemas.openxmlformats.org/drawingml/2006/main" xmlns:r="http://schemas.openxmlformats.org/officeDocument/2006/relationships" xmlns:p="http://schemas.openxmlformats.org/presentationml/2006/main">
+  <p:cSld>
+    <p:spTree>
+      <p:nvGrpSpPr>
+        <p:cNvPr id="1" name=""/>
+        <p:cNvGrpSpPr/>
+        <p:nvPr/>
+      </p:nvGrpSpPr>
+      <p:grpSpPr>
+        <a:xfrm>
+          <a:off x="0" y="0"/>
+          <a:ext cx="0" cy="0"/>
+          <a:chOff x="0" y="0"/>
+          <a:chExt cx="0" cy="0"/>
+        </a:xfrm>
+      </p:grpSpPr>
+      <p:sp>
+        <p:nvSpPr>
+          <p:cNvPr id="2" name="Slide Image Placeholder 1"/>
+          <p:cNvSpPr>
+            <a:spLocks noGrp="1" noRot="1" noChangeAspect="1"/>
+          </p:cNvSpPr>
+          <p:nvPr>
+            <p:ph type="sldImg"/>
+          </p:nvPr>
+        </p:nvSpPr>
+        <p:spPr/>
+      </p:sp>
+      <p:sp>
+        <p:nvSpPr>
+          <p:cNvPr id="3" name="Notes Placeholder 2"/>
+          <p:cNvSpPr>
+            <a:spLocks noGrp="1"/>
+          </p:cNvSpPr>
+          <p:nvPr>
+            <p:ph type="body" idx="1"/>
+          </p:nvPr>
+        </p:nvSpPr>
+        <p:spPr/>
+        <p:txBody>
+          <a:bodyPr/>
+          <a:lstStyle/>
+          <a:p>
+            <a:r>
+              <a:rPr lang="en-US" dirty="0"/>
+              <a:t>【1 分】
+残りの三つは、まだ直せていません。改善の方法を説明します。
+一つ目は、ディスプレイが小さく文字が見づらいという点です。大きい画面に替え、一度に出す文字を減らして文字を大きくします。
+二つ目は、側面に IC タグをかざすのが分かりづらいという点です。読み取る部分を正面に移し、かざす場所に目印を付けます。
+三つ目は、管理者からモジュールに通知したいという要望です。モジュールにブザーを付け、管理画面から音と文字で呼び出せるようにします。</a:t>
+            </a:r>
+            <a:endParaRPr lang="en-US" dirty="0"/>
+          </a:p>
+        </p:txBody>
+      </p:sp>
+      <p:sp>
+        <p:nvSpPr>
+          <p:cNvPr id="4" name="Slide Number Placeholder 3"/>
+          <p:cNvSpPr>
+            <a:spLocks noGrp="1"/>
+          </p:cNvSpPr>
+          <p:nvPr>
+            <p:ph type="sldNum" sz="quarter" idx="10"/>
+          </p:nvPr>
+        </p:nvSpPr>
+        <p:spPr/>
+        <p:txBody>
+          <a:bodyPr/>
+          <a:lstStyle/>
+          <a:p>
+            <a:fld id="{F7021451-1387-4CA6-816F-3879F97B5CBC}" type="slidenum">
+              <a:rPr lang="en-US"/>
+              <a:t>3</a:t>
+            </a:fld>
+            <a:endParaRPr lang="en-US"/>
+          </a:p>
+        </p:txBody>
+      </p:sp>
+    </p:spTree>
+    <p:extLst>
+      <p:ext uri="{BB962C8B-B14F-4D97-AF65-F5344CB8AC3E}">
+        <p14:creationId xmlns:p14="http://schemas.microsoft.com/office/powerpoint/2010/main" val="1024086991"/>
       </p:ext>
     </p:extLst>
   </p:cSld>
@@ -6601,7 +6885,7 @@
                   <a:schemeClr val="accent1"/>
                 </a:solidFill>
               </a:rPr>
-              <a:t>7. まとめと今後の展望</a:t>
+              <a:t>8. まとめと今後の展望</a:t>
             </a:r>
             <a:endParaRPr lang="ja-JP" sz="1400" dirty="0"/>
           </a:p>
@@ -8188,6 +8472,2371 @@
         <p14:creationId xmlns:p14="http://schemas.microsoft.com/office/powerpoint/2010/main" val="3719384269"/>
       </p:ext>
     </p:extLst>
+  </p:cSld>
+  <p:clrMapOvr>
+    <a:masterClrMapping/>
+  </p:clrMapOvr>
+</p:sld>
+</file>
+
+<file path=ppt/slides/slide14.xml><?xml version="1.0" encoding="utf-8"?>
+<p:sld xmlns:a="http://schemas.openxmlformats.org/drawingml/2006/main" xmlns:r="http://schemas.openxmlformats.org/officeDocument/2006/relationships" xmlns:p="http://schemas.openxmlformats.org/presentationml/2006/main">
+  <p:cSld name="Slide 1">
+    <p:spTree>
+      <p:nvGrpSpPr>
+        <p:cNvPr id="1" name=""/>
+        <p:cNvGrpSpPr/>
+        <p:nvPr/>
+      </p:nvGrpSpPr>
+      <p:grpSpPr>
+        <a:xfrm>
+          <a:off x="0" y="0"/>
+          <a:ext cx="0" cy="0"/>
+          <a:chOff x="0" y="0"/>
+          <a:chExt cx="0" cy="0"/>
+        </a:xfrm>
+      </p:grpSpPr>
+      <p:sp>
+        <p:nvSpPr>
+          <p:cNvPr id="2" name="Text 0"/>
+          <p:cNvSpPr/>
+          <p:nvPr>
+            <p:ph idx="100" type="body" hasCustomPrompt="1"/>
+          </p:nvPr>
+        </p:nvSpPr>
+        <p:spPr>
+          <a:xfrm>
+            <a:off x="548640" y="274320"/>
+            <a:ext cx="11094415" cy="320040"/>
+          </a:xfrm>
+          <a:prstGeom prst="rect">
+            <a:avLst/>
+          </a:prstGeom>
+          <a:noFill/>
+          <a:ln/>
+        </p:spPr>
+        <p:txBody>
+          <a:bodyPr wrap="square" lIns="0" tIns="0" rIns="0" bIns="0" rtlCol="0" anchor="ctr"/>
+          <a:lstStyle/>
+          <a:p>
+            <a:pPr algn="l" indent="0" marL="0">
+              <a:buNone/>
+            </a:pPr>
+            <a:r>
+              <a:rPr lang="ja-JP" altLang="en-US" sz="1400" b="1" dirty="0">
+                <a:solidFill>
+                  <a:schemeClr val="accent1"/>
+                </a:solidFill>
+              </a:rPr>
+              <a:t>7. 導入先からの評価</a:t>
+            </a:r>
+            <a:endParaRPr lang="ja-JP" sz="1400" dirty="0"/>
+          </a:p>
+        </p:txBody>
+      </p:sp>
+      <p:sp>
+        <p:nvSpPr>
+          <p:cNvPr id="3" name="Text 0"/>
+          <p:cNvSpPr/>
+          <p:nvPr>
+            <p:ph idx="101" type="title" hasCustomPrompt="1"/>
+          </p:nvPr>
+        </p:nvSpPr>
+        <p:spPr>
+          <a:xfrm>
+            <a:off x="548640" y="594360"/>
+            <a:ext cx="11094415" cy="731520"/>
+          </a:xfrm>
+          <a:prstGeom prst="rect">
+            <a:avLst/>
+          </a:prstGeom>
+          <a:noFill/>
+          <a:ln/>
+        </p:spPr>
+        <p:txBody>
+          <a:bodyPr wrap="square" lIns="0" tIns="0" rIns="0" bIns="0" rtlCol="0" anchor="ctr"/>
+          <a:lstStyle/>
+          <a:p>
+            <a:pPr algn="l" indent="0" marL="0">
+              <a:buNone/>
+            </a:pPr>
+            <a:r>
+              <a:rPr lang="ja-JP" altLang="en-US" sz="3200" b="1" dirty="0">
+                <a:solidFill>
+                  <a:schemeClr val="tx2"/>
+                </a:solidFill>
+              </a:rPr>
+              <a:t>導入先の評価 ①　良かった点</a:t>
+            </a:r>
+            <a:endParaRPr lang="ja-JP" sz="3200" dirty="0"/>
+          </a:p>
+        </p:txBody>
+      </p:sp>
+      <p:sp>
+        <p:nvSpPr>
+          <p:cNvPr id="4" name="良かった点_前置き"/>
+          <p:cNvSpPr txBox="1"/>
+          <p:nvPr/>
+        </p:nvSpPr>
+        <p:spPr>
+          <a:xfrm>
+            <a:off x="548640" y="1463040"/>
+            <a:ext cx="11094415" cy="457200"/>
+          </a:xfrm>
+          <a:prstGeom prst="rect">
+            <a:avLst/>
+          </a:prstGeom>
+          <a:noFill/>
+          <a:ln/>
+        </p:spPr>
+        <p:txBody>
+          <a:bodyPr wrap="square" lIns="0" tIns="0" rIns="0" bIns="0" rtlCol="0" anchor="ctr"/>
+          <a:lstStyle/>
+          <a:p>
+            <a:pPr indent="0" marL="0">
+              <a:buNone/>
+            </a:pPr>
+            <a:r>
+              <a:rPr lang="ja-JP" altLang="en-US" sz="1800" dirty="0">
+                <a:solidFill>
+                  <a:schemeClr val="accent4"/>
+                </a:solidFill>
+              </a:rPr>
+              <a:t>導入先の工場で使っていただいた方から、次の評価をいただきました</a:t>
+            </a:r>
+            <a:endParaRPr lang="ja-JP" sz="1800" dirty="0"/>
+          </a:p>
+        </p:txBody>
+      </p:sp>
+      <p:sp>
+        <p:nvSpPr>
+          <p:cNvPr id="5" name="良かった点1"/>
+          <p:cNvSpPr/>
+          <p:nvPr/>
+        </p:nvSpPr>
+        <p:spPr>
+          <a:xfrm>
+            <a:off x="548640" y="2103120"/>
+            <a:ext cx="11094415" cy="713232"/>
+          </a:xfrm>
+          <a:prstGeom prst="roundRect">
+            <a:avLst>
+              <a:gd name="adj" fmla="val 10256"/>
+            </a:avLst>
+          </a:prstGeom>
+          <a:solidFill>
+            <a:schemeClr val="bg2"/>
+          </a:solidFill>
+          <a:ln w="12700">
+            <a:solidFill>
+              <a:schemeClr val="bg2"/>
+            </a:solidFill>
+            <a:prstDash val="solid"/>
+          </a:ln>
+        </p:spPr>
+      </p:sp>
+      <p:sp>
+        <p:nvSpPr>
+          <p:cNvPr id="6" name="良かった点1_印"/>
+          <p:cNvSpPr/>
+          <p:nvPr/>
+        </p:nvSpPr>
+        <p:spPr>
+          <a:xfrm>
+            <a:off x="777240" y="2231136"/>
+            <a:ext cx="457200" cy="457200"/>
+          </a:xfrm>
+          <a:prstGeom prst="ellipse">
+            <a:avLst/>
+          </a:prstGeom>
+          <a:solidFill>
+            <a:schemeClr val="accent1"/>
+          </a:solidFill>
+          <a:ln w="12700">
+            <a:solidFill>
+              <a:schemeClr val="accent1"/>
+            </a:solidFill>
+            <a:prstDash val="solid"/>
+          </a:ln>
+        </p:spPr>
+      </p:sp>
+      <p:sp>
+        <p:nvSpPr>
+          <p:cNvPr id="7" name="良かった点1_印_文字"/>
+          <p:cNvSpPr txBox="1"/>
+          <p:nvPr/>
+        </p:nvSpPr>
+        <p:spPr>
+          <a:xfrm>
+            <a:off x="777240" y="2231136"/>
+            <a:ext cx="457200" cy="457200"/>
+          </a:xfrm>
+          <a:prstGeom prst="rect">
+            <a:avLst/>
+          </a:prstGeom>
+          <a:noFill/>
+          <a:ln/>
+        </p:spPr>
+        <p:txBody>
+          <a:bodyPr wrap="square" lIns="0" tIns="0" rIns="0" bIns="0" rtlCol="0" anchor="ctr"/>
+          <a:lstStyle/>
+          <a:p>
+            <a:pPr algn="ctr" indent="0" marL="0">
+              <a:buNone/>
+            </a:pPr>
+            <a:r>
+              <a:rPr lang="ja-JP" altLang="en-US" sz="1300" b="1" dirty="0">
+                <a:solidFill>
+                  <a:schemeClr val="bg1"/>
+                </a:solidFill>
+              </a:rPr>
+              <a:t>✓</a:t>
+            </a:r>
+            <a:endParaRPr lang="ja-JP" sz="1300" dirty="0"/>
+          </a:p>
+        </p:txBody>
+      </p:sp>
+      <p:sp>
+        <p:nvSpPr>
+          <p:cNvPr id="8" name="良かった点1_文字"/>
+          <p:cNvSpPr txBox="1"/>
+          <p:nvPr/>
+        </p:nvSpPr>
+        <p:spPr>
+          <a:xfrm>
+            <a:off x="1463040" y="2103120"/>
+            <a:ext cx="9905695" cy="713232"/>
+          </a:xfrm>
+          <a:prstGeom prst="rect">
+            <a:avLst/>
+          </a:prstGeom>
+          <a:noFill/>
+          <a:ln/>
+        </p:spPr>
+        <p:txBody>
+          <a:bodyPr wrap="square" lIns="0" tIns="0" rIns="0" bIns="0" rtlCol="0" anchor="ctr"/>
+          <a:lstStyle/>
+          <a:p>
+            <a:pPr indent="0" marL="0">
+              <a:buNone/>
+            </a:pPr>
+            <a:r>
+              <a:rPr lang="ja-JP" altLang="en-US" sz="2100" b="1" dirty="0">
+                <a:solidFill>
+                  <a:schemeClr val="tx2"/>
+                </a:solidFill>
+              </a:rPr>
+              <a:t>導入が簡単だった</a:t>
+            </a:r>
+            <a:endParaRPr lang="ja-JP" sz="2100" dirty="0"/>
+          </a:p>
+        </p:txBody>
+      </p:sp>
+      <p:sp>
+        <p:nvSpPr>
+          <p:cNvPr id="9" name="良かった点2"/>
+          <p:cNvSpPr/>
+          <p:nvPr/>
+        </p:nvSpPr>
+        <p:spPr>
+          <a:xfrm>
+            <a:off x="548640" y="2962656"/>
+            <a:ext cx="11094415" cy="713232"/>
+          </a:xfrm>
+          <a:prstGeom prst="roundRect">
+            <a:avLst>
+              <a:gd name="adj" fmla="val 10256"/>
+            </a:avLst>
+          </a:prstGeom>
+          <a:solidFill>
+            <a:schemeClr val="bg2"/>
+          </a:solidFill>
+          <a:ln w="12700">
+            <a:solidFill>
+              <a:schemeClr val="bg2"/>
+            </a:solidFill>
+            <a:prstDash val="solid"/>
+          </a:ln>
+        </p:spPr>
+      </p:sp>
+      <p:sp>
+        <p:nvSpPr>
+          <p:cNvPr id="10" name="良かった点2_印"/>
+          <p:cNvSpPr/>
+          <p:nvPr/>
+        </p:nvSpPr>
+        <p:spPr>
+          <a:xfrm>
+            <a:off x="777240" y="3090672"/>
+            <a:ext cx="457200" cy="457200"/>
+          </a:xfrm>
+          <a:prstGeom prst="ellipse">
+            <a:avLst/>
+          </a:prstGeom>
+          <a:solidFill>
+            <a:schemeClr val="accent1"/>
+          </a:solidFill>
+          <a:ln w="12700">
+            <a:solidFill>
+              <a:schemeClr val="accent1"/>
+            </a:solidFill>
+            <a:prstDash val="solid"/>
+          </a:ln>
+        </p:spPr>
+      </p:sp>
+      <p:sp>
+        <p:nvSpPr>
+          <p:cNvPr id="11" name="良かった点2_印_文字"/>
+          <p:cNvSpPr txBox="1"/>
+          <p:nvPr/>
+        </p:nvSpPr>
+        <p:spPr>
+          <a:xfrm>
+            <a:off x="777240" y="3090672"/>
+            <a:ext cx="457200" cy="457200"/>
+          </a:xfrm>
+          <a:prstGeom prst="rect">
+            <a:avLst/>
+          </a:prstGeom>
+          <a:noFill/>
+          <a:ln/>
+        </p:spPr>
+        <p:txBody>
+          <a:bodyPr wrap="square" lIns="0" tIns="0" rIns="0" bIns="0" rtlCol="0" anchor="ctr"/>
+          <a:lstStyle/>
+          <a:p>
+            <a:pPr algn="ctr" indent="0" marL="0">
+              <a:buNone/>
+            </a:pPr>
+            <a:r>
+              <a:rPr lang="ja-JP" altLang="en-US" sz="1300" b="1" dirty="0">
+                <a:solidFill>
+                  <a:schemeClr val="bg1"/>
+                </a:solidFill>
+              </a:rPr>
+              <a:t>✓</a:t>
+            </a:r>
+            <a:endParaRPr lang="ja-JP" sz="1300" dirty="0"/>
+          </a:p>
+        </p:txBody>
+      </p:sp>
+      <p:sp>
+        <p:nvSpPr>
+          <p:cNvPr id="12" name="良かった点2_文字"/>
+          <p:cNvSpPr txBox="1"/>
+          <p:nvPr/>
+        </p:nvSpPr>
+        <p:spPr>
+          <a:xfrm>
+            <a:off x="1463040" y="2962656"/>
+            <a:ext cx="9905695" cy="713232"/>
+          </a:xfrm>
+          <a:prstGeom prst="rect">
+            <a:avLst/>
+          </a:prstGeom>
+          <a:noFill/>
+          <a:ln/>
+        </p:spPr>
+        <p:txBody>
+          <a:bodyPr wrap="square" lIns="0" tIns="0" rIns="0" bIns="0" rtlCol="0" anchor="ctr"/>
+          <a:lstStyle/>
+          <a:p>
+            <a:pPr indent="0" marL="0">
+              <a:buNone/>
+            </a:pPr>
+            <a:r>
+              <a:rPr lang="ja-JP" altLang="en-US" sz="2100" b="1" dirty="0">
+                <a:solidFill>
+                  <a:schemeClr val="tx2"/>
+                </a:solidFill>
+              </a:rPr>
+              <a:t>操作が分かりやすかった</a:t>
+            </a:r>
+            <a:endParaRPr lang="ja-JP" sz="2100" dirty="0"/>
+          </a:p>
+        </p:txBody>
+      </p:sp>
+      <p:sp>
+        <p:nvSpPr>
+          <p:cNvPr id="13" name="良かった点3"/>
+          <p:cNvSpPr/>
+          <p:nvPr/>
+        </p:nvSpPr>
+        <p:spPr>
+          <a:xfrm>
+            <a:off x="548640" y="3822192"/>
+            <a:ext cx="11094415" cy="713232"/>
+          </a:xfrm>
+          <a:prstGeom prst="roundRect">
+            <a:avLst>
+              <a:gd name="adj" fmla="val 10256"/>
+            </a:avLst>
+          </a:prstGeom>
+          <a:solidFill>
+            <a:schemeClr val="bg2"/>
+          </a:solidFill>
+          <a:ln w="12700">
+            <a:solidFill>
+              <a:schemeClr val="bg2"/>
+            </a:solidFill>
+            <a:prstDash val="solid"/>
+          </a:ln>
+        </p:spPr>
+      </p:sp>
+      <p:sp>
+        <p:nvSpPr>
+          <p:cNvPr id="14" name="良かった点3_印"/>
+          <p:cNvSpPr/>
+          <p:nvPr/>
+        </p:nvSpPr>
+        <p:spPr>
+          <a:xfrm>
+            <a:off x="777240" y="3950208"/>
+            <a:ext cx="457200" cy="457200"/>
+          </a:xfrm>
+          <a:prstGeom prst="ellipse">
+            <a:avLst/>
+          </a:prstGeom>
+          <a:solidFill>
+            <a:schemeClr val="accent1"/>
+          </a:solidFill>
+          <a:ln w="12700">
+            <a:solidFill>
+              <a:schemeClr val="accent1"/>
+            </a:solidFill>
+            <a:prstDash val="solid"/>
+          </a:ln>
+        </p:spPr>
+      </p:sp>
+      <p:sp>
+        <p:nvSpPr>
+          <p:cNvPr id="15" name="良かった点3_印_文字"/>
+          <p:cNvSpPr txBox="1"/>
+          <p:nvPr/>
+        </p:nvSpPr>
+        <p:spPr>
+          <a:xfrm>
+            <a:off x="777240" y="3950208"/>
+            <a:ext cx="457200" cy="457200"/>
+          </a:xfrm>
+          <a:prstGeom prst="rect">
+            <a:avLst/>
+          </a:prstGeom>
+          <a:noFill/>
+          <a:ln/>
+        </p:spPr>
+        <p:txBody>
+          <a:bodyPr wrap="square" lIns="0" tIns="0" rIns="0" bIns="0" rtlCol="0" anchor="ctr"/>
+          <a:lstStyle/>
+          <a:p>
+            <a:pPr algn="ctr" indent="0" marL="0">
+              <a:buNone/>
+            </a:pPr>
+            <a:r>
+              <a:rPr lang="ja-JP" altLang="en-US" sz="1300" b="1" dirty="0">
+                <a:solidFill>
+                  <a:schemeClr val="bg1"/>
+                </a:solidFill>
+              </a:rPr>
+              <a:t>✓</a:t>
+            </a:r>
+            <a:endParaRPr lang="ja-JP" sz="1300" dirty="0"/>
+          </a:p>
+        </p:txBody>
+      </p:sp>
+      <p:sp>
+        <p:nvSpPr>
+          <p:cNvPr id="16" name="良かった点3_文字"/>
+          <p:cNvSpPr txBox="1"/>
+          <p:nvPr/>
+        </p:nvSpPr>
+        <p:spPr>
+          <a:xfrm>
+            <a:off x="1463040" y="3822192"/>
+            <a:ext cx="9905695" cy="713232"/>
+          </a:xfrm>
+          <a:prstGeom prst="rect">
+            <a:avLst/>
+          </a:prstGeom>
+          <a:noFill/>
+          <a:ln/>
+        </p:spPr>
+        <p:txBody>
+          <a:bodyPr wrap="square" lIns="0" tIns="0" rIns="0" bIns="0" rtlCol="0" anchor="ctr"/>
+          <a:lstStyle/>
+          <a:p>
+            <a:pPr indent="0" marL="0">
+              <a:buNone/>
+            </a:pPr>
+            <a:r>
+              <a:rPr lang="ja-JP" altLang="en-US" sz="2100" b="1" dirty="0">
+                <a:solidFill>
+                  <a:schemeClr val="tx2"/>
+                </a:solidFill>
+              </a:rPr>
+              <a:t>作業にかかった時間が記録されるのが便利</a:t>
+            </a:r>
+            <a:endParaRPr lang="ja-JP" sz="2100" dirty="0"/>
+          </a:p>
+        </p:txBody>
+      </p:sp>
+      <p:sp>
+        <p:nvSpPr>
+          <p:cNvPr id="17" name="良かった点4"/>
+          <p:cNvSpPr/>
+          <p:nvPr/>
+        </p:nvSpPr>
+        <p:spPr>
+          <a:xfrm>
+            <a:off x="548640" y="4681728"/>
+            <a:ext cx="11094415" cy="713232"/>
+          </a:xfrm>
+          <a:prstGeom prst="roundRect">
+            <a:avLst>
+              <a:gd name="adj" fmla="val 10256"/>
+            </a:avLst>
+          </a:prstGeom>
+          <a:solidFill>
+            <a:schemeClr val="bg2"/>
+          </a:solidFill>
+          <a:ln w="12700">
+            <a:solidFill>
+              <a:schemeClr val="bg2"/>
+            </a:solidFill>
+            <a:prstDash val="solid"/>
+          </a:ln>
+        </p:spPr>
+      </p:sp>
+      <p:sp>
+        <p:nvSpPr>
+          <p:cNvPr id="18" name="良かった点4_印"/>
+          <p:cNvSpPr/>
+          <p:nvPr/>
+        </p:nvSpPr>
+        <p:spPr>
+          <a:xfrm>
+            <a:off x="777240" y="4809744"/>
+            <a:ext cx="457200" cy="457200"/>
+          </a:xfrm>
+          <a:prstGeom prst="ellipse">
+            <a:avLst/>
+          </a:prstGeom>
+          <a:solidFill>
+            <a:schemeClr val="accent1"/>
+          </a:solidFill>
+          <a:ln w="12700">
+            <a:solidFill>
+              <a:schemeClr val="accent1"/>
+            </a:solidFill>
+            <a:prstDash val="solid"/>
+          </a:ln>
+        </p:spPr>
+      </p:sp>
+      <p:sp>
+        <p:nvSpPr>
+          <p:cNvPr id="19" name="良かった点4_印_文字"/>
+          <p:cNvSpPr txBox="1"/>
+          <p:nvPr/>
+        </p:nvSpPr>
+        <p:spPr>
+          <a:xfrm>
+            <a:off x="777240" y="4809744"/>
+            <a:ext cx="457200" cy="457200"/>
+          </a:xfrm>
+          <a:prstGeom prst="rect">
+            <a:avLst/>
+          </a:prstGeom>
+          <a:noFill/>
+          <a:ln/>
+        </p:spPr>
+        <p:txBody>
+          <a:bodyPr wrap="square" lIns="0" tIns="0" rIns="0" bIns="0" rtlCol="0" anchor="ctr"/>
+          <a:lstStyle/>
+          <a:p>
+            <a:pPr algn="ctr" indent="0" marL="0">
+              <a:buNone/>
+            </a:pPr>
+            <a:r>
+              <a:rPr lang="ja-JP" altLang="en-US" sz="1300" b="1" dirty="0">
+                <a:solidFill>
+                  <a:schemeClr val="bg1"/>
+                </a:solidFill>
+              </a:rPr>
+              <a:t>✓</a:t>
+            </a:r>
+            <a:endParaRPr lang="ja-JP" sz="1300" dirty="0"/>
+          </a:p>
+        </p:txBody>
+      </p:sp>
+      <p:sp>
+        <p:nvSpPr>
+          <p:cNvPr id="20" name="良かった点4_文字"/>
+          <p:cNvSpPr txBox="1"/>
+          <p:nvPr/>
+        </p:nvSpPr>
+        <p:spPr>
+          <a:xfrm>
+            <a:off x="1463040" y="4681728"/>
+            <a:ext cx="9905695" cy="713232"/>
+          </a:xfrm>
+          <a:prstGeom prst="rect">
+            <a:avLst/>
+          </a:prstGeom>
+          <a:noFill/>
+          <a:ln/>
+        </p:spPr>
+        <p:txBody>
+          <a:bodyPr wrap="square" lIns="0" tIns="0" rIns="0" bIns="0" rtlCol="0" anchor="ctr"/>
+          <a:lstStyle/>
+          <a:p>
+            <a:pPr indent="0" marL="0">
+              <a:buNone/>
+            </a:pPr>
+            <a:r>
+              <a:rPr lang="ja-JP" altLang="en-US" sz="2100" b="1" dirty="0">
+                <a:solidFill>
+                  <a:schemeClr val="tx2"/>
+                </a:solidFill>
+              </a:rPr>
+              <a:t>急ぎの仕事を見落とさないのが便利</a:t>
+            </a:r>
+            <a:endParaRPr lang="ja-JP" sz="2100" dirty="0"/>
+          </a:p>
+        </p:txBody>
+      </p:sp>
+      <p:sp>
+        <p:nvSpPr>
+          <p:cNvPr id="21" name="良かった点5"/>
+          <p:cNvSpPr/>
+          <p:nvPr/>
+        </p:nvSpPr>
+        <p:spPr>
+          <a:xfrm>
+            <a:off x="548640" y="5541264"/>
+            <a:ext cx="11094415" cy="713232"/>
+          </a:xfrm>
+          <a:prstGeom prst="roundRect">
+            <a:avLst>
+              <a:gd name="adj" fmla="val 10256"/>
+            </a:avLst>
+          </a:prstGeom>
+          <a:solidFill>
+            <a:schemeClr val="bg2"/>
+          </a:solidFill>
+          <a:ln w="12700">
+            <a:solidFill>
+              <a:schemeClr val="bg2"/>
+            </a:solidFill>
+            <a:prstDash val="solid"/>
+          </a:ln>
+        </p:spPr>
+      </p:sp>
+      <p:sp>
+        <p:nvSpPr>
+          <p:cNvPr id="22" name="良かった点5_印"/>
+          <p:cNvSpPr/>
+          <p:nvPr/>
+        </p:nvSpPr>
+        <p:spPr>
+          <a:xfrm>
+            <a:off x="777240" y="5669280"/>
+            <a:ext cx="457200" cy="457200"/>
+          </a:xfrm>
+          <a:prstGeom prst="ellipse">
+            <a:avLst/>
+          </a:prstGeom>
+          <a:solidFill>
+            <a:schemeClr val="accent1"/>
+          </a:solidFill>
+          <a:ln w="12700">
+            <a:solidFill>
+              <a:schemeClr val="accent1"/>
+            </a:solidFill>
+            <a:prstDash val="solid"/>
+          </a:ln>
+        </p:spPr>
+      </p:sp>
+      <p:sp>
+        <p:nvSpPr>
+          <p:cNvPr id="23" name="良かった点5_印_文字"/>
+          <p:cNvSpPr txBox="1"/>
+          <p:nvPr/>
+        </p:nvSpPr>
+        <p:spPr>
+          <a:xfrm>
+            <a:off x="777240" y="5669280"/>
+            <a:ext cx="457200" cy="457200"/>
+          </a:xfrm>
+          <a:prstGeom prst="rect">
+            <a:avLst/>
+          </a:prstGeom>
+          <a:noFill/>
+          <a:ln/>
+        </p:spPr>
+        <p:txBody>
+          <a:bodyPr wrap="square" lIns="0" tIns="0" rIns="0" bIns="0" rtlCol="0" anchor="ctr"/>
+          <a:lstStyle/>
+          <a:p>
+            <a:pPr algn="ctr" indent="0" marL="0">
+              <a:buNone/>
+            </a:pPr>
+            <a:r>
+              <a:rPr lang="ja-JP" altLang="en-US" sz="1300" b="1" dirty="0">
+                <a:solidFill>
+                  <a:schemeClr val="bg1"/>
+                </a:solidFill>
+              </a:rPr>
+              <a:t>✓</a:t>
+            </a:r>
+            <a:endParaRPr lang="ja-JP" sz="1300" dirty="0"/>
+          </a:p>
+        </p:txBody>
+      </p:sp>
+      <p:sp>
+        <p:nvSpPr>
+          <p:cNvPr id="24" name="良かった点5_文字"/>
+          <p:cNvSpPr txBox="1"/>
+          <p:nvPr/>
+        </p:nvSpPr>
+        <p:spPr>
+          <a:xfrm>
+            <a:off x="1463040" y="5541264"/>
+            <a:ext cx="9905695" cy="713232"/>
+          </a:xfrm>
+          <a:prstGeom prst="rect">
+            <a:avLst/>
+          </a:prstGeom>
+          <a:noFill/>
+          <a:ln/>
+        </p:spPr>
+        <p:txBody>
+          <a:bodyPr wrap="square" lIns="0" tIns="0" rIns="0" bIns="0" rtlCol="0" anchor="ctr"/>
+          <a:lstStyle/>
+          <a:p>
+            <a:pPr indent="0" marL="0">
+              <a:buNone/>
+            </a:pPr>
+            <a:r>
+              <a:rPr lang="ja-JP" altLang="en-US" sz="2100" b="1" dirty="0">
+                <a:solidFill>
+                  <a:schemeClr val="tx2"/>
+                </a:solidFill>
+              </a:rPr>
+              <a:t>ダッシュボードを見て、空いている機械がすぐ見つかるのが便利だった</a:t>
+            </a:r>
+            <a:endParaRPr lang="ja-JP" sz="2100" dirty="0"/>
+          </a:p>
+        </p:txBody>
+      </p:sp>
+      <p:sp>
+        <p:nvSpPr>
+          <p:cNvPr id="25" name="Slide Number Placeholder 0"/>
+          <p:cNvSpPr>
+            <a:spLocks noGrp="1"/>
+          </p:cNvSpPr>
+          <p:nvPr>
+            <p:ph type="sldNum" sz="quarter" idx="4294967295"/>
+          </p:nvPr>
+        </p:nvSpPr>
+        <p:spPr>
+          <a:xfrm>
+            <a:off x="10911535" y="6400800"/>
+            <a:ext cx="731520" cy="274320"/>
+          </a:xfrm>
+          <a:prstGeom prst="rect">
+            <a:avLst/>
+          </a:prstGeom>
+          <a:extLst>
+            <a:ext uri="{C572A759-6A51-4108-AA02-DFA0A04FC94B}">
+              <ma14:wrappingTextBoxFlag xmlns:ma14="http://schemas.microsoft.com/office/mac/drawingml/2011/main" val="0"/>
+            </a:ext>
+          </a:extLst>
+        </p:spPr>
+        <p:txBody>
+          <a:bodyPr lIns="0" tIns="0" rIns="0" bIns="0"/>
+          <a:lstStyle>
+            <a:lvl1pPr>
+              <a:defRPr sz="1100">
+                <a:solidFill>
+                  <a:schemeClr val="accent3"/>
+                </a:solidFill>
+              </a:defRPr>
+            </a:lvl1pPr>
+          </a:lstStyle>
+          <a:p>
+            <a:pPr algn="r"/>
+            <a:fld id="{F7021451-1387-4CA6-816F-3879F97B5CBC}" type="slidenum">
+              <a:rPr b="0" lang="en-US"/>
+              <a:t>1</a:t>
+            </a:fld>
+            <a:endParaRPr lang="en-US"/>
+          </a:p>
+        </p:txBody>
+      </p:sp>
+    </p:spTree>
+  </p:cSld>
+  <p:clrMapOvr>
+    <a:masterClrMapping/>
+  </p:clrMapOvr>
+</p:sld>
+</file>
+
+<file path=ppt/slides/slide15.xml><?xml version="1.0" encoding="utf-8"?>
+<p:sld xmlns:a="http://schemas.openxmlformats.org/drawingml/2006/main" xmlns:r="http://schemas.openxmlformats.org/officeDocument/2006/relationships" xmlns:p="http://schemas.openxmlformats.org/presentationml/2006/main">
+  <p:cSld name="Slide 2">
+    <p:spTree>
+      <p:nvGrpSpPr>
+        <p:cNvPr id="1" name=""/>
+        <p:cNvGrpSpPr/>
+        <p:nvPr/>
+      </p:nvGrpSpPr>
+      <p:grpSpPr>
+        <a:xfrm>
+          <a:off x="0" y="0"/>
+          <a:ext cx="0" cy="0"/>
+          <a:chOff x="0" y="0"/>
+          <a:chExt cx="0" cy="0"/>
+        </a:xfrm>
+      </p:grpSpPr>
+      <p:sp>
+        <p:nvSpPr>
+          <p:cNvPr id="2" name="Text 0"/>
+          <p:cNvSpPr/>
+          <p:nvPr>
+            <p:ph idx="100" type="body" hasCustomPrompt="1"/>
+          </p:nvPr>
+        </p:nvSpPr>
+        <p:spPr>
+          <a:xfrm>
+            <a:off x="548640" y="274320"/>
+            <a:ext cx="11094415" cy="320040"/>
+          </a:xfrm>
+          <a:prstGeom prst="rect">
+            <a:avLst/>
+          </a:prstGeom>
+          <a:noFill/>
+          <a:ln/>
+        </p:spPr>
+        <p:txBody>
+          <a:bodyPr wrap="square" lIns="0" tIns="0" rIns="0" bIns="0" rtlCol="0" anchor="ctr"/>
+          <a:lstStyle/>
+          <a:p>
+            <a:pPr algn="l" indent="0" marL="0">
+              <a:buNone/>
+            </a:pPr>
+            <a:r>
+              <a:rPr lang="ja-JP" altLang="en-US" sz="1400" b="1" dirty="0">
+                <a:solidFill>
+                  <a:schemeClr val="accent1"/>
+                </a:solidFill>
+              </a:rPr>
+              <a:t>7. 導入先からの評価</a:t>
+            </a:r>
+            <a:endParaRPr lang="ja-JP" sz="1400" dirty="0"/>
+          </a:p>
+        </p:txBody>
+      </p:sp>
+      <p:sp>
+        <p:nvSpPr>
+          <p:cNvPr id="3" name="Text 0"/>
+          <p:cNvSpPr/>
+          <p:nvPr>
+            <p:ph idx="101" type="title" hasCustomPrompt="1"/>
+          </p:nvPr>
+        </p:nvSpPr>
+        <p:spPr>
+          <a:xfrm>
+            <a:off x="548640" y="594360"/>
+            <a:ext cx="11094415" cy="731520"/>
+          </a:xfrm>
+          <a:prstGeom prst="rect">
+            <a:avLst/>
+          </a:prstGeom>
+          <a:noFill/>
+          <a:ln/>
+        </p:spPr>
+        <p:txBody>
+          <a:bodyPr wrap="square" lIns="0" tIns="0" rIns="0" bIns="0" rtlCol="0" anchor="ctr"/>
+          <a:lstStyle/>
+          <a:p>
+            <a:pPr algn="l" indent="0" marL="0">
+              <a:buNone/>
+            </a:pPr>
+            <a:r>
+              <a:rPr lang="ja-JP" altLang="en-US" sz="3200" b="1" dirty="0">
+                <a:solidFill>
+                  <a:schemeClr val="tx2"/>
+                </a:solidFill>
+              </a:rPr>
+              <a:t>導入先の評価 ②　悪かった点と、直したところ</a:t>
+            </a:r>
+            <a:endParaRPr lang="ja-JP" sz="3200" dirty="0"/>
+          </a:p>
+        </p:txBody>
+      </p:sp>
+      <p:sp>
+        <p:nvSpPr>
+          <p:cNvPr id="4" name="直した1_評価"/>
+          <p:cNvSpPr/>
+          <p:nvPr/>
+        </p:nvSpPr>
+        <p:spPr>
+          <a:xfrm>
+            <a:off x="548640" y="1554480"/>
+            <a:ext cx="4023360" cy="2148840"/>
+          </a:xfrm>
+          <a:prstGeom prst="roundRect">
+            <a:avLst>
+              <a:gd name="adj" fmla="val 3404"/>
+            </a:avLst>
+          </a:prstGeom>
+          <a:solidFill>
+            <a:schemeClr val="bg2"/>
+          </a:solidFill>
+          <a:ln w="12700">
+            <a:solidFill>
+              <a:schemeClr val="bg2"/>
+            </a:solidFill>
+            <a:prstDash val="solid"/>
+          </a:ln>
+        </p:spPr>
+      </p:sp>
+      <p:sp>
+        <p:nvSpPr>
+          <p:cNvPr id="5" name="直した1_評価_文字"/>
+          <p:cNvSpPr txBox="1"/>
+          <p:nvPr/>
+        </p:nvSpPr>
+        <p:spPr>
+          <a:xfrm>
+            <a:off x="822960" y="1554480"/>
+            <a:ext cx="3474720" cy="2148840"/>
+          </a:xfrm>
+          <a:prstGeom prst="rect">
+            <a:avLst/>
+          </a:prstGeom>
+          <a:noFill/>
+          <a:ln/>
+        </p:spPr>
+        <p:txBody>
+          <a:bodyPr wrap="square" lIns="0" tIns="0" rIns="0" bIns="0" rtlCol="0" anchor="ctr"/>
+          <a:lstStyle/>
+          <a:p>
+            <a:pPr indent="0" marL="0">
+              <a:buNone/>
+            </a:pPr>
+            <a:r>
+              <a:rPr lang="ja-JP" altLang="en-US" sz="1800" b="1" dirty="0">
+                <a:solidFill>
+                  <a:schemeClr val="tx2"/>
+                </a:solidFill>
+              </a:rPr>
+              <a:t>タッチを忘れる人がいた</a:t>
+            </a:r>
+            <a:endParaRPr lang="ja-JP" sz="1800" dirty="0"/>
+          </a:p>
+        </p:txBody>
+      </p:sp>
+      <p:sp>
+        <p:nvSpPr>
+          <p:cNvPr id="6" name="直した1_矢印"/>
+          <p:cNvSpPr/>
+          <p:nvPr/>
+        </p:nvSpPr>
+        <p:spPr>
+          <a:xfrm>
+            <a:off x="4709160" y="2427732"/>
+            <a:ext cx="457200" cy="402336"/>
+          </a:xfrm>
+          <a:prstGeom prst="rightArrow">
+            <a:avLst/>
+          </a:prstGeom>
+          <a:solidFill>
+            <a:schemeClr val="accent1"/>
+          </a:solidFill>
+          <a:ln w="12700">
+            <a:solidFill>
+              <a:schemeClr val="accent1"/>
+            </a:solidFill>
+            <a:prstDash val="solid"/>
+          </a:ln>
+        </p:spPr>
+      </p:sp>
+      <p:sp>
+        <p:nvSpPr>
+          <p:cNvPr id="7" name="直した1_対応"/>
+          <p:cNvSpPr/>
+          <p:nvPr/>
+        </p:nvSpPr>
+        <p:spPr>
+          <a:xfrm>
+            <a:off x="5303520" y="1554480"/>
+            <a:ext cx="6339535" cy="2148840"/>
+          </a:xfrm>
+          <a:prstGeom prst="roundRect">
+            <a:avLst>
+              <a:gd name="adj" fmla="val 3404"/>
+            </a:avLst>
+          </a:prstGeom>
+          <a:solidFill>
+            <a:schemeClr val="accent5"/>
+          </a:solidFill>
+          <a:ln w="12700">
+            <a:solidFill>
+              <a:schemeClr val="accent5"/>
+            </a:solidFill>
+            <a:prstDash val="solid"/>
+          </a:ln>
+        </p:spPr>
+      </p:sp>
+      <p:sp>
+        <p:nvSpPr>
+          <p:cNvPr id="8" name="直した1_札"/>
+          <p:cNvSpPr/>
+          <p:nvPr/>
+        </p:nvSpPr>
+        <p:spPr>
+          <a:xfrm>
+            <a:off x="5577840" y="1755648"/>
+            <a:ext cx="1554480" cy="384048"/>
+          </a:xfrm>
+          <a:prstGeom prst="roundRect">
+            <a:avLst>
+              <a:gd name="adj" fmla="val 47619"/>
+            </a:avLst>
+          </a:prstGeom>
+          <a:solidFill>
+            <a:schemeClr val="accent1"/>
+          </a:solidFill>
+          <a:ln w="12700">
+            <a:solidFill>
+              <a:schemeClr val="accent1"/>
+            </a:solidFill>
+            <a:prstDash val="solid"/>
+          </a:ln>
+        </p:spPr>
+      </p:sp>
+      <p:sp>
+        <p:nvSpPr>
+          <p:cNvPr id="9" name="直した1_札_文字"/>
+          <p:cNvSpPr txBox="1"/>
+          <p:nvPr/>
+        </p:nvSpPr>
+        <p:spPr>
+          <a:xfrm>
+            <a:off x="5577840" y="1755648"/>
+            <a:ext cx="1554480" cy="384048"/>
+          </a:xfrm>
+          <a:prstGeom prst="rect">
+            <a:avLst/>
+          </a:prstGeom>
+          <a:noFill/>
+          <a:ln/>
+        </p:spPr>
+        <p:txBody>
+          <a:bodyPr wrap="square" lIns="0" tIns="0" rIns="0" bIns="0" rtlCol="0" anchor="ctr"/>
+          <a:lstStyle/>
+          <a:p>
+            <a:pPr algn="ctr" indent="0" marL="0">
+              <a:buNone/>
+            </a:pPr>
+            <a:r>
+              <a:rPr lang="ja-JP" altLang="en-US" sz="1600" b="1" dirty="0">
+                <a:solidFill>
+                  <a:schemeClr val="bg1"/>
+                </a:solidFill>
+              </a:rPr>
+              <a:t>直しました</a:t>
+            </a:r>
+            <a:endParaRPr lang="ja-JP" sz="1600" dirty="0"/>
+          </a:p>
+        </p:txBody>
+      </p:sp>
+      <p:sp>
+        <p:nvSpPr>
+          <p:cNvPr id="10" name="直した1_対応_文字"/>
+          <p:cNvSpPr txBox="1"/>
+          <p:nvPr/>
+        </p:nvSpPr>
+        <p:spPr>
+          <a:xfrm>
+            <a:off x="5577840" y="2249424"/>
+            <a:ext cx="5790895" cy="1307592"/>
+          </a:xfrm>
+          <a:prstGeom prst="rect">
+            <a:avLst/>
+          </a:prstGeom>
+          <a:noFill/>
+          <a:ln/>
+        </p:spPr>
+        <p:txBody>
+          <a:bodyPr wrap="square" lIns="0" tIns="0" rIns="0" bIns="0" rtlCol="0" anchor="t"/>
+          <a:lstStyle/>
+          <a:p>
+            <a:pPr marL="203200" indent="-203200">
+              <a:buSzPct val="100000"/>
+              <a:buChar char="•"/>
+            </a:pPr>
+            <a:r>
+              <a:rPr lang="ja-JP" altLang="en-US" sz="1700" dirty="0">
+                <a:solidFill>
+                  <a:schemeClr val="tx1"/>
+                </a:solidFill>
+              </a:rPr>
+              <a:t>別の機材でタッチすると、前の作業を終えるか確認する</a:t>
+            </a:r>
+            <a:endParaRPr lang="ja-JP" sz="1700" dirty="0"/>
+          </a:p>
+          <a:p>
+            <a:pPr marL="203200" indent="-203200">
+              <a:spcBef>
+                <a:spcPts val="600"/>
+              </a:spcBef>
+              <a:buSzPct val="100000"/>
+              <a:buChar char="•"/>
+            </a:pPr>
+            <a:r>
+              <a:rPr lang="ja-JP" altLang="en-US" sz="1700" dirty="0">
+                <a:solidFill>
+                  <a:schemeClr val="tx1"/>
+                </a:solidFill>
+              </a:rPr>
+              <a:t>長く使用中のままなら、機材の画面と管理画面で知らせる</a:t>
+            </a:r>
+            <a:endParaRPr lang="ja-JP" sz="1700" dirty="0"/>
+          </a:p>
+          <a:p>
+            <a:pPr marL="203200" indent="-203200">
+              <a:spcBef>
+                <a:spcPts val="600"/>
+              </a:spcBef>
+              <a:buSzPct val="100000"/>
+              <a:buChar char="•"/>
+            </a:pPr>
+            <a:r>
+              <a:rPr lang="ja-JP" altLang="en-US" sz="1700" dirty="0">
+                <a:solidFill>
+                  <a:schemeClr val="tx1"/>
+                </a:solidFill>
+              </a:rPr>
+              <a:t>管理者が、終わった時刻を入れて代わりに終了できる</a:t>
+            </a:r>
+            <a:endParaRPr lang="ja-JP" sz="1700" dirty="0"/>
+          </a:p>
+        </p:txBody>
+      </p:sp>
+      <p:sp>
+        <p:nvSpPr>
+          <p:cNvPr id="11" name="直した2_評価"/>
+          <p:cNvSpPr/>
+          <p:nvPr/>
+        </p:nvSpPr>
+        <p:spPr>
+          <a:xfrm>
+            <a:off x="548640" y="3977640"/>
+            <a:ext cx="4023360" cy="2148840"/>
+          </a:xfrm>
+          <a:prstGeom prst="roundRect">
+            <a:avLst>
+              <a:gd name="adj" fmla="val 3404"/>
+            </a:avLst>
+          </a:prstGeom>
+          <a:solidFill>
+            <a:schemeClr val="bg2"/>
+          </a:solidFill>
+          <a:ln w="12700">
+            <a:solidFill>
+              <a:schemeClr val="bg2"/>
+            </a:solidFill>
+            <a:prstDash val="solid"/>
+          </a:ln>
+        </p:spPr>
+      </p:sp>
+      <p:sp>
+        <p:nvSpPr>
+          <p:cNvPr id="12" name="直した2_評価_文字"/>
+          <p:cNvSpPr txBox="1"/>
+          <p:nvPr/>
+        </p:nvSpPr>
+        <p:spPr>
+          <a:xfrm>
+            <a:off x="822960" y="3977640"/>
+            <a:ext cx="3474720" cy="2148840"/>
+          </a:xfrm>
+          <a:prstGeom prst="rect">
+            <a:avLst/>
+          </a:prstGeom>
+          <a:noFill/>
+          <a:ln/>
+        </p:spPr>
+        <p:txBody>
+          <a:bodyPr wrap="square" lIns="0" tIns="0" rIns="0" bIns="0" rtlCol="0" anchor="ctr"/>
+          <a:lstStyle/>
+          <a:p>
+            <a:pPr indent="0" marL="0">
+              <a:buNone/>
+            </a:pPr>
+            <a:r>
+              <a:rPr lang="ja-JP" altLang="en-US" sz="1800" b="1" dirty="0">
+                <a:solidFill>
+                  <a:schemeClr val="tx2"/>
+                </a:solidFill>
+              </a:rPr>
+              <a:t>毎週やるタスクも、</a:t>
+            </a:r>
+            <a:endParaRPr lang="ja-JP" sz="1800" dirty="0"/>
+          </a:p>
+          <a:p>
+            <a:pPr indent="0" marL="0">
+              <a:buNone/>
+            </a:pPr>
+            <a:r>
+              <a:rPr lang="ja-JP" altLang="en-US" sz="1800" b="1" dirty="0">
+                <a:solidFill>
+                  <a:schemeClr val="tx2"/>
+                </a:solidFill>
+              </a:rPr>
+              <a:t>毎回入れるのが面倒だった</a:t>
+            </a:r>
+            <a:endParaRPr lang="ja-JP" sz="1800" dirty="0"/>
+          </a:p>
+        </p:txBody>
+      </p:sp>
+      <p:sp>
+        <p:nvSpPr>
+          <p:cNvPr id="13" name="直した2_矢印"/>
+          <p:cNvSpPr/>
+          <p:nvPr/>
+        </p:nvSpPr>
+        <p:spPr>
+          <a:xfrm>
+            <a:off x="4709160" y="4850892"/>
+            <a:ext cx="457200" cy="402336"/>
+          </a:xfrm>
+          <a:prstGeom prst="rightArrow">
+            <a:avLst/>
+          </a:prstGeom>
+          <a:solidFill>
+            <a:schemeClr val="accent1"/>
+          </a:solidFill>
+          <a:ln w="12700">
+            <a:solidFill>
+              <a:schemeClr val="accent1"/>
+            </a:solidFill>
+            <a:prstDash val="solid"/>
+          </a:ln>
+        </p:spPr>
+      </p:sp>
+      <p:sp>
+        <p:nvSpPr>
+          <p:cNvPr id="14" name="直した2_対応"/>
+          <p:cNvSpPr/>
+          <p:nvPr/>
+        </p:nvSpPr>
+        <p:spPr>
+          <a:xfrm>
+            <a:off x="5303520" y="3977640"/>
+            <a:ext cx="6339535" cy="2148840"/>
+          </a:xfrm>
+          <a:prstGeom prst="roundRect">
+            <a:avLst>
+              <a:gd name="adj" fmla="val 3404"/>
+            </a:avLst>
+          </a:prstGeom>
+          <a:solidFill>
+            <a:schemeClr val="accent5"/>
+          </a:solidFill>
+          <a:ln w="12700">
+            <a:solidFill>
+              <a:schemeClr val="accent5"/>
+            </a:solidFill>
+            <a:prstDash val="solid"/>
+          </a:ln>
+        </p:spPr>
+      </p:sp>
+      <p:sp>
+        <p:nvSpPr>
+          <p:cNvPr id="15" name="直した2_札"/>
+          <p:cNvSpPr/>
+          <p:nvPr/>
+        </p:nvSpPr>
+        <p:spPr>
+          <a:xfrm>
+            <a:off x="5577840" y="4178808"/>
+            <a:ext cx="1554480" cy="384048"/>
+          </a:xfrm>
+          <a:prstGeom prst="roundRect">
+            <a:avLst>
+              <a:gd name="adj" fmla="val 47619"/>
+            </a:avLst>
+          </a:prstGeom>
+          <a:solidFill>
+            <a:schemeClr val="accent1"/>
+          </a:solidFill>
+          <a:ln w="12700">
+            <a:solidFill>
+              <a:schemeClr val="accent1"/>
+            </a:solidFill>
+            <a:prstDash val="solid"/>
+          </a:ln>
+        </p:spPr>
+      </p:sp>
+      <p:sp>
+        <p:nvSpPr>
+          <p:cNvPr id="16" name="直した2_札_文字"/>
+          <p:cNvSpPr txBox="1"/>
+          <p:nvPr/>
+        </p:nvSpPr>
+        <p:spPr>
+          <a:xfrm>
+            <a:off x="5577840" y="4178808"/>
+            <a:ext cx="1554480" cy="384048"/>
+          </a:xfrm>
+          <a:prstGeom prst="rect">
+            <a:avLst/>
+          </a:prstGeom>
+          <a:noFill/>
+          <a:ln/>
+        </p:spPr>
+        <p:txBody>
+          <a:bodyPr wrap="square" lIns="0" tIns="0" rIns="0" bIns="0" rtlCol="0" anchor="ctr"/>
+          <a:lstStyle/>
+          <a:p>
+            <a:pPr algn="ctr" indent="0" marL="0">
+              <a:buNone/>
+            </a:pPr>
+            <a:r>
+              <a:rPr lang="ja-JP" altLang="en-US" sz="1600" b="1" dirty="0">
+                <a:solidFill>
+                  <a:schemeClr val="bg1"/>
+                </a:solidFill>
+              </a:rPr>
+              <a:t>直しました</a:t>
+            </a:r>
+            <a:endParaRPr lang="ja-JP" sz="1600" dirty="0"/>
+          </a:p>
+        </p:txBody>
+      </p:sp>
+      <p:sp>
+        <p:nvSpPr>
+          <p:cNvPr id="17" name="直した2_対応_文字"/>
+          <p:cNvSpPr txBox="1"/>
+          <p:nvPr/>
+        </p:nvSpPr>
+        <p:spPr>
+          <a:xfrm>
+            <a:off x="5577840" y="4672584"/>
+            <a:ext cx="5790895" cy="1307592"/>
+          </a:xfrm>
+          <a:prstGeom prst="rect">
+            <a:avLst/>
+          </a:prstGeom>
+          <a:noFill/>
+          <a:ln/>
+        </p:spPr>
+        <p:txBody>
+          <a:bodyPr wrap="square" lIns="0" tIns="0" rIns="0" bIns="0" rtlCol="0" anchor="t"/>
+          <a:lstStyle/>
+          <a:p>
+            <a:pPr marL="203200" indent="-203200">
+              <a:buSzPct val="100000"/>
+              <a:buChar char="•"/>
+            </a:pPr>
+            <a:r>
+              <a:rPr lang="ja-JP" altLang="en-US" sz="1700" dirty="0">
+                <a:solidFill>
+                  <a:schemeClr val="tx1"/>
+                </a:solidFill>
+              </a:rPr>
+              <a:t>毎週の仕事を一度登録すれば、予定日に自動で追加される</a:t>
+            </a:r>
+            <a:endParaRPr lang="ja-JP" sz="1700" dirty="0"/>
+          </a:p>
+          <a:p>
+            <a:pPr marL="203200" indent="-203200">
+              <a:spcBef>
+                <a:spcPts val="600"/>
+              </a:spcBef>
+              <a:buSzPct val="100000"/>
+              <a:buChar char="•"/>
+            </a:pPr>
+            <a:r>
+              <a:rPr lang="ja-JP" altLang="en-US" sz="1700" dirty="0">
+                <a:solidFill>
+                  <a:schemeClr val="tx1"/>
+                </a:solidFill>
+              </a:rPr>
+              <a:t>毎日・毎週（曜日）・毎月（日にち）から選べる</a:t>
+            </a:r>
+            <a:endParaRPr lang="ja-JP" sz="1700" dirty="0"/>
+          </a:p>
+          <a:p>
+            <a:pPr marL="203200" indent="-203200">
+              <a:spcBef>
+                <a:spcPts val="600"/>
+              </a:spcBef>
+              <a:buSzPct val="100000"/>
+              <a:buChar char="•"/>
+            </a:pPr>
+            <a:r>
+              <a:rPr lang="ja-JP" altLang="en-US" sz="1700" dirty="0">
+                <a:solidFill>
+                  <a:schemeClr val="tx1"/>
+                </a:solidFill>
+              </a:rPr>
+              <a:t>前の回が終わっていない間は、新しく追加しない</a:t>
+            </a:r>
+            <a:endParaRPr lang="ja-JP" sz="1700" dirty="0"/>
+          </a:p>
+        </p:txBody>
+      </p:sp>
+      <p:sp>
+        <p:nvSpPr>
+          <p:cNvPr id="25" name="Slide Number Placeholder 0"/>
+          <p:cNvSpPr>
+            <a:spLocks noGrp="1"/>
+          </p:cNvSpPr>
+          <p:nvPr>
+            <p:ph type="sldNum" sz="quarter" idx="4294967295"/>
+          </p:nvPr>
+        </p:nvSpPr>
+        <p:spPr>
+          <a:xfrm>
+            <a:off x="10911535" y="6400800"/>
+            <a:ext cx="731520" cy="274320"/>
+          </a:xfrm>
+          <a:prstGeom prst="rect">
+            <a:avLst/>
+          </a:prstGeom>
+          <a:extLst>
+            <a:ext uri="{C572A759-6A51-4108-AA02-DFA0A04FC94B}">
+              <ma14:wrappingTextBoxFlag xmlns:ma14="http://schemas.microsoft.com/office/mac/drawingml/2011/main" val="0"/>
+            </a:ext>
+          </a:extLst>
+        </p:spPr>
+        <p:txBody>
+          <a:bodyPr lIns="0" tIns="0" rIns="0" bIns="0"/>
+          <a:lstStyle>
+            <a:lvl1pPr>
+              <a:defRPr sz="1100">
+                <a:solidFill>
+                  <a:schemeClr val="accent3"/>
+                </a:solidFill>
+              </a:defRPr>
+            </a:lvl1pPr>
+          </a:lstStyle>
+          <a:p>
+            <a:pPr algn="r"/>
+            <a:fld id="{F7021451-1387-4CA6-816F-3879F97B5CBC}" type="slidenum">
+              <a:rPr b="0" lang="en-US"/>
+              <a:t>2</a:t>
+            </a:fld>
+            <a:endParaRPr lang="en-US"/>
+          </a:p>
+        </p:txBody>
+      </p:sp>
+    </p:spTree>
+  </p:cSld>
+  <p:clrMapOvr>
+    <a:masterClrMapping/>
+  </p:clrMapOvr>
+</p:sld>
+</file>
+
+<file path=ppt/slides/slide16.xml><?xml version="1.0" encoding="utf-8"?>
+<p:sld xmlns:a="http://schemas.openxmlformats.org/drawingml/2006/main" xmlns:r="http://schemas.openxmlformats.org/officeDocument/2006/relationships" xmlns:p="http://schemas.openxmlformats.org/presentationml/2006/main">
+  <p:cSld name="Slide 3">
+    <p:spTree>
+      <p:nvGrpSpPr>
+        <p:cNvPr id="1" name=""/>
+        <p:cNvGrpSpPr/>
+        <p:nvPr/>
+      </p:nvGrpSpPr>
+      <p:grpSpPr>
+        <a:xfrm>
+          <a:off x="0" y="0"/>
+          <a:ext cx="0" cy="0"/>
+          <a:chOff x="0" y="0"/>
+          <a:chExt cx="0" cy="0"/>
+        </a:xfrm>
+      </p:grpSpPr>
+      <p:sp>
+        <p:nvSpPr>
+          <p:cNvPr id="2" name="Text 0"/>
+          <p:cNvSpPr/>
+          <p:nvPr>
+            <p:ph idx="100" type="body" hasCustomPrompt="1"/>
+          </p:nvPr>
+        </p:nvSpPr>
+        <p:spPr>
+          <a:xfrm>
+            <a:off x="548640" y="274320"/>
+            <a:ext cx="11094415" cy="320040"/>
+          </a:xfrm>
+          <a:prstGeom prst="rect">
+            <a:avLst/>
+          </a:prstGeom>
+          <a:noFill/>
+          <a:ln/>
+        </p:spPr>
+        <p:txBody>
+          <a:bodyPr wrap="square" lIns="0" tIns="0" rIns="0" bIns="0" rtlCol="0" anchor="ctr"/>
+          <a:lstStyle/>
+          <a:p>
+            <a:pPr algn="l" indent="0" marL="0">
+              <a:buNone/>
+            </a:pPr>
+            <a:r>
+              <a:rPr lang="ja-JP" altLang="en-US" sz="1400" b="1" dirty="0">
+                <a:solidFill>
+                  <a:schemeClr val="accent1"/>
+                </a:solidFill>
+              </a:rPr>
+              <a:t>7. 導入先からの評価</a:t>
+            </a:r>
+            <a:endParaRPr lang="ja-JP" sz="1400" dirty="0"/>
+          </a:p>
+        </p:txBody>
+      </p:sp>
+      <p:sp>
+        <p:nvSpPr>
+          <p:cNvPr id="3" name="Text 0"/>
+          <p:cNvSpPr/>
+          <p:nvPr>
+            <p:ph idx="101" type="title" hasCustomPrompt="1"/>
+          </p:nvPr>
+        </p:nvSpPr>
+        <p:spPr>
+          <a:xfrm>
+            <a:off x="548640" y="594360"/>
+            <a:ext cx="11094415" cy="731520"/>
+          </a:xfrm>
+          <a:prstGeom prst="rect">
+            <a:avLst/>
+          </a:prstGeom>
+          <a:noFill/>
+          <a:ln/>
+        </p:spPr>
+        <p:txBody>
+          <a:bodyPr wrap="square" lIns="0" tIns="0" rIns="0" bIns="0" rtlCol="0" anchor="ctr"/>
+          <a:lstStyle/>
+          <a:p>
+            <a:pPr algn="l" indent="0" marL="0">
+              <a:buNone/>
+            </a:pPr>
+            <a:r>
+              <a:rPr lang="ja-JP" altLang="en-US" sz="3200" b="1" dirty="0">
+                <a:solidFill>
+                  <a:schemeClr val="tx2"/>
+                </a:solidFill>
+              </a:rPr>
+              <a:t>導入先の評価 ③　これから直すところ</a:t>
+            </a:r>
+            <a:endParaRPr lang="ja-JP" sz="3200" dirty="0"/>
+          </a:p>
+        </p:txBody>
+      </p:sp>
+      <p:sp>
+        <p:nvSpPr>
+          <p:cNvPr id="4" name="これから1_評価"/>
+          <p:cNvSpPr/>
+          <p:nvPr/>
+        </p:nvSpPr>
+        <p:spPr>
+          <a:xfrm>
+            <a:off x="548640" y="1508760"/>
+            <a:ext cx="5120640" cy="1417320"/>
+          </a:xfrm>
+          <a:prstGeom prst="roundRect">
+            <a:avLst>
+              <a:gd name="adj" fmla="val 5161"/>
+            </a:avLst>
+          </a:prstGeom>
+          <a:solidFill>
+            <a:schemeClr val="bg2"/>
+          </a:solidFill>
+          <a:ln w="12700">
+            <a:solidFill>
+              <a:schemeClr val="bg2"/>
+            </a:solidFill>
+            <a:prstDash val="solid"/>
+          </a:ln>
+        </p:spPr>
+      </p:sp>
+      <p:sp>
+        <p:nvSpPr>
+          <p:cNvPr id="5" name="これから1_評価_文字"/>
+          <p:cNvSpPr txBox="1"/>
+          <p:nvPr/>
+        </p:nvSpPr>
+        <p:spPr>
+          <a:xfrm>
+            <a:off x="822960" y="1508760"/>
+            <a:ext cx="4572000" cy="1417320"/>
+          </a:xfrm>
+          <a:prstGeom prst="rect">
+            <a:avLst/>
+          </a:prstGeom>
+          <a:noFill/>
+          <a:ln/>
+        </p:spPr>
+        <p:txBody>
+          <a:bodyPr wrap="square" lIns="0" tIns="0" rIns="0" bIns="0" rtlCol="0" anchor="ctr"/>
+          <a:lstStyle/>
+          <a:p>
+            <a:pPr indent="0" marL="0">
+              <a:buNone/>
+            </a:pPr>
+            <a:r>
+              <a:rPr lang="ja-JP" altLang="en-US" sz="1600" b="1" dirty="0">
+                <a:solidFill>
+                  <a:schemeClr val="tx2"/>
+                </a:solidFill>
+              </a:rPr>
+              <a:t>ディスプレイが小さくて、</a:t>
+            </a:r>
+            <a:endParaRPr lang="ja-JP" sz="1600" dirty="0"/>
+          </a:p>
+          <a:p>
+            <a:pPr indent="0" marL="0">
+              <a:buNone/>
+            </a:pPr>
+            <a:r>
+              <a:rPr lang="ja-JP" altLang="en-US" sz="1600" b="1" dirty="0">
+                <a:solidFill>
+                  <a:schemeClr val="tx2"/>
+                </a:solidFill>
+              </a:rPr>
+              <a:t>老眼が始まっている私には文字が見づらかった</a:t>
+            </a:r>
+            <a:endParaRPr lang="ja-JP" sz="1600" dirty="0"/>
+          </a:p>
+        </p:txBody>
+      </p:sp>
+      <p:sp>
+        <p:nvSpPr>
+          <p:cNvPr id="6" name="これから1_矢印"/>
+          <p:cNvSpPr/>
+          <p:nvPr/>
+        </p:nvSpPr>
+        <p:spPr>
+          <a:xfrm>
+            <a:off x="5806440" y="2016252"/>
+            <a:ext cx="457200" cy="402336"/>
+          </a:xfrm>
+          <a:prstGeom prst="rightArrow">
+            <a:avLst/>
+          </a:prstGeom>
+          <a:solidFill>
+            <a:schemeClr val="accent2"/>
+          </a:solidFill>
+          <a:ln w="12700">
+            <a:solidFill>
+              <a:schemeClr val="accent2"/>
+            </a:solidFill>
+            <a:prstDash val="solid"/>
+          </a:ln>
+        </p:spPr>
+      </p:sp>
+      <p:sp>
+        <p:nvSpPr>
+          <p:cNvPr id="7" name="これから1_対応"/>
+          <p:cNvSpPr/>
+          <p:nvPr/>
+        </p:nvSpPr>
+        <p:spPr>
+          <a:xfrm>
+            <a:off x="6400800" y="1508760"/>
+            <a:ext cx="5242255" cy="1417320"/>
+          </a:xfrm>
+          <a:prstGeom prst="roundRect">
+            <a:avLst>
+              <a:gd name="adj" fmla="val 5161"/>
+            </a:avLst>
+          </a:prstGeom>
+          <a:solidFill>
+            <a:schemeClr val="accent5"/>
+          </a:solidFill>
+          <a:ln w="12700">
+            <a:solidFill>
+              <a:schemeClr val="accent5"/>
+            </a:solidFill>
+            <a:prstDash val="solid"/>
+          </a:ln>
+        </p:spPr>
+      </p:sp>
+      <p:sp>
+        <p:nvSpPr>
+          <p:cNvPr id="8" name="これから1_札"/>
+          <p:cNvSpPr/>
+          <p:nvPr/>
+        </p:nvSpPr>
+        <p:spPr>
+          <a:xfrm>
+            <a:off x="6675120" y="1709928"/>
+            <a:ext cx="1554480" cy="384048"/>
+          </a:xfrm>
+          <a:prstGeom prst="roundRect">
+            <a:avLst>
+              <a:gd name="adj" fmla="val 47619"/>
+            </a:avLst>
+          </a:prstGeom>
+          <a:solidFill>
+            <a:schemeClr val="accent2"/>
+          </a:solidFill>
+          <a:ln w="12700">
+            <a:solidFill>
+              <a:schemeClr val="accent2"/>
+            </a:solidFill>
+            <a:prstDash val="solid"/>
+          </a:ln>
+        </p:spPr>
+      </p:sp>
+      <p:sp>
+        <p:nvSpPr>
+          <p:cNvPr id="9" name="これから1_札_文字"/>
+          <p:cNvSpPr txBox="1"/>
+          <p:nvPr/>
+        </p:nvSpPr>
+        <p:spPr>
+          <a:xfrm>
+            <a:off x="6675120" y="1709928"/>
+            <a:ext cx="1554480" cy="384048"/>
+          </a:xfrm>
+          <a:prstGeom prst="rect">
+            <a:avLst/>
+          </a:prstGeom>
+          <a:noFill/>
+          <a:ln/>
+        </p:spPr>
+        <p:txBody>
+          <a:bodyPr wrap="square" lIns="0" tIns="0" rIns="0" bIns="0" rtlCol="0" anchor="ctr"/>
+          <a:lstStyle/>
+          <a:p>
+            <a:pPr algn="ctr" indent="0" marL="0">
+              <a:buNone/>
+            </a:pPr>
+            <a:r>
+              <a:rPr lang="ja-JP" altLang="en-US" sz="1600" b="1" dirty="0">
+                <a:solidFill>
+                  <a:schemeClr val="bg1"/>
+                </a:solidFill>
+              </a:rPr>
+              <a:t>改善の方法</a:t>
+            </a:r>
+            <a:endParaRPr lang="ja-JP" sz="1600" dirty="0"/>
+          </a:p>
+        </p:txBody>
+      </p:sp>
+      <p:sp>
+        <p:nvSpPr>
+          <p:cNvPr id="10" name="これから1_対応_文字"/>
+          <p:cNvSpPr txBox="1"/>
+          <p:nvPr/>
+        </p:nvSpPr>
+        <p:spPr>
+          <a:xfrm>
+            <a:off x="6675120" y="2203704"/>
+            <a:ext cx="4693615" cy="576072"/>
+          </a:xfrm>
+          <a:prstGeom prst="rect">
+            <a:avLst/>
+          </a:prstGeom>
+          <a:noFill/>
+          <a:ln/>
+        </p:spPr>
+        <p:txBody>
+          <a:bodyPr wrap="square" lIns="0" tIns="0" rIns="0" bIns="0" rtlCol="0" anchor="t"/>
+          <a:lstStyle/>
+          <a:p>
+            <a:pPr marL="203200" indent="-203200">
+              <a:buSzPct val="100000"/>
+              <a:buChar char="•"/>
+            </a:pPr>
+            <a:r>
+              <a:rPr lang="ja-JP" altLang="en-US" sz="1600" dirty="0">
+                <a:solidFill>
+                  <a:schemeClr val="tx1"/>
+                </a:solidFill>
+              </a:rPr>
+              <a:t>大きい画面に替える</a:t>
+            </a:r>
+            <a:endParaRPr lang="ja-JP" sz="1600" dirty="0"/>
+          </a:p>
+          <a:p>
+            <a:pPr marL="203200" indent="-203200">
+              <a:spcBef>
+                <a:spcPts val="600"/>
+              </a:spcBef>
+              <a:buSzPct val="100000"/>
+              <a:buChar char="•"/>
+            </a:pPr>
+            <a:r>
+              <a:rPr lang="ja-JP" altLang="en-US" sz="1600" dirty="0">
+                <a:solidFill>
+                  <a:schemeClr val="tx1"/>
+                </a:solidFill>
+              </a:rPr>
+              <a:t>一度に出す文字を減らし、文字を大きくする</a:t>
+            </a:r>
+            <a:endParaRPr lang="ja-JP" sz="1600" dirty="0"/>
+          </a:p>
+        </p:txBody>
+      </p:sp>
+      <p:sp>
+        <p:nvSpPr>
+          <p:cNvPr id="11" name="これから2_評価"/>
+          <p:cNvSpPr/>
+          <p:nvPr/>
+        </p:nvSpPr>
+        <p:spPr>
+          <a:xfrm>
+            <a:off x="548640" y="3108960"/>
+            <a:ext cx="5120640" cy="1417320"/>
+          </a:xfrm>
+          <a:prstGeom prst="roundRect">
+            <a:avLst>
+              <a:gd name="adj" fmla="val 5161"/>
+            </a:avLst>
+          </a:prstGeom>
+          <a:solidFill>
+            <a:schemeClr val="bg2"/>
+          </a:solidFill>
+          <a:ln w="12700">
+            <a:solidFill>
+              <a:schemeClr val="bg2"/>
+            </a:solidFill>
+            <a:prstDash val="solid"/>
+          </a:ln>
+        </p:spPr>
+      </p:sp>
+      <p:sp>
+        <p:nvSpPr>
+          <p:cNvPr id="12" name="これから2_評価_文字"/>
+          <p:cNvSpPr txBox="1"/>
+          <p:nvPr/>
+        </p:nvSpPr>
+        <p:spPr>
+          <a:xfrm>
+            <a:off x="822960" y="3108960"/>
+            <a:ext cx="4572000" cy="1417320"/>
+          </a:xfrm>
+          <a:prstGeom prst="rect">
+            <a:avLst/>
+          </a:prstGeom>
+          <a:noFill/>
+          <a:ln/>
+        </p:spPr>
+        <p:txBody>
+          <a:bodyPr wrap="square" lIns="0" tIns="0" rIns="0" bIns="0" rtlCol="0" anchor="ctr"/>
+          <a:lstStyle/>
+          <a:p>
+            <a:pPr indent="0" marL="0">
+              <a:buNone/>
+            </a:pPr>
+            <a:r>
+              <a:rPr lang="ja-JP" altLang="en-US" sz="1600" b="1" dirty="0">
+                <a:solidFill>
+                  <a:schemeClr val="tx2"/>
+                </a:solidFill>
+              </a:rPr>
+              <a:t>側面に IC タグをかざすのが、</a:t>
+            </a:r>
+            <a:endParaRPr lang="ja-JP" sz="1600" dirty="0"/>
+          </a:p>
+          <a:p>
+            <a:pPr indent="0" marL="0">
+              <a:buNone/>
+            </a:pPr>
+            <a:r>
+              <a:rPr lang="ja-JP" altLang="en-US" sz="1600" b="1" dirty="0">
+                <a:solidFill>
+                  <a:schemeClr val="tx2"/>
+                </a:solidFill>
+              </a:rPr>
+              <a:t>直感に反していて分かりづらかった</a:t>
+            </a:r>
+            <a:endParaRPr lang="ja-JP" sz="1600" dirty="0"/>
+          </a:p>
+        </p:txBody>
+      </p:sp>
+      <p:sp>
+        <p:nvSpPr>
+          <p:cNvPr id="13" name="これから2_矢印"/>
+          <p:cNvSpPr/>
+          <p:nvPr/>
+        </p:nvSpPr>
+        <p:spPr>
+          <a:xfrm>
+            <a:off x="5806440" y="3616452"/>
+            <a:ext cx="457200" cy="402336"/>
+          </a:xfrm>
+          <a:prstGeom prst="rightArrow">
+            <a:avLst/>
+          </a:prstGeom>
+          <a:solidFill>
+            <a:schemeClr val="accent2"/>
+          </a:solidFill>
+          <a:ln w="12700">
+            <a:solidFill>
+              <a:schemeClr val="accent2"/>
+            </a:solidFill>
+            <a:prstDash val="solid"/>
+          </a:ln>
+        </p:spPr>
+      </p:sp>
+      <p:sp>
+        <p:nvSpPr>
+          <p:cNvPr id="14" name="これから2_対応"/>
+          <p:cNvSpPr/>
+          <p:nvPr/>
+        </p:nvSpPr>
+        <p:spPr>
+          <a:xfrm>
+            <a:off x="6400800" y="3108960"/>
+            <a:ext cx="5242255" cy="1417320"/>
+          </a:xfrm>
+          <a:prstGeom prst="roundRect">
+            <a:avLst>
+              <a:gd name="adj" fmla="val 5161"/>
+            </a:avLst>
+          </a:prstGeom>
+          <a:solidFill>
+            <a:schemeClr val="accent5"/>
+          </a:solidFill>
+          <a:ln w="12700">
+            <a:solidFill>
+              <a:schemeClr val="accent5"/>
+            </a:solidFill>
+            <a:prstDash val="solid"/>
+          </a:ln>
+        </p:spPr>
+      </p:sp>
+      <p:sp>
+        <p:nvSpPr>
+          <p:cNvPr id="15" name="これから2_札"/>
+          <p:cNvSpPr/>
+          <p:nvPr/>
+        </p:nvSpPr>
+        <p:spPr>
+          <a:xfrm>
+            <a:off x="6675120" y="3310128"/>
+            <a:ext cx="1554480" cy="384048"/>
+          </a:xfrm>
+          <a:prstGeom prst="roundRect">
+            <a:avLst>
+              <a:gd name="adj" fmla="val 47619"/>
+            </a:avLst>
+          </a:prstGeom>
+          <a:solidFill>
+            <a:schemeClr val="accent2"/>
+          </a:solidFill>
+          <a:ln w="12700">
+            <a:solidFill>
+              <a:schemeClr val="accent2"/>
+            </a:solidFill>
+            <a:prstDash val="solid"/>
+          </a:ln>
+        </p:spPr>
+      </p:sp>
+      <p:sp>
+        <p:nvSpPr>
+          <p:cNvPr id="16" name="これから2_札_文字"/>
+          <p:cNvSpPr txBox="1"/>
+          <p:nvPr/>
+        </p:nvSpPr>
+        <p:spPr>
+          <a:xfrm>
+            <a:off x="6675120" y="3310128"/>
+            <a:ext cx="1554480" cy="384048"/>
+          </a:xfrm>
+          <a:prstGeom prst="rect">
+            <a:avLst/>
+          </a:prstGeom>
+          <a:noFill/>
+          <a:ln/>
+        </p:spPr>
+        <p:txBody>
+          <a:bodyPr wrap="square" lIns="0" tIns="0" rIns="0" bIns="0" rtlCol="0" anchor="ctr"/>
+          <a:lstStyle/>
+          <a:p>
+            <a:pPr algn="ctr" indent="0" marL="0">
+              <a:buNone/>
+            </a:pPr>
+            <a:r>
+              <a:rPr lang="ja-JP" altLang="en-US" sz="1600" b="1" dirty="0">
+                <a:solidFill>
+                  <a:schemeClr val="bg1"/>
+                </a:solidFill>
+              </a:rPr>
+              <a:t>改善の方法</a:t>
+            </a:r>
+            <a:endParaRPr lang="ja-JP" sz="1600" dirty="0"/>
+          </a:p>
+        </p:txBody>
+      </p:sp>
+      <p:sp>
+        <p:nvSpPr>
+          <p:cNvPr id="17" name="これから2_対応_文字"/>
+          <p:cNvSpPr txBox="1"/>
+          <p:nvPr/>
+        </p:nvSpPr>
+        <p:spPr>
+          <a:xfrm>
+            <a:off x="6675120" y="3803904"/>
+            <a:ext cx="4693615" cy="576072"/>
+          </a:xfrm>
+          <a:prstGeom prst="rect">
+            <a:avLst/>
+          </a:prstGeom>
+          <a:noFill/>
+          <a:ln/>
+        </p:spPr>
+        <p:txBody>
+          <a:bodyPr wrap="square" lIns="0" tIns="0" rIns="0" bIns="0" rtlCol="0" anchor="t"/>
+          <a:lstStyle/>
+          <a:p>
+            <a:pPr marL="203200" indent="-203200">
+              <a:buSzPct val="100000"/>
+              <a:buChar char="•"/>
+            </a:pPr>
+            <a:r>
+              <a:rPr lang="ja-JP" altLang="en-US" sz="1600" dirty="0">
+                <a:solidFill>
+                  <a:schemeClr val="tx1"/>
+                </a:solidFill>
+              </a:rPr>
+              <a:t>読み取る部分を正面に移す</a:t>
+            </a:r>
+            <a:endParaRPr lang="ja-JP" sz="1600" dirty="0"/>
+          </a:p>
+          <a:p>
+            <a:pPr marL="203200" indent="-203200">
+              <a:spcBef>
+                <a:spcPts val="600"/>
+              </a:spcBef>
+              <a:buSzPct val="100000"/>
+              <a:buChar char="•"/>
+            </a:pPr>
+            <a:r>
+              <a:rPr lang="ja-JP" altLang="en-US" sz="1600" dirty="0">
+                <a:solidFill>
+                  <a:schemeClr val="tx1"/>
+                </a:solidFill>
+              </a:rPr>
+              <a:t>かざす場所に目印を付ける</a:t>
+            </a:r>
+            <a:endParaRPr lang="ja-JP" sz="1600" dirty="0"/>
+          </a:p>
+        </p:txBody>
+      </p:sp>
+      <p:sp>
+        <p:nvSpPr>
+          <p:cNvPr id="18" name="これから3_評価"/>
+          <p:cNvSpPr/>
+          <p:nvPr/>
+        </p:nvSpPr>
+        <p:spPr>
+          <a:xfrm>
+            <a:off x="548640" y="4709160"/>
+            <a:ext cx="5120640" cy="1417320"/>
+          </a:xfrm>
+          <a:prstGeom prst="roundRect">
+            <a:avLst>
+              <a:gd name="adj" fmla="val 5161"/>
+            </a:avLst>
+          </a:prstGeom>
+          <a:solidFill>
+            <a:schemeClr val="bg2"/>
+          </a:solidFill>
+          <a:ln w="12700">
+            <a:solidFill>
+              <a:schemeClr val="bg2"/>
+            </a:solidFill>
+            <a:prstDash val="solid"/>
+          </a:ln>
+        </p:spPr>
+      </p:sp>
+      <p:sp>
+        <p:nvSpPr>
+          <p:cNvPr id="19" name="これから3_評価_文字"/>
+          <p:cNvSpPr txBox="1"/>
+          <p:nvPr/>
+        </p:nvSpPr>
+        <p:spPr>
+          <a:xfrm>
+            <a:off x="822960" y="4709160"/>
+            <a:ext cx="4572000" cy="1417320"/>
+          </a:xfrm>
+          <a:prstGeom prst="rect">
+            <a:avLst/>
+          </a:prstGeom>
+          <a:noFill/>
+          <a:ln/>
+        </p:spPr>
+        <p:txBody>
+          <a:bodyPr wrap="square" lIns="0" tIns="0" rIns="0" bIns="0" rtlCol="0" anchor="ctr"/>
+          <a:lstStyle/>
+          <a:p>
+            <a:pPr indent="0" marL="0">
+              <a:buNone/>
+            </a:pPr>
+            <a:r>
+              <a:rPr lang="ja-JP" altLang="en-US" sz="1600" b="1" dirty="0">
+                <a:solidFill>
+                  <a:schemeClr val="tx2"/>
+                </a:solidFill>
+              </a:rPr>
+              <a:t>管理者側から、</a:t>
+            </a:r>
+            <a:endParaRPr lang="ja-JP" sz="1600" dirty="0"/>
+          </a:p>
+          <a:p>
+            <a:pPr indent="0" marL="0">
+              <a:buNone/>
+            </a:pPr>
+            <a:r>
+              <a:rPr lang="ja-JP" altLang="en-US" sz="1600" b="1" dirty="0">
+                <a:solidFill>
+                  <a:schemeClr val="tx2"/>
+                </a:solidFill>
+              </a:rPr>
+              <a:t>モジュールに通知できる機能があればよかった</a:t>
+            </a:r>
+            <a:endParaRPr lang="ja-JP" sz="1600" dirty="0"/>
+          </a:p>
+          <a:p>
+            <a:pPr indent="0" marL="0">
+              <a:buNone/>
+            </a:pPr>
+            <a:r>
+              <a:rPr lang="ja-JP" altLang="en-US" sz="1600" b="1" dirty="0">
+                <a:solidFill>
+                  <a:schemeClr val="tx2"/>
+                </a:solidFill>
+              </a:rPr>
+              <a:t>（ブザーなど）</a:t>
+            </a:r>
+            <a:endParaRPr lang="ja-JP" sz="1600" dirty="0"/>
+          </a:p>
+        </p:txBody>
+      </p:sp>
+      <p:sp>
+        <p:nvSpPr>
+          <p:cNvPr id="20" name="これから3_矢印"/>
+          <p:cNvSpPr/>
+          <p:nvPr/>
+        </p:nvSpPr>
+        <p:spPr>
+          <a:xfrm>
+            <a:off x="5806440" y="5216652"/>
+            <a:ext cx="457200" cy="402336"/>
+          </a:xfrm>
+          <a:prstGeom prst="rightArrow">
+            <a:avLst/>
+          </a:prstGeom>
+          <a:solidFill>
+            <a:schemeClr val="accent2"/>
+          </a:solidFill>
+          <a:ln w="12700">
+            <a:solidFill>
+              <a:schemeClr val="accent2"/>
+            </a:solidFill>
+            <a:prstDash val="solid"/>
+          </a:ln>
+        </p:spPr>
+      </p:sp>
+      <p:sp>
+        <p:nvSpPr>
+          <p:cNvPr id="21" name="これから3_対応"/>
+          <p:cNvSpPr/>
+          <p:nvPr/>
+        </p:nvSpPr>
+        <p:spPr>
+          <a:xfrm>
+            <a:off x="6400800" y="4709160"/>
+            <a:ext cx="5242255" cy="1417320"/>
+          </a:xfrm>
+          <a:prstGeom prst="roundRect">
+            <a:avLst>
+              <a:gd name="adj" fmla="val 5161"/>
+            </a:avLst>
+          </a:prstGeom>
+          <a:solidFill>
+            <a:schemeClr val="accent5"/>
+          </a:solidFill>
+          <a:ln w="12700">
+            <a:solidFill>
+              <a:schemeClr val="accent5"/>
+            </a:solidFill>
+            <a:prstDash val="solid"/>
+          </a:ln>
+        </p:spPr>
+      </p:sp>
+      <p:sp>
+        <p:nvSpPr>
+          <p:cNvPr id="22" name="これから3_札"/>
+          <p:cNvSpPr/>
+          <p:nvPr/>
+        </p:nvSpPr>
+        <p:spPr>
+          <a:xfrm>
+            <a:off x="6675120" y="4910328"/>
+            <a:ext cx="1554480" cy="384048"/>
+          </a:xfrm>
+          <a:prstGeom prst="roundRect">
+            <a:avLst>
+              <a:gd name="adj" fmla="val 47619"/>
+            </a:avLst>
+          </a:prstGeom>
+          <a:solidFill>
+            <a:schemeClr val="accent2"/>
+          </a:solidFill>
+          <a:ln w="12700">
+            <a:solidFill>
+              <a:schemeClr val="accent2"/>
+            </a:solidFill>
+            <a:prstDash val="solid"/>
+          </a:ln>
+        </p:spPr>
+      </p:sp>
+      <p:sp>
+        <p:nvSpPr>
+          <p:cNvPr id="23" name="これから3_札_文字"/>
+          <p:cNvSpPr txBox="1"/>
+          <p:nvPr/>
+        </p:nvSpPr>
+        <p:spPr>
+          <a:xfrm>
+            <a:off x="6675120" y="4910328"/>
+            <a:ext cx="1554480" cy="384048"/>
+          </a:xfrm>
+          <a:prstGeom prst="rect">
+            <a:avLst/>
+          </a:prstGeom>
+          <a:noFill/>
+          <a:ln/>
+        </p:spPr>
+        <p:txBody>
+          <a:bodyPr wrap="square" lIns="0" tIns="0" rIns="0" bIns="0" rtlCol="0" anchor="ctr"/>
+          <a:lstStyle/>
+          <a:p>
+            <a:pPr algn="ctr" indent="0" marL="0">
+              <a:buNone/>
+            </a:pPr>
+            <a:r>
+              <a:rPr lang="ja-JP" altLang="en-US" sz="1600" b="1" dirty="0">
+                <a:solidFill>
+                  <a:schemeClr val="bg1"/>
+                </a:solidFill>
+              </a:rPr>
+              <a:t>改善の方法</a:t>
+            </a:r>
+            <a:endParaRPr lang="ja-JP" sz="1600" dirty="0"/>
+          </a:p>
+        </p:txBody>
+      </p:sp>
+      <p:sp>
+        <p:nvSpPr>
+          <p:cNvPr id="24" name="これから3_対応_文字"/>
+          <p:cNvSpPr txBox="1"/>
+          <p:nvPr/>
+        </p:nvSpPr>
+        <p:spPr>
+          <a:xfrm>
+            <a:off x="6675120" y="5404104"/>
+            <a:ext cx="4693615" cy="576072"/>
+          </a:xfrm>
+          <a:prstGeom prst="rect">
+            <a:avLst/>
+          </a:prstGeom>
+          <a:noFill/>
+          <a:ln/>
+        </p:spPr>
+        <p:txBody>
+          <a:bodyPr wrap="square" lIns="0" tIns="0" rIns="0" bIns="0" rtlCol="0" anchor="t"/>
+          <a:lstStyle/>
+          <a:p>
+            <a:pPr marL="203200" indent="-203200">
+              <a:buSzPct val="100000"/>
+              <a:buChar char="•"/>
+            </a:pPr>
+            <a:r>
+              <a:rPr lang="ja-JP" altLang="en-US" sz="1600" dirty="0">
+                <a:solidFill>
+                  <a:schemeClr val="tx1"/>
+                </a:solidFill>
+              </a:rPr>
+              <a:t>モジュールにブザーを付ける</a:t>
+            </a:r>
+            <a:endParaRPr lang="ja-JP" sz="1600" dirty="0"/>
+          </a:p>
+          <a:p>
+            <a:pPr marL="203200" indent="-203200">
+              <a:spcBef>
+                <a:spcPts val="600"/>
+              </a:spcBef>
+              <a:buSzPct val="100000"/>
+              <a:buChar char="•"/>
+            </a:pPr>
+            <a:r>
+              <a:rPr lang="ja-JP" altLang="en-US" sz="1600" dirty="0">
+                <a:solidFill>
+                  <a:schemeClr val="tx1"/>
+                </a:solidFill>
+              </a:rPr>
+              <a:t>管理画面から、音と文字で呼び出せるようにする</a:t>
+            </a:r>
+            <a:endParaRPr lang="ja-JP" sz="1600" dirty="0"/>
+          </a:p>
+        </p:txBody>
+      </p:sp>
+      <p:sp>
+        <p:nvSpPr>
+          <p:cNvPr id="25" name="Slide Number Placeholder 0"/>
+          <p:cNvSpPr>
+            <a:spLocks noGrp="1"/>
+          </p:cNvSpPr>
+          <p:nvPr>
+            <p:ph type="sldNum" sz="quarter" idx="4294967295"/>
+          </p:nvPr>
+        </p:nvSpPr>
+        <p:spPr>
+          <a:xfrm>
+            <a:off x="10911535" y="6400800"/>
+            <a:ext cx="731520" cy="274320"/>
+          </a:xfrm>
+          <a:prstGeom prst="rect">
+            <a:avLst/>
+          </a:prstGeom>
+          <a:extLst>
+            <a:ext uri="{C572A759-6A51-4108-AA02-DFA0A04FC94B}">
+              <ma14:wrappingTextBoxFlag xmlns:ma14="http://schemas.microsoft.com/office/mac/drawingml/2011/main" val="0"/>
+            </a:ext>
+          </a:extLst>
+        </p:spPr>
+        <p:txBody>
+          <a:bodyPr lIns="0" tIns="0" rIns="0" bIns="0"/>
+          <a:lstStyle>
+            <a:lvl1pPr>
+              <a:defRPr sz="1100">
+                <a:solidFill>
+                  <a:schemeClr val="accent3"/>
+                </a:solidFill>
+              </a:defRPr>
+            </a:lvl1pPr>
+          </a:lstStyle>
+          <a:p>
+            <a:pPr algn="r"/>
+            <a:fld id="{F7021451-1387-4CA6-816F-3879F97B5CBC}" type="slidenum">
+              <a:rPr b="0" lang="en-US"/>
+              <a:t>3</a:t>
+            </a:fld>
+            <a:endParaRPr lang="en-US"/>
+          </a:p>
+        </p:txBody>
+      </p:sp>
+    </p:spTree>
   </p:cSld>
   <p:clrMapOvr>
     <a:masterClrMapping/>

--- a/slides/gemmba_presentation.pptx
+++ b/slides/gemmba_presentation.pptx
@@ -1482,7 +1482,7 @@
           <a:p>
             <a:r>
               <a:rPr lang="ja-JP" altLang="en-US"/>
-              <a:t>一方で、課題もあります。評価はまだシミュレーションのみで、実際の現場では検証できていません。また、作業者の上達、つまり能力の変化をまだ考慮していないことや、ログが増えると計算が重くなることも課題です。</a:t>
+              <a:t>一方で、課題もあります。導入先の工場で使っていただき評価をいただきましたが、AI の割当の効果は、まだシミュレーションでしか確かめていません。また、画面の文字の大きさや IC タグの位置、管理者からの通知の三つは、まだ直せていません。さらに、作業者の上達、つまり能力の変化をまだ考慮していないことや、ログが増えると計算が重くなることも課題です。</a:t>
             </a:r>
           </a:p>
           <a:p>
@@ -7108,7 +7108,7 @@
                   <a:schemeClr val="tx1"/>
                 </a:solidFill>
               </a:rPr>
-              <a:t>評価はシミュレーションのみ。実際の現場では未検証</a:t>
+              <a:t>AI 割当の評価はシミュレーションのみ</a:t>
             </a:r>
             <a:endParaRPr lang="ja-JP" sz="2000" dirty="0"/>
           </a:p>
@@ -7145,6 +7145,24 @@
                 </a:solidFill>
               </a:rPr>
               <a:t>ログが増えると計算が重くなる</a:t>
+            </a:r>
+            <a:endParaRPr lang="ja-JP" sz="2000" dirty="0"/>
+          </a:p>
+          <a:p>
+            <a:pPr marL="203200" indent="-203200">
+              <a:spcBef>
+                <a:spcPts val="400"/>
+              </a:spcBef>
+              <a:buSzPct val="100000"/>
+              <a:buChar char="•"/>
+            </a:pPr>
+            <a:r>
+              <a:rPr lang="ja-JP" altLang="en-US" sz="1600" dirty="0">
+                <a:solidFill>
+                  <a:schemeClr val="tx1"/>
+                </a:solidFill>
+              </a:rPr>
+              <a:t>画面の文字・タグの位置・通知の改善が残る</a:t>
             </a:r>
             <a:endParaRPr lang="ja-JP" sz="2000" dirty="0"/>
           </a:p>

--- a/slides/gemmba_presentation.pptx
+++ b/slides/gemmba_presentation.pptx
@@ -5,7 +5,7 @@
     <p:sldMasterId id="2147483648" r:id="rId1"/>
   </p:sldMasterIdLst>
   <p:notesMasterIdLst>
-    <p:notesMasterId r:id="rId15"/>
+    <p:notesMasterId r:id="rId18"/>
   </p:notesMasterIdLst>
   <p:sldIdLst>
     <p:sldId id="256" r:id="rId2"/>
@@ -19,11 +19,12 @@
     <p:sldId id="264" r:id="rId10"/>
     <p:sldId id="265" r:id="rId11"/>
     <p:sldId id="266" r:id="rId12"/>
-    <p:sldId id="269" r:id="rId20"/>
-    <p:sldId id="270" r:id="rId21"/>
-    <p:sldId id="271" r:id="rId22"/>
-    <p:sldId id="267" r:id="rId13"/>
-    <p:sldId id="268" r:id="rId14"/>
+    <p:sldId id="272" r:id="rId23"/>
+    <p:sldId id="269" r:id="rId13"/>
+    <p:sldId id="270" r:id="rId14"/>
+    <p:sldId id="271" r:id="rId15"/>
+    <p:sldId id="267" r:id="rId16"/>
+    <p:sldId id="268" r:id="rId17"/>
   </p:sldIdLst>
   <p:sldSz cx="12192000" cy="6858000"/>
   <p:notesSz cx="6858000" cy="12192000"/>
@@ -159,6 +160,7 @@
           <p14:sldIdLst>
             <p14:sldId id="265"/>
             <p14:sldId id="266"/>
+            <p14:sldId id="272"/>
           </p14:sldIdLst>
         </p14:section>
         <p14:section name="7. 導入先からの評価" id="{56A0C880-46BF-4D7E-9386-C1046E19C688}">
@@ -286,12 +288,6 @@
             <c:idx val="0"/>
             <c:invertIfNegative val="0"/>
             <c:bubble3D val="0"/>
-            <c:spPr>
-              <a:solidFill>
-                <a:srgbClr val="8A8984"/>
-              </a:solidFill>
-              <a:effectLst/>
-            </c:spPr>
             <c:extLst>
               <c:ext xmlns:c16="http://schemas.microsoft.com/office/drawing/2014/chart" uri="{C3380CC4-5D6E-409C-BE32-E72D297353CC}">
                 <c16:uniqueId val="{00000001-F9D2-4659-B29A-C7A02883BC59}"/>
@@ -302,12 +298,6 @@
             <c:idx val="1"/>
             <c:invertIfNegative val="0"/>
             <c:bubble3D val="0"/>
-            <c:spPr>
-              <a:solidFill>
-                <a:srgbClr val="8A8984"/>
-              </a:solidFill>
-              <a:effectLst/>
-            </c:spPr>
             <c:extLst>
               <c:ext xmlns:c16="http://schemas.microsoft.com/office/drawing/2014/chart" uri="{C3380CC4-5D6E-409C-BE32-E72D297353CC}">
                 <c16:uniqueId val="{00000003-F9D2-4659-B29A-C7A02883BC59}"/>
@@ -318,12 +308,6 @@
             <c:idx val="2"/>
             <c:invertIfNegative val="0"/>
             <c:bubble3D val="0"/>
-            <c:spPr>
-              <a:solidFill>
-                <a:srgbClr val="8A8984"/>
-              </a:solidFill>
-              <a:effectLst/>
-            </c:spPr>
             <c:extLst>
               <c:ext xmlns:c16="http://schemas.microsoft.com/office/drawing/2014/chart" uri="{C3380CC4-5D6E-409C-BE32-E72D297353CC}">
                 <c16:uniqueId val="{00000005-F9D2-4659-B29A-C7A02883BC59}"/>
@@ -1435,84 +1419,12 @@
           <a:lstStyle/>
           <a:p>
             <a:r>
-              <a:rPr lang="en-US" altLang="ja-JP"/>
-              <a:t>【</a:t>
-            </a:r>
-            <a:r>
-              <a:rPr lang="ja-JP" altLang="en-US"/>
-              <a:t>目安 </a:t>
-            </a:r>
-            <a:r>
-              <a:rPr lang="en-US" altLang="ja-JP"/>
-              <a:t>1 </a:t>
-            </a:r>
-            <a:r>
-              <a:rPr lang="ja-JP" altLang="en-US"/>
-              <a:t>分</a:t>
-            </a:r>
-            <a:r>
-              <a:rPr lang="en-US" altLang="ja-JP"/>
-              <a:t>】</a:t>
-            </a:r>
-          </a:p>
-          <a:p>
-            <a:r>
-              <a:rPr lang="ja-JP" altLang="en-US"/>
-              <a:t>最後に、まとめと今後の展望です。</a:t>
-            </a:r>
-          </a:p>
-          <a:p>
-            <a:r>
-              <a:rPr lang="en-US" altLang="ja-JP"/>
-              <a:t>Gemmba </a:t>
-            </a:r>
-            <a:r>
-              <a:rPr lang="ja-JP" altLang="en-US"/>
-              <a:t>は、腕輪をタッチするだけで、人と仕事を </a:t>
-            </a:r>
-            <a:r>
-              <a:rPr lang="en-US" altLang="ja-JP"/>
-              <a:t>AI </a:t>
-            </a:r>
-            <a:r>
-              <a:rPr lang="ja-JP" altLang="en-US"/>
-              <a:t>が結び付けるシステムです。作業者は報告・確認・探す手間から解放され、管理者は現場の状況と一人ひとりの適性をデータで把握できるようになります。</a:t>
-            </a:r>
-          </a:p>
-          <a:p>
-            <a:r>
-              <a:rPr lang="ja-JP" altLang="en-US"/>
-              <a:t>一方で、課題もあります。導入先の工場で使っていただき評価をいただきましたが、AI の割当の効果は、まだシミュレーションでしか確かめていません。また、画面の文字の大きさや IC タグの位置、管理者からの通知の三つは、まだ直せていません。さらに、作業者の上達、つまり能力の変化をまだ考慮していないことや、ログが増えると計算が重くなることも課題です。</a:t>
-            </a:r>
-          </a:p>
-          <a:p>
-            <a:r>
-              <a:rPr lang="ja-JP" altLang="en-US"/>
-              <a:t>今後は、実際の工場で作業ログを集めて評価を行います。また、古いログの重みを下げることで作業者の上達を反映し、</a:t>
-            </a:r>
-            <a:r>
-              <a:rPr lang="en-US" altLang="ja-JP"/>
-              <a:t>Elo </a:t>
-            </a:r>
-            <a:r>
-              <a:rPr lang="ja-JP" altLang="en-US"/>
-              <a:t>レーティングや </a:t>
-            </a:r>
-            <a:r>
-              <a:rPr lang="en-US" altLang="ja-JP"/>
-              <a:t>LinUCB </a:t>
-            </a:r>
-            <a:r>
-              <a:rPr lang="ja-JP" altLang="en-US"/>
-              <a:t>といった他の割当アルゴリズムとの比較・検討も進めていきます。</a:t>
-            </a:r>
-          </a:p>
-          <a:p>
-            <a:r>
-              <a:rPr lang="ja-JP" altLang="en-US"/>
-              <a:t>以上で発表を終わります。ご清聴ありがとうございました。</a:t>
-            </a:r>
-            <a:endParaRPr lang="en-US" dirty="0"/>
+              <a:rPr lang="en-US" dirty="0"/>
+              <a:t>【1 分】
+実際に導入先の工場で使っていただき、評価をいただきました。まず良かった点です。
+導入が簡単だった、操作が分かりやすかった、という声をいただきました。IT 担当者がいなくても導入できる、操作はタッチとボタンだけ、という設計の方針が伝わったと考えています。
+また、作業にかかった時間が自動で記録されること、急ぎの仕事を見落とさないこと、ダッシュボードで空いている機械がすぐ見つかることも便利だと言っていただきました。</a:t>
+            </a:r>
           </a:p>
         </p:txBody>
       </p:sp>
@@ -1571,7 +1483,7 @@
       </p:grpSpPr>
       <p:sp>
         <p:nvSpPr>
-          <p:cNvPr id="2" name="スライド イメージ プレースホルダー 1"/>
+          <p:cNvPr id="2" name="Slide Image Placeholder 1"/>
           <p:cNvSpPr>
             <a:spLocks noGrp="1" noRot="1" noChangeAspect="1"/>
           </p:cNvSpPr>
@@ -1579,25 +1491,11 @@
             <p:ph type="sldImg"/>
           </p:nvPr>
         </p:nvSpPr>
-        <p:spPr>
-          <a:xfrm>
-            <a:off x="-228600" y="1524000"/>
-            <a:ext cx="7315200" cy="4114800"/>
-          </a:xfrm>
-          <a:prstGeom prst="rect">
-            <a:avLst/>
-          </a:prstGeom>
-          <a:noFill/>
-          <a:ln w="12700">
-            <a:solidFill>
-              <a:prstClr val="black"/>
-            </a:solidFill>
-          </a:ln>
-        </p:spPr>
-      </p:sp>
-      <p:sp>
-        <p:nvSpPr>
-          <p:cNvPr id="3" name="ノート プレースホルダー 2"/>
+        <p:spPr/>
+      </p:sp>
+      <p:sp>
+        <p:nvSpPr>
+          <p:cNvPr id="3" name="Notes Placeholder 2"/>
           <p:cNvSpPr>
             <a:spLocks noGrp="1"/>
           </p:cNvSpPr>
@@ -1605,31 +1503,48 @@
             <p:ph type="body" idx="1"/>
           </p:nvPr>
         </p:nvSpPr>
-        <p:spPr>
-          <a:xfrm>
-            <a:off x="685800" y="5867400"/>
-            <a:ext cx="5486400" cy="4800600"/>
-          </a:xfrm>
-          <a:prstGeom prst="rect">
-            <a:avLst/>
-          </a:prstGeom>
-        </p:spPr>
+        <p:spPr/>
         <p:txBody>
           <a:bodyPr/>
           <a:lstStyle/>
           <a:p>
             <a:r>
-              <a:rPr kumimoji="1" lang="ja-JP" altLang="en-US"/>
-              <a:t>質疑応答用のスライド。発表では表示せず、質問が来たときに参照してもよい。
-回答はあくまで例なので、自分たちの言葉に直して使う。</a:t>
-            </a:r>
+              <a:rPr lang="en-US" dirty="0"/>
+              <a:t>【1 分 30 秒】
+次に悪かった点です。このうち二つは直しました。
+一つ目は、作業の終わりにタッチを忘れる人がいたことです。忘れると、機材が使用中のまま残り、次の人が使えません。そこで、別の機材でタッチしたときに前の作業を終えるか確認するようにしました。また、見込みより長く使用中のままの機材は、機材の画面と管理画面で知らせます。管理者が代わりに終了するときは、終わった時刻を入れてもらいます。忘れていた時間まで作業時間に数えると、AI がその人を遅いと学習してしまうためです。
+二つ目は、毎週やる点検などを毎回入れるのが面倒だったことです。定期タスクを一度登録すれば、予定日に自動で追加されるようにしました。前の回が終わっていない間は追加しないので、同じ仕事が積み上がりません。</a:t>
+            </a:r>
+          </a:p>
+        </p:txBody>
+      </p:sp>
+      <p:sp>
+        <p:nvSpPr>
+          <p:cNvPr id="4" name="Slide Number Placeholder 3"/>
+          <p:cNvSpPr>
+            <a:spLocks noGrp="1"/>
+          </p:cNvSpPr>
+          <p:nvPr>
+            <p:ph type="sldNum" sz="quarter" idx="10"/>
+          </p:nvPr>
+        </p:nvSpPr>
+        <p:spPr/>
+        <p:txBody>
+          <a:bodyPr/>
+          <a:lstStyle/>
+          <a:p>
+            <a:fld id="{F7021451-1387-4CA6-816F-3879F97B5CBC}" type="slidenum">
+              <a:rPr lang="en-US"/>
+              <a:t>13</a:t>
+            </a:fld>
+            <a:endParaRPr lang="en-US"/>
           </a:p>
         </p:txBody>
       </p:sp>
     </p:spTree>
     <p:extLst>
       <p:ext uri="{BB962C8B-B14F-4D97-AF65-F5344CB8AC3E}">
-        <p14:creationId xmlns:p14="http://schemas.microsoft.com/office/powerpoint/2010/main" val="1456275994"/>
+        <p14:creationId xmlns:p14="http://schemas.microsoft.com/office/powerpoint/2010/main" val="1024086991"/>
       </p:ext>
     </p:extLst>
   </p:cSld>
@@ -1686,11 +1601,11 @@
             <a:r>
               <a:rPr lang="en-US" dirty="0"/>
               <a:t>【1 分】
-実際に導入先の工場で使っていただき、評価をいただきました。まず良かった点です。
-導入が簡単だった、操作が分かりやすかった、という声をいただきました。IT 担当者がいなくても導入できる、操作はタッチとボタンだけ、という設計の方針が伝わったと考えています。
-また、作業にかかった時間が自動で記録されること、急ぎの仕事を見落とさないこと、ダッシュボードで空いている機械がすぐ見つかることも便利だと言っていただきました。</a:t>
-            </a:r>
-            <a:endParaRPr lang="en-US" dirty="0"/>
+残りの三つは、まだ直せていません。改善の方法を説明します。
+一つ目は、ディスプレイが小さく文字が見づらいという点です。大きい画面に替え、一度に出す文字を減らして文字を大きくします。
+二つ目は、側面に IC タグをかざすのが分かりづらいという点です。読み取る部分を正面に移し、かざす場所に目印を付けます。
+三つ目は、管理者からモジュールに通知したいという要望です。モジュールにブザーを付け、管理画面から音と文字で呼び出せるようにします。</a:t>
+            </a:r>
           </a:p>
         </p:txBody>
       </p:sp>
@@ -1711,7 +1626,7 @@
           <a:p>
             <a:fld id="{F7021451-1387-4CA6-816F-3879F97B5CBC}" type="slidenum">
               <a:rPr lang="en-US"/>
-              <a:t>1</a:t>
+              <a:t>14</a:t>
             </a:fld>
             <a:endParaRPr lang="en-US"/>
           </a:p>
@@ -1775,11 +1690,82 @@
           <a:lstStyle/>
           <a:p>
             <a:r>
-              <a:rPr lang="en-US" dirty="0"/>
-              <a:t>【1 分 30 秒】
-次に悪かった点です。このうち二つは直しました。
-一つ目は、作業の終わりにタッチを忘れる人がいたことです。忘れると、機材が使用中のまま残り、次の人が使えません。そこで、別の機材でタッチしたときに前の作業を終えるか確認するようにしました。また、見込みより長く使用中のままの機材は、機材の画面と管理画面で知らせます。管理者が代わりに終了するときは、終わった時刻を入れてもらいます。忘れていた時間まで作業時間に数えると、AI がその人を遅いと学習してしまうためです。
-二つ目は、毎週やる点検などを毎回入れるのが面倒だったことです。定期タスクを一度登録すれば、予定日に自動で追加されるようにしました。前の回が終わっていない間は追加しないので、同じ仕事が積み上がりません。</a:t>
+              <a:rPr lang="en-US" altLang="ja-JP"/>
+              <a:t>【</a:t>
+            </a:r>
+            <a:r>
+              <a:rPr lang="ja-JP" altLang="en-US"/>
+              <a:t>目安 </a:t>
+            </a:r>
+            <a:r>
+              <a:rPr lang="en-US" altLang="ja-JP"/>
+              <a:t>1 </a:t>
+            </a:r>
+            <a:r>
+              <a:rPr lang="ja-JP" altLang="en-US"/>
+              <a:t>分</a:t>
+            </a:r>
+            <a:r>
+              <a:rPr lang="en-US" altLang="ja-JP"/>
+              <a:t>】</a:t>
+            </a:r>
+          </a:p>
+          <a:p>
+            <a:r>
+              <a:rPr lang="ja-JP" altLang="en-US"/>
+              <a:t>最後に、まとめと今後の展望です。</a:t>
+            </a:r>
+          </a:p>
+          <a:p>
+            <a:r>
+              <a:rPr lang="en-US" altLang="ja-JP"/>
+              <a:t>Gemmba </a:t>
+            </a:r>
+            <a:r>
+              <a:rPr lang="ja-JP" altLang="en-US"/>
+              <a:t>は、腕輪をタッチするだけで、人と仕事を </a:t>
+            </a:r>
+            <a:r>
+              <a:rPr lang="en-US" altLang="ja-JP"/>
+              <a:t>AI </a:t>
+            </a:r>
+            <a:r>
+              <a:rPr lang="ja-JP" altLang="en-US"/>
+              <a:t>が結び付けるシステムです。作業者は報告・確認・探す手間から解放され、管理者は現場の状況と一人ひとりの適性をデータで把握できるようになります。</a:t>
+            </a:r>
+          </a:p>
+          <a:p>
+            <a:r>
+              <a:rPr lang="ja-JP" altLang="en-US"/>
+              <a:t>一方で、課題もあります。導入先の工場で使っていただき評価をいただきましたが、AI の割当の効果は、まだシミュレーションでしか確かめていません。また、画面の文字の大きさや IC タグの位置、管理者からの通知の三つは、まだ直せていません。さらに、作業者の上達、つまり能力の変化をまだ考慮していないことや、ログが増えると計算が重くなることも課題です。</a:t>
+            </a:r>
+          </a:p>
+          <a:p>
+            <a:r>
+              <a:rPr lang="ja-JP" altLang="en-US"/>
+              <a:t>今後は、実際の工場で作業ログを集めて評価を行います。また、古いログの重みを下げることで作業者の上達を反映し、</a:t>
+            </a:r>
+            <a:r>
+              <a:rPr lang="en-US" altLang="ja-JP"/>
+              <a:t>Elo </a:t>
+            </a:r>
+            <a:r>
+              <a:rPr lang="ja-JP" altLang="en-US"/>
+              <a:t>レーティングや </a:t>
+            </a:r>
+            <a:r>
+              <a:rPr lang="en-US" altLang="ja-JP"/>
+              <a:t>LinUCB </a:t>
+            </a:r>
+            <a:r>
+              <a:rPr lang="ja-JP" altLang="en-US"/>
+              <a:t>といった他の割当アルゴリズムとの比較・検討も進めていきます。</a:t>
+            </a:r>
+          </a:p>
+          <a:p>
+            <a:r>
+              <a:rPr lang="ja-JP" altLang="en-US"/>
+              <a:t>以上で発表を終わります。ご清聴ありがとうございました。</a:t>
             </a:r>
             <a:endParaRPr lang="en-US" dirty="0"/>
           </a:p>
@@ -1802,7 +1788,7 @@
           <a:p>
             <a:fld id="{F7021451-1387-4CA6-816F-3879F97B5CBC}" type="slidenum">
               <a:rPr lang="en-US"/>
-              <a:t>2</a:t>
+              <a:t>15</a:t>
             </a:fld>
             <a:endParaRPr lang="en-US"/>
           </a:p>
@@ -1840,6 +1826,93 @@
       </p:grpSpPr>
       <p:sp>
         <p:nvSpPr>
+          <p:cNvPr id="2" name="スライド イメージ プレースホルダー 1"/>
+          <p:cNvSpPr>
+            <a:spLocks noGrp="1" noRot="1" noChangeAspect="1"/>
+          </p:cNvSpPr>
+          <p:nvPr>
+            <p:ph type="sldImg"/>
+          </p:nvPr>
+        </p:nvSpPr>
+        <p:spPr>
+          <a:xfrm>
+            <a:off x="-228600" y="1524000"/>
+            <a:ext cx="7315200" cy="4114800"/>
+          </a:xfrm>
+          <a:prstGeom prst="rect">
+            <a:avLst/>
+          </a:prstGeom>
+          <a:noFill/>
+          <a:ln w="12700">
+            <a:solidFill>
+              <a:prstClr val="black"/>
+            </a:solidFill>
+          </a:ln>
+        </p:spPr>
+      </p:sp>
+      <p:sp>
+        <p:nvSpPr>
+          <p:cNvPr id="3" name="ノート プレースホルダー 2"/>
+          <p:cNvSpPr>
+            <a:spLocks noGrp="1"/>
+          </p:cNvSpPr>
+          <p:nvPr>
+            <p:ph type="body" idx="1"/>
+          </p:nvPr>
+        </p:nvSpPr>
+        <p:spPr>
+          <a:xfrm>
+            <a:off x="685800" y="5867400"/>
+            <a:ext cx="5486400" cy="4800600"/>
+          </a:xfrm>
+          <a:prstGeom prst="rect">
+            <a:avLst/>
+          </a:prstGeom>
+        </p:spPr>
+        <p:txBody>
+          <a:bodyPr/>
+          <a:lstStyle/>
+          <a:p>
+            <a:r>
+              <a:rPr kumimoji="1" lang="ja-JP" altLang="en-US"/>
+              <a:t>質疑応答用のスライド。発表では表示せず、質問が来たときに参照してもよい。
+回答はあくまで例なので、自分たちの言葉に直して使う。</a:t>
+            </a:r>
+          </a:p>
+        </p:txBody>
+      </p:sp>
+    </p:spTree>
+    <p:extLst>
+      <p:ext uri="{BB962C8B-B14F-4D97-AF65-F5344CB8AC3E}">
+        <p14:creationId xmlns:p14="http://schemas.microsoft.com/office/powerpoint/2010/main" val="1456275994"/>
+      </p:ext>
+    </p:extLst>
+  </p:cSld>
+  <p:clrMapOvr>
+    <a:masterClrMapping/>
+  </p:clrMapOvr>
+</p:notes>
+</file>
+
+<file path=ppt/notesSlides/notesSlide17.xml><?xml version="1.0" encoding="utf-8"?>
+<p:notes xmlns:a="http://schemas.openxmlformats.org/drawingml/2006/main" xmlns:r="http://schemas.openxmlformats.org/officeDocument/2006/relationships" xmlns:p="http://schemas.openxmlformats.org/presentationml/2006/main">
+  <p:cSld>
+    <p:spTree>
+      <p:nvGrpSpPr>
+        <p:cNvPr id="1" name=""/>
+        <p:cNvGrpSpPr/>
+        <p:nvPr/>
+      </p:nvGrpSpPr>
+      <p:grpSpPr>
+        <a:xfrm>
+          <a:off x="0" y="0"/>
+          <a:ext cx="0" cy="0"/>
+          <a:chOff x="0" y="0"/>
+          <a:chExt cx="0" cy="0"/>
+        </a:xfrm>
+      </p:grpSpPr>
+      <p:sp>
+        <p:nvSpPr>
           <p:cNvPr id="2" name="Slide Image Placeholder 1"/>
           <p:cNvSpPr>
             <a:spLocks noGrp="1" noRot="1" noChangeAspect="1"/>
@@ -1867,11 +1940,11 @@
           <a:p>
             <a:r>
               <a:rPr lang="en-US" dirty="0"/>
-              <a:t>【1 分】
-残りの三つは、まだ直せていません。改善の方法を説明します。
-一つ目は、ディスプレイが小さく文字が見づらいという点です。大きい画面に替え、一度に出す文字を減らして文字を大きくします。
-二つ目は、側面に IC タグをかざすのが分かりづらいという点です。読み取る部分を正面に移し、かざす場所に目印を付けます。
-三つ目は、管理者からモジュールに通知したいという要望です。モジュールにブザーを付け、管理画面から音と文字で呼び出せるようにします。</a:t>
+              <a:t>【1 分 30 秒】
+次に、工場の中での人の動きをシミュレーションしました。作業者 15 人、機材 30 台、タスク 151 件の一日です。上が熟練の管理者が仕事を割り当てる従来の運用、下が Gemmba と AI の割当です。線は作業者が歩いた道のりです。
+従来の運用では、仕事が終わるたびに管理者の席へ歩いて戻り、次の指示を待ちます。機材に着いても前に使っていた人を探して歩き回ることがあります。Gemmba では、その場でタッチすれば次の仕事が出るので、こうした往復が減ります。なお、タッチ忘れや操作ミスで従来どおり管理者の席へ行く場合も 5% 入れて計算しています。
+結果として、全タスクが終わる時刻は 18 時 45 分から 16 時 44 分と約 2 時間早くなり、歩いた距離は 19.19 km から 5.24 km、ムダな時間は 15 人の合計で 1352 分から 588 分に減りました。
+※ 実際の工場のデータではなく、シミュレーションの結果である点に注意。</a:t>
             </a:r>
             <a:endParaRPr lang="en-US" dirty="0"/>
           </a:p>
@@ -1894,7 +1967,7 @@
           <a:p>
             <a:fld id="{F7021451-1387-4CA6-816F-3879F97B5CBC}" type="slidenum">
               <a:rPr lang="en-US"/>
-              <a:t>3</a:t>
+              <a:t>1</a:t>
             </a:fld>
             <a:endParaRPr lang="en-US"/>
           </a:p>
@@ -3618,7 +3691,7 @@
           </a:prstGeom>
           <a:extLst>
             <a:ext uri="{C572A759-6A51-4108-AA02-DFA0A04FC94B}">
-              <ma14:wrappingTextBoxFlag xmlns:ma14="http://schemas.microsoft.com/office/mac/drawingml/2011/main" xmlns="" val="0"/>
+              <ma14:wrappingTextBoxFlag xmlns="" xmlns:ma14="http://schemas.microsoft.com/office/mac/drawingml/2011/main" val="0"/>
             </a:ext>
           </a:extLst>
         </p:spPr>
@@ -3693,7 +3766,7 @@
           </a:prstGeom>
           <a:extLst>
             <a:ext uri="{C572A759-6A51-4108-AA02-DFA0A04FC94B}">
-              <ma14:wrappingTextBoxFlag xmlns:ma14="http://schemas.microsoft.com/office/mac/drawingml/2011/main" xmlns="" val="0"/>
+              <ma14:wrappingTextBoxFlag xmlns="" xmlns:ma14="http://schemas.microsoft.com/office/mac/drawingml/2011/main" val="0"/>
             </a:ext>
           </a:extLst>
         </p:spPr>
@@ -6449,7 +6522,7 @@
           </a:prstGeom>
           <a:extLst>
             <a:ext uri="{C572A759-6A51-4108-AA02-DFA0A04FC94B}">
-              <ma14:wrappingTextBoxFlag xmlns:ma14="http://schemas.microsoft.com/office/mac/drawingml/2011/main" xmlns="" val="0"/>
+              <ma14:wrappingTextBoxFlag xmlns="" xmlns:ma14="http://schemas.microsoft.com/office/mac/drawingml/2011/main" val="0"/>
             </a:ext>
           </a:extLst>
         </p:spPr>
@@ -6801,7 +6874,7 @@
           </a:prstGeom>
           <a:extLst>
             <a:ext uri="{C572A759-6A51-4108-AA02-DFA0A04FC94B}">
-              <ma14:wrappingTextBoxFlag xmlns:ma14="http://schemas.microsoft.com/office/mac/drawingml/2011/main" xmlns="" val="0"/>
+              <ma14:wrappingTextBoxFlag xmlns="" xmlns:ma14="http://schemas.microsoft.com/office/mac/drawingml/2011/main" val="0"/>
             </a:ext>
           </a:extLst>
         </p:spPr>
@@ -6835,6 +6908,2679 @@
 </file>
 
 <file path=ppt/slides/slide12.xml><?xml version="1.0" encoding="utf-8"?>
+<p:sld xmlns:a="http://schemas.openxmlformats.org/drawingml/2006/main" xmlns:r="http://schemas.openxmlformats.org/officeDocument/2006/relationships" xmlns:p="http://schemas.openxmlformats.org/presentationml/2006/main">
+  <p:cSld name="Slide 1">
+    <p:spTree>
+      <p:nvGrpSpPr>
+        <p:cNvPr id="1" name=""/>
+        <p:cNvGrpSpPr/>
+        <p:nvPr/>
+      </p:nvGrpSpPr>
+      <p:grpSpPr>
+        <a:xfrm>
+          <a:off x="0" y="0"/>
+          <a:ext cx="0" cy="0"/>
+          <a:chOff x="0" y="0"/>
+          <a:chExt cx="0" cy="0"/>
+        </a:xfrm>
+      </p:grpSpPr>
+      <p:sp>
+        <p:nvSpPr>
+          <p:cNvPr id="2" name="Text 0"/>
+          <p:cNvSpPr>
+            <a:spLocks noGrp="1"/>
+          </p:cNvSpPr>
+          <p:nvPr>
+            <p:ph type="body" idx="100" hasCustomPrompt="1"/>
+          </p:nvPr>
+        </p:nvSpPr>
+        <p:spPr>
+          <a:xfrm>
+            <a:off x="548640" y="274320"/>
+            <a:ext cx="11094415" cy="320040"/>
+          </a:xfrm>
+          <a:prstGeom prst="rect">
+            <a:avLst/>
+          </a:prstGeom>
+          <a:noFill/>
+          <a:ln/>
+        </p:spPr>
+        <p:txBody>
+          <a:bodyPr wrap="square" lIns="0" tIns="0" rIns="0" bIns="0" rtlCol="0" anchor="ctr"/>
+          <a:lstStyle/>
+          <a:p>
+            <a:pPr marL="0" indent="0" algn="l">
+              <a:buNone/>
+            </a:pPr>
+            <a:r>
+              <a:rPr lang="ja-JP" altLang="en-US" sz="1400" b="1" dirty="0">
+                <a:solidFill>
+                  <a:schemeClr val="accent1"/>
+                </a:solidFill>
+              </a:rPr>
+              <a:t>7. 導入先からの評価</a:t>
+            </a:r>
+            <a:endParaRPr lang="ja-JP" sz="1400" dirty="0"/>
+          </a:p>
+        </p:txBody>
+      </p:sp>
+      <p:sp>
+        <p:nvSpPr>
+          <p:cNvPr id="3" name="Text 0"/>
+          <p:cNvSpPr>
+            <a:spLocks noGrp="1"/>
+          </p:cNvSpPr>
+          <p:nvPr>
+            <p:ph type="title" idx="101" hasCustomPrompt="1"/>
+          </p:nvPr>
+        </p:nvSpPr>
+        <p:spPr>
+          <a:xfrm>
+            <a:off x="548640" y="594360"/>
+            <a:ext cx="11094415" cy="731520"/>
+          </a:xfrm>
+          <a:prstGeom prst="rect">
+            <a:avLst/>
+          </a:prstGeom>
+          <a:noFill/>
+          <a:ln/>
+        </p:spPr>
+        <p:txBody>
+          <a:bodyPr wrap="square" lIns="0" tIns="0" rIns="0" bIns="0" rtlCol="0" anchor="ctr"/>
+          <a:lstStyle/>
+          <a:p>
+            <a:pPr marL="0" indent="0" algn="l">
+              <a:buNone/>
+            </a:pPr>
+            <a:r>
+              <a:rPr lang="ja-JP" altLang="en-US" sz="3200" b="1" dirty="0">
+                <a:solidFill>
+                  <a:schemeClr val="tx2"/>
+                </a:solidFill>
+              </a:rPr>
+              <a:t>導入先の評価 ①　良かった点</a:t>
+            </a:r>
+            <a:endParaRPr lang="ja-JP" sz="3200" dirty="0"/>
+          </a:p>
+        </p:txBody>
+      </p:sp>
+      <p:sp>
+        <p:nvSpPr>
+          <p:cNvPr id="4" name="良かった点_前置き"/>
+          <p:cNvSpPr txBox="1"/>
+          <p:nvPr/>
+        </p:nvSpPr>
+        <p:spPr>
+          <a:xfrm>
+            <a:off x="548640" y="1463040"/>
+            <a:ext cx="11094415" cy="457200"/>
+          </a:xfrm>
+          <a:prstGeom prst="rect">
+            <a:avLst/>
+          </a:prstGeom>
+          <a:noFill/>
+          <a:ln/>
+        </p:spPr>
+        <p:txBody>
+          <a:bodyPr wrap="square" lIns="0" tIns="0" rIns="0" bIns="0" rtlCol="0" anchor="ctr"/>
+          <a:lstStyle/>
+          <a:p>
+            <a:pPr marL="0" indent="0">
+              <a:buNone/>
+            </a:pPr>
+            <a:r>
+              <a:rPr lang="ja-JP" altLang="en-US" sz="1800" dirty="0">
+                <a:solidFill>
+                  <a:schemeClr val="accent4"/>
+                </a:solidFill>
+              </a:rPr>
+              <a:t>導入先の工場で使っていただいた方から、次の評価をいただきました</a:t>
+            </a:r>
+            <a:endParaRPr lang="ja-JP" sz="1800" dirty="0"/>
+          </a:p>
+        </p:txBody>
+      </p:sp>
+      <p:sp>
+        <p:nvSpPr>
+          <p:cNvPr id="5" name="良かった点1"/>
+          <p:cNvSpPr/>
+          <p:nvPr/>
+        </p:nvSpPr>
+        <p:spPr>
+          <a:xfrm>
+            <a:off x="548640" y="2103120"/>
+            <a:ext cx="11094415" cy="713232"/>
+          </a:xfrm>
+          <a:prstGeom prst="roundRect">
+            <a:avLst>
+              <a:gd name="adj" fmla="val 10256"/>
+            </a:avLst>
+          </a:prstGeom>
+          <a:solidFill>
+            <a:schemeClr val="bg2"/>
+          </a:solidFill>
+          <a:ln w="12700">
+            <a:solidFill>
+              <a:schemeClr val="bg2"/>
+            </a:solidFill>
+            <a:prstDash val="solid"/>
+          </a:ln>
+        </p:spPr>
+        <p:txBody>
+          <a:bodyPr/>
+          <a:lstStyle/>
+          <a:p>
+            <a:endParaRPr lang="ja-JP" altLang="en-US"/>
+          </a:p>
+        </p:txBody>
+      </p:sp>
+      <p:sp>
+        <p:nvSpPr>
+          <p:cNvPr id="6" name="良かった点1_印"/>
+          <p:cNvSpPr/>
+          <p:nvPr/>
+        </p:nvSpPr>
+        <p:spPr>
+          <a:xfrm>
+            <a:off x="777240" y="2231136"/>
+            <a:ext cx="457200" cy="457200"/>
+          </a:xfrm>
+          <a:prstGeom prst="ellipse">
+            <a:avLst/>
+          </a:prstGeom>
+          <a:solidFill>
+            <a:schemeClr val="accent1"/>
+          </a:solidFill>
+          <a:ln w="12700">
+            <a:solidFill>
+              <a:schemeClr val="accent1"/>
+            </a:solidFill>
+            <a:prstDash val="solid"/>
+          </a:ln>
+        </p:spPr>
+        <p:txBody>
+          <a:bodyPr/>
+          <a:lstStyle/>
+          <a:p>
+            <a:endParaRPr lang="ja-JP" altLang="en-US"/>
+          </a:p>
+        </p:txBody>
+      </p:sp>
+      <p:sp>
+        <p:nvSpPr>
+          <p:cNvPr id="7" name="良かった点1_印_文字"/>
+          <p:cNvSpPr txBox="1"/>
+          <p:nvPr/>
+        </p:nvSpPr>
+        <p:spPr>
+          <a:xfrm>
+            <a:off x="777240" y="2231136"/>
+            <a:ext cx="457200" cy="457200"/>
+          </a:xfrm>
+          <a:prstGeom prst="rect">
+            <a:avLst/>
+          </a:prstGeom>
+          <a:noFill/>
+          <a:ln/>
+        </p:spPr>
+        <p:txBody>
+          <a:bodyPr wrap="square" lIns="0" tIns="0" rIns="0" bIns="0" rtlCol="0" anchor="ctr"/>
+          <a:lstStyle/>
+          <a:p>
+            <a:pPr marL="0" indent="0" algn="ctr">
+              <a:buNone/>
+            </a:pPr>
+            <a:r>
+              <a:rPr lang="ja-JP" altLang="en-US" sz="1300" b="1" dirty="0">
+                <a:solidFill>
+                  <a:schemeClr val="bg1"/>
+                </a:solidFill>
+              </a:rPr>
+              <a:t>✓</a:t>
+            </a:r>
+            <a:endParaRPr lang="ja-JP" sz="1300" dirty="0"/>
+          </a:p>
+        </p:txBody>
+      </p:sp>
+      <p:sp>
+        <p:nvSpPr>
+          <p:cNvPr id="8" name="良かった点1_文字"/>
+          <p:cNvSpPr txBox="1"/>
+          <p:nvPr/>
+        </p:nvSpPr>
+        <p:spPr>
+          <a:xfrm>
+            <a:off x="1463040" y="2103120"/>
+            <a:ext cx="9905695" cy="713232"/>
+          </a:xfrm>
+          <a:prstGeom prst="rect">
+            <a:avLst/>
+          </a:prstGeom>
+          <a:noFill/>
+          <a:ln/>
+        </p:spPr>
+        <p:txBody>
+          <a:bodyPr wrap="square" lIns="0" tIns="0" rIns="0" bIns="0" rtlCol="0" anchor="ctr"/>
+          <a:lstStyle/>
+          <a:p>
+            <a:pPr marL="0" indent="0">
+              <a:buNone/>
+            </a:pPr>
+            <a:r>
+              <a:rPr lang="ja-JP" altLang="en-US" sz="2100" b="1" dirty="0">
+                <a:solidFill>
+                  <a:schemeClr val="tx2"/>
+                </a:solidFill>
+              </a:rPr>
+              <a:t>導入が簡単だった</a:t>
+            </a:r>
+            <a:endParaRPr lang="ja-JP" sz="2100" dirty="0"/>
+          </a:p>
+        </p:txBody>
+      </p:sp>
+      <p:sp>
+        <p:nvSpPr>
+          <p:cNvPr id="9" name="良かった点2"/>
+          <p:cNvSpPr/>
+          <p:nvPr/>
+        </p:nvSpPr>
+        <p:spPr>
+          <a:xfrm>
+            <a:off x="548640" y="2962656"/>
+            <a:ext cx="11094415" cy="713232"/>
+          </a:xfrm>
+          <a:prstGeom prst="roundRect">
+            <a:avLst>
+              <a:gd name="adj" fmla="val 10256"/>
+            </a:avLst>
+          </a:prstGeom>
+          <a:solidFill>
+            <a:schemeClr val="bg2"/>
+          </a:solidFill>
+          <a:ln w="12700">
+            <a:solidFill>
+              <a:schemeClr val="bg2"/>
+            </a:solidFill>
+            <a:prstDash val="solid"/>
+          </a:ln>
+        </p:spPr>
+        <p:txBody>
+          <a:bodyPr/>
+          <a:lstStyle/>
+          <a:p>
+            <a:endParaRPr lang="ja-JP" altLang="en-US"/>
+          </a:p>
+        </p:txBody>
+      </p:sp>
+      <p:sp>
+        <p:nvSpPr>
+          <p:cNvPr id="10" name="良かった点2_印"/>
+          <p:cNvSpPr/>
+          <p:nvPr/>
+        </p:nvSpPr>
+        <p:spPr>
+          <a:xfrm>
+            <a:off x="777240" y="3090672"/>
+            <a:ext cx="457200" cy="457200"/>
+          </a:xfrm>
+          <a:prstGeom prst="ellipse">
+            <a:avLst/>
+          </a:prstGeom>
+          <a:solidFill>
+            <a:schemeClr val="accent1"/>
+          </a:solidFill>
+          <a:ln w="12700">
+            <a:solidFill>
+              <a:schemeClr val="accent1"/>
+            </a:solidFill>
+            <a:prstDash val="solid"/>
+          </a:ln>
+        </p:spPr>
+        <p:txBody>
+          <a:bodyPr/>
+          <a:lstStyle/>
+          <a:p>
+            <a:endParaRPr lang="ja-JP" altLang="en-US"/>
+          </a:p>
+        </p:txBody>
+      </p:sp>
+      <p:sp>
+        <p:nvSpPr>
+          <p:cNvPr id="11" name="良かった点2_印_文字"/>
+          <p:cNvSpPr txBox="1"/>
+          <p:nvPr/>
+        </p:nvSpPr>
+        <p:spPr>
+          <a:xfrm>
+            <a:off x="777240" y="3090672"/>
+            <a:ext cx="457200" cy="457200"/>
+          </a:xfrm>
+          <a:prstGeom prst="rect">
+            <a:avLst/>
+          </a:prstGeom>
+          <a:noFill/>
+          <a:ln/>
+        </p:spPr>
+        <p:txBody>
+          <a:bodyPr wrap="square" lIns="0" tIns="0" rIns="0" bIns="0" rtlCol="0" anchor="ctr"/>
+          <a:lstStyle/>
+          <a:p>
+            <a:pPr marL="0" indent="0" algn="ctr">
+              <a:buNone/>
+            </a:pPr>
+            <a:r>
+              <a:rPr lang="ja-JP" altLang="en-US" sz="1300" b="1" dirty="0">
+                <a:solidFill>
+                  <a:schemeClr val="bg1"/>
+                </a:solidFill>
+              </a:rPr>
+              <a:t>✓</a:t>
+            </a:r>
+            <a:endParaRPr lang="ja-JP" sz="1300" dirty="0"/>
+          </a:p>
+        </p:txBody>
+      </p:sp>
+      <p:sp>
+        <p:nvSpPr>
+          <p:cNvPr id="12" name="良かった点2_文字"/>
+          <p:cNvSpPr txBox="1"/>
+          <p:nvPr/>
+        </p:nvSpPr>
+        <p:spPr>
+          <a:xfrm>
+            <a:off x="1463040" y="2962656"/>
+            <a:ext cx="9905695" cy="713232"/>
+          </a:xfrm>
+          <a:prstGeom prst="rect">
+            <a:avLst/>
+          </a:prstGeom>
+          <a:noFill/>
+          <a:ln/>
+        </p:spPr>
+        <p:txBody>
+          <a:bodyPr wrap="square" lIns="0" tIns="0" rIns="0" bIns="0" rtlCol="0" anchor="ctr"/>
+          <a:lstStyle/>
+          <a:p>
+            <a:pPr marL="0" indent="0">
+              <a:buNone/>
+            </a:pPr>
+            <a:r>
+              <a:rPr lang="ja-JP" altLang="en-US" sz="2100" b="1" dirty="0">
+                <a:solidFill>
+                  <a:schemeClr val="tx2"/>
+                </a:solidFill>
+              </a:rPr>
+              <a:t>操作が分かりやすかった</a:t>
+            </a:r>
+            <a:endParaRPr lang="ja-JP" sz="2100" dirty="0"/>
+          </a:p>
+        </p:txBody>
+      </p:sp>
+      <p:sp>
+        <p:nvSpPr>
+          <p:cNvPr id="13" name="良かった点3"/>
+          <p:cNvSpPr/>
+          <p:nvPr/>
+        </p:nvSpPr>
+        <p:spPr>
+          <a:xfrm>
+            <a:off x="548640" y="3822192"/>
+            <a:ext cx="11094415" cy="713232"/>
+          </a:xfrm>
+          <a:prstGeom prst="roundRect">
+            <a:avLst>
+              <a:gd name="adj" fmla="val 10256"/>
+            </a:avLst>
+          </a:prstGeom>
+          <a:solidFill>
+            <a:schemeClr val="bg2"/>
+          </a:solidFill>
+          <a:ln w="12700">
+            <a:solidFill>
+              <a:schemeClr val="bg2"/>
+            </a:solidFill>
+            <a:prstDash val="solid"/>
+          </a:ln>
+        </p:spPr>
+        <p:txBody>
+          <a:bodyPr/>
+          <a:lstStyle/>
+          <a:p>
+            <a:endParaRPr lang="ja-JP" altLang="en-US"/>
+          </a:p>
+        </p:txBody>
+      </p:sp>
+      <p:sp>
+        <p:nvSpPr>
+          <p:cNvPr id="14" name="良かった点3_印"/>
+          <p:cNvSpPr/>
+          <p:nvPr/>
+        </p:nvSpPr>
+        <p:spPr>
+          <a:xfrm>
+            <a:off x="777240" y="3950208"/>
+            <a:ext cx="457200" cy="457200"/>
+          </a:xfrm>
+          <a:prstGeom prst="ellipse">
+            <a:avLst/>
+          </a:prstGeom>
+          <a:solidFill>
+            <a:schemeClr val="accent1"/>
+          </a:solidFill>
+          <a:ln w="12700">
+            <a:solidFill>
+              <a:schemeClr val="accent1"/>
+            </a:solidFill>
+            <a:prstDash val="solid"/>
+          </a:ln>
+        </p:spPr>
+        <p:txBody>
+          <a:bodyPr/>
+          <a:lstStyle/>
+          <a:p>
+            <a:endParaRPr lang="ja-JP" altLang="en-US"/>
+          </a:p>
+        </p:txBody>
+      </p:sp>
+      <p:sp>
+        <p:nvSpPr>
+          <p:cNvPr id="15" name="良かった点3_印_文字"/>
+          <p:cNvSpPr txBox="1"/>
+          <p:nvPr/>
+        </p:nvSpPr>
+        <p:spPr>
+          <a:xfrm>
+            <a:off x="777240" y="3950208"/>
+            <a:ext cx="457200" cy="457200"/>
+          </a:xfrm>
+          <a:prstGeom prst="rect">
+            <a:avLst/>
+          </a:prstGeom>
+          <a:noFill/>
+          <a:ln/>
+        </p:spPr>
+        <p:txBody>
+          <a:bodyPr wrap="square" lIns="0" tIns="0" rIns="0" bIns="0" rtlCol="0" anchor="ctr"/>
+          <a:lstStyle/>
+          <a:p>
+            <a:pPr marL="0" indent="0" algn="ctr">
+              <a:buNone/>
+            </a:pPr>
+            <a:r>
+              <a:rPr lang="ja-JP" altLang="en-US" sz="1300" b="1" dirty="0">
+                <a:solidFill>
+                  <a:schemeClr val="bg1"/>
+                </a:solidFill>
+              </a:rPr>
+              <a:t>✓</a:t>
+            </a:r>
+            <a:endParaRPr lang="ja-JP" sz="1300" dirty="0"/>
+          </a:p>
+        </p:txBody>
+      </p:sp>
+      <p:sp>
+        <p:nvSpPr>
+          <p:cNvPr id="16" name="良かった点3_文字"/>
+          <p:cNvSpPr txBox="1"/>
+          <p:nvPr/>
+        </p:nvSpPr>
+        <p:spPr>
+          <a:xfrm>
+            <a:off x="1463040" y="3822192"/>
+            <a:ext cx="9905695" cy="713232"/>
+          </a:xfrm>
+          <a:prstGeom prst="rect">
+            <a:avLst/>
+          </a:prstGeom>
+          <a:noFill/>
+          <a:ln/>
+        </p:spPr>
+        <p:txBody>
+          <a:bodyPr wrap="square" lIns="0" tIns="0" rIns="0" bIns="0" rtlCol="0" anchor="ctr"/>
+          <a:lstStyle/>
+          <a:p>
+            <a:pPr marL="0" indent="0">
+              <a:buNone/>
+            </a:pPr>
+            <a:r>
+              <a:rPr lang="ja-JP" altLang="en-US" sz="2100" b="1" dirty="0">
+                <a:solidFill>
+                  <a:schemeClr val="tx2"/>
+                </a:solidFill>
+              </a:rPr>
+              <a:t>作業にかかった時間が記録されるのが便利</a:t>
+            </a:r>
+            <a:endParaRPr lang="ja-JP" sz="2100" dirty="0"/>
+          </a:p>
+        </p:txBody>
+      </p:sp>
+      <p:sp>
+        <p:nvSpPr>
+          <p:cNvPr id="17" name="良かった点4"/>
+          <p:cNvSpPr/>
+          <p:nvPr/>
+        </p:nvSpPr>
+        <p:spPr>
+          <a:xfrm>
+            <a:off x="548640" y="4681728"/>
+            <a:ext cx="11094415" cy="713232"/>
+          </a:xfrm>
+          <a:prstGeom prst="roundRect">
+            <a:avLst>
+              <a:gd name="adj" fmla="val 10256"/>
+            </a:avLst>
+          </a:prstGeom>
+          <a:solidFill>
+            <a:schemeClr val="bg2"/>
+          </a:solidFill>
+          <a:ln w="12700">
+            <a:solidFill>
+              <a:schemeClr val="bg2"/>
+            </a:solidFill>
+            <a:prstDash val="solid"/>
+          </a:ln>
+        </p:spPr>
+        <p:txBody>
+          <a:bodyPr/>
+          <a:lstStyle/>
+          <a:p>
+            <a:endParaRPr lang="ja-JP" altLang="en-US"/>
+          </a:p>
+        </p:txBody>
+      </p:sp>
+      <p:sp>
+        <p:nvSpPr>
+          <p:cNvPr id="18" name="良かった点4_印"/>
+          <p:cNvSpPr/>
+          <p:nvPr/>
+        </p:nvSpPr>
+        <p:spPr>
+          <a:xfrm>
+            <a:off x="777240" y="4809744"/>
+            <a:ext cx="457200" cy="457200"/>
+          </a:xfrm>
+          <a:prstGeom prst="ellipse">
+            <a:avLst/>
+          </a:prstGeom>
+          <a:solidFill>
+            <a:schemeClr val="accent1"/>
+          </a:solidFill>
+          <a:ln w="12700">
+            <a:solidFill>
+              <a:schemeClr val="accent1"/>
+            </a:solidFill>
+            <a:prstDash val="solid"/>
+          </a:ln>
+        </p:spPr>
+        <p:txBody>
+          <a:bodyPr/>
+          <a:lstStyle/>
+          <a:p>
+            <a:endParaRPr lang="ja-JP" altLang="en-US"/>
+          </a:p>
+        </p:txBody>
+      </p:sp>
+      <p:sp>
+        <p:nvSpPr>
+          <p:cNvPr id="19" name="良かった点4_印_文字"/>
+          <p:cNvSpPr txBox="1"/>
+          <p:nvPr/>
+        </p:nvSpPr>
+        <p:spPr>
+          <a:xfrm>
+            <a:off x="777240" y="4809744"/>
+            <a:ext cx="457200" cy="457200"/>
+          </a:xfrm>
+          <a:prstGeom prst="rect">
+            <a:avLst/>
+          </a:prstGeom>
+          <a:noFill/>
+          <a:ln/>
+        </p:spPr>
+        <p:txBody>
+          <a:bodyPr wrap="square" lIns="0" tIns="0" rIns="0" bIns="0" rtlCol="0" anchor="ctr"/>
+          <a:lstStyle/>
+          <a:p>
+            <a:pPr marL="0" indent="0" algn="ctr">
+              <a:buNone/>
+            </a:pPr>
+            <a:r>
+              <a:rPr lang="ja-JP" altLang="en-US" sz="1300" b="1" dirty="0">
+                <a:solidFill>
+                  <a:schemeClr val="bg1"/>
+                </a:solidFill>
+              </a:rPr>
+              <a:t>✓</a:t>
+            </a:r>
+            <a:endParaRPr lang="ja-JP" sz="1300" dirty="0"/>
+          </a:p>
+        </p:txBody>
+      </p:sp>
+      <p:sp>
+        <p:nvSpPr>
+          <p:cNvPr id="20" name="良かった点4_文字"/>
+          <p:cNvSpPr txBox="1"/>
+          <p:nvPr/>
+        </p:nvSpPr>
+        <p:spPr>
+          <a:xfrm>
+            <a:off x="1463040" y="4681728"/>
+            <a:ext cx="9905695" cy="713232"/>
+          </a:xfrm>
+          <a:prstGeom prst="rect">
+            <a:avLst/>
+          </a:prstGeom>
+          <a:noFill/>
+          <a:ln/>
+        </p:spPr>
+        <p:txBody>
+          <a:bodyPr wrap="square" lIns="0" tIns="0" rIns="0" bIns="0" rtlCol="0" anchor="ctr"/>
+          <a:lstStyle/>
+          <a:p>
+            <a:pPr marL="0" indent="0">
+              <a:buNone/>
+            </a:pPr>
+            <a:r>
+              <a:rPr lang="ja-JP" altLang="en-US" sz="2100" b="1" dirty="0">
+                <a:solidFill>
+                  <a:schemeClr val="tx2"/>
+                </a:solidFill>
+              </a:rPr>
+              <a:t>急ぎの仕事を見落とさないのが便利</a:t>
+            </a:r>
+            <a:endParaRPr lang="ja-JP" sz="2100" dirty="0"/>
+          </a:p>
+        </p:txBody>
+      </p:sp>
+      <p:sp>
+        <p:nvSpPr>
+          <p:cNvPr id="21" name="良かった点5"/>
+          <p:cNvSpPr/>
+          <p:nvPr/>
+        </p:nvSpPr>
+        <p:spPr>
+          <a:xfrm>
+            <a:off x="548640" y="5541264"/>
+            <a:ext cx="11094415" cy="713232"/>
+          </a:xfrm>
+          <a:prstGeom prst="roundRect">
+            <a:avLst>
+              <a:gd name="adj" fmla="val 10256"/>
+            </a:avLst>
+          </a:prstGeom>
+          <a:solidFill>
+            <a:schemeClr val="bg2"/>
+          </a:solidFill>
+          <a:ln w="12700">
+            <a:solidFill>
+              <a:schemeClr val="bg2"/>
+            </a:solidFill>
+            <a:prstDash val="solid"/>
+          </a:ln>
+        </p:spPr>
+        <p:txBody>
+          <a:bodyPr/>
+          <a:lstStyle/>
+          <a:p>
+            <a:endParaRPr lang="ja-JP" altLang="en-US"/>
+          </a:p>
+        </p:txBody>
+      </p:sp>
+      <p:sp>
+        <p:nvSpPr>
+          <p:cNvPr id="22" name="良かった点5_印"/>
+          <p:cNvSpPr/>
+          <p:nvPr/>
+        </p:nvSpPr>
+        <p:spPr>
+          <a:xfrm>
+            <a:off x="777240" y="5669280"/>
+            <a:ext cx="457200" cy="457200"/>
+          </a:xfrm>
+          <a:prstGeom prst="ellipse">
+            <a:avLst/>
+          </a:prstGeom>
+          <a:solidFill>
+            <a:schemeClr val="accent1"/>
+          </a:solidFill>
+          <a:ln w="12700">
+            <a:solidFill>
+              <a:schemeClr val="accent1"/>
+            </a:solidFill>
+            <a:prstDash val="solid"/>
+          </a:ln>
+        </p:spPr>
+        <p:txBody>
+          <a:bodyPr/>
+          <a:lstStyle/>
+          <a:p>
+            <a:endParaRPr lang="ja-JP" altLang="en-US"/>
+          </a:p>
+        </p:txBody>
+      </p:sp>
+      <p:sp>
+        <p:nvSpPr>
+          <p:cNvPr id="23" name="良かった点5_印_文字"/>
+          <p:cNvSpPr txBox="1"/>
+          <p:nvPr/>
+        </p:nvSpPr>
+        <p:spPr>
+          <a:xfrm>
+            <a:off x="777240" y="5669280"/>
+            <a:ext cx="457200" cy="457200"/>
+          </a:xfrm>
+          <a:prstGeom prst="rect">
+            <a:avLst/>
+          </a:prstGeom>
+          <a:noFill/>
+          <a:ln/>
+        </p:spPr>
+        <p:txBody>
+          <a:bodyPr wrap="square" lIns="0" tIns="0" rIns="0" bIns="0" rtlCol="0" anchor="ctr"/>
+          <a:lstStyle/>
+          <a:p>
+            <a:pPr marL="0" indent="0" algn="ctr">
+              <a:buNone/>
+            </a:pPr>
+            <a:r>
+              <a:rPr lang="ja-JP" altLang="en-US" sz="1300" b="1" dirty="0">
+                <a:solidFill>
+                  <a:schemeClr val="bg1"/>
+                </a:solidFill>
+              </a:rPr>
+              <a:t>✓</a:t>
+            </a:r>
+            <a:endParaRPr lang="ja-JP" sz="1300" dirty="0"/>
+          </a:p>
+        </p:txBody>
+      </p:sp>
+      <p:sp>
+        <p:nvSpPr>
+          <p:cNvPr id="24" name="良かった点5_文字"/>
+          <p:cNvSpPr txBox="1"/>
+          <p:nvPr/>
+        </p:nvSpPr>
+        <p:spPr>
+          <a:xfrm>
+            <a:off x="1463040" y="5541264"/>
+            <a:ext cx="9905695" cy="713232"/>
+          </a:xfrm>
+          <a:prstGeom prst="rect">
+            <a:avLst/>
+          </a:prstGeom>
+          <a:noFill/>
+          <a:ln/>
+        </p:spPr>
+        <p:txBody>
+          <a:bodyPr wrap="square" lIns="0" tIns="0" rIns="0" bIns="0" rtlCol="0" anchor="ctr"/>
+          <a:lstStyle/>
+          <a:p>
+            <a:pPr marL="0" indent="0">
+              <a:buNone/>
+            </a:pPr>
+            <a:r>
+              <a:rPr lang="ja-JP" altLang="en-US" sz="2100" b="1" dirty="0">
+                <a:solidFill>
+                  <a:schemeClr val="tx2"/>
+                </a:solidFill>
+              </a:rPr>
+              <a:t>ダッシュボードを見て、空いている機械がすぐ見つかるのが便利だった</a:t>
+            </a:r>
+            <a:endParaRPr lang="ja-JP" sz="2100" dirty="0"/>
+          </a:p>
+        </p:txBody>
+      </p:sp>
+      <p:sp>
+        <p:nvSpPr>
+          <p:cNvPr id="25" name="Slide Number Placeholder 0"/>
+          <p:cNvSpPr>
+            <a:spLocks noGrp="1"/>
+          </p:cNvSpPr>
+          <p:nvPr>
+            <p:ph type="sldNum" sz="quarter" idx="4294967295"/>
+          </p:nvPr>
+        </p:nvSpPr>
+        <p:spPr>
+          <a:xfrm>
+            <a:off x="10911535" y="6400800"/>
+            <a:ext cx="731520" cy="274320"/>
+          </a:xfrm>
+          <a:prstGeom prst="rect">
+            <a:avLst/>
+          </a:prstGeom>
+          <a:extLst>
+            <a:ext uri="{C572A759-6A51-4108-AA02-DFA0A04FC94B}">
+              <ma14:wrappingTextBoxFlag xmlns:ma14="http://schemas.microsoft.com/office/mac/drawingml/2011/main" xmlns="" val="0"/>
+            </a:ext>
+          </a:extLst>
+        </p:spPr>
+        <p:txBody>
+          <a:bodyPr lIns="0" tIns="0" rIns="0" bIns="0"/>
+          <a:lstStyle>
+            <a:lvl1pPr>
+              <a:defRPr sz="1100">
+                <a:solidFill>
+                  <a:schemeClr val="accent3"/>
+                </a:solidFill>
+              </a:defRPr>
+            </a:lvl1pPr>
+          </a:lstStyle>
+          <a:p>
+            <a:pPr algn="r"/>
+            <a:fld id="{F7021451-1387-4CA6-816F-3879F97B5CBC}" type="slidenum">
+              <a:rPr lang="en-US" b="0"/>
+              <a:t>12</a:t>
+            </a:fld>
+            <a:endParaRPr lang="en-US"/>
+          </a:p>
+        </p:txBody>
+      </p:sp>
+    </p:spTree>
+  </p:cSld>
+  <p:clrMapOvr>
+    <a:masterClrMapping/>
+  </p:clrMapOvr>
+</p:sld>
+</file>
+
+<file path=ppt/slides/slide13.xml><?xml version="1.0" encoding="utf-8"?>
+<p:sld xmlns:a="http://schemas.openxmlformats.org/drawingml/2006/main" xmlns:r="http://schemas.openxmlformats.org/officeDocument/2006/relationships" xmlns:p="http://schemas.openxmlformats.org/presentationml/2006/main">
+  <p:cSld name="Slide 2">
+    <p:spTree>
+      <p:nvGrpSpPr>
+        <p:cNvPr id="1" name=""/>
+        <p:cNvGrpSpPr/>
+        <p:nvPr/>
+      </p:nvGrpSpPr>
+      <p:grpSpPr>
+        <a:xfrm>
+          <a:off x="0" y="0"/>
+          <a:ext cx="0" cy="0"/>
+          <a:chOff x="0" y="0"/>
+          <a:chExt cx="0" cy="0"/>
+        </a:xfrm>
+      </p:grpSpPr>
+      <p:sp>
+        <p:nvSpPr>
+          <p:cNvPr id="2" name="Text 0"/>
+          <p:cNvSpPr>
+            <a:spLocks noGrp="1"/>
+          </p:cNvSpPr>
+          <p:nvPr>
+            <p:ph type="body" idx="100" hasCustomPrompt="1"/>
+          </p:nvPr>
+        </p:nvSpPr>
+        <p:spPr>
+          <a:xfrm>
+            <a:off x="548640" y="274320"/>
+            <a:ext cx="11094415" cy="320040"/>
+          </a:xfrm>
+          <a:prstGeom prst="rect">
+            <a:avLst/>
+          </a:prstGeom>
+          <a:noFill/>
+          <a:ln/>
+        </p:spPr>
+        <p:txBody>
+          <a:bodyPr wrap="square" lIns="0" tIns="0" rIns="0" bIns="0" rtlCol="0" anchor="ctr"/>
+          <a:lstStyle/>
+          <a:p>
+            <a:pPr marL="0" indent="0" algn="l">
+              <a:buNone/>
+            </a:pPr>
+            <a:r>
+              <a:rPr lang="ja-JP" altLang="en-US" sz="1400" b="1" dirty="0">
+                <a:solidFill>
+                  <a:schemeClr val="accent1"/>
+                </a:solidFill>
+              </a:rPr>
+              <a:t>7. 導入先からの評価</a:t>
+            </a:r>
+            <a:endParaRPr lang="ja-JP" sz="1400" dirty="0"/>
+          </a:p>
+        </p:txBody>
+      </p:sp>
+      <p:sp>
+        <p:nvSpPr>
+          <p:cNvPr id="3" name="Text 0"/>
+          <p:cNvSpPr>
+            <a:spLocks noGrp="1"/>
+          </p:cNvSpPr>
+          <p:nvPr>
+            <p:ph type="title" idx="101" hasCustomPrompt="1"/>
+          </p:nvPr>
+        </p:nvSpPr>
+        <p:spPr>
+          <a:xfrm>
+            <a:off x="548640" y="594360"/>
+            <a:ext cx="11094415" cy="731520"/>
+          </a:xfrm>
+          <a:prstGeom prst="rect">
+            <a:avLst/>
+          </a:prstGeom>
+          <a:noFill/>
+          <a:ln/>
+        </p:spPr>
+        <p:txBody>
+          <a:bodyPr wrap="square" lIns="0" tIns="0" rIns="0" bIns="0" rtlCol="0" anchor="ctr"/>
+          <a:lstStyle/>
+          <a:p>
+            <a:pPr marL="0" indent="0" algn="l">
+              <a:buNone/>
+            </a:pPr>
+            <a:r>
+              <a:rPr lang="ja-JP" altLang="en-US" sz="3200" b="1" dirty="0">
+                <a:solidFill>
+                  <a:schemeClr val="tx2"/>
+                </a:solidFill>
+              </a:rPr>
+              <a:t>導入先の評価 ②　悪かった</a:t>
+            </a:r>
+            <a:r>
+              <a:rPr lang="ja-JP" altLang="en-US" sz="3200" b="1">
+                <a:solidFill>
+                  <a:schemeClr val="tx2"/>
+                </a:solidFill>
+              </a:rPr>
+              <a:t>点と、</a:t>
+            </a:r>
+            <a:r>
+              <a:rPr lang="ja-JP" altLang="en-US"/>
+              <a:t>改善</a:t>
+            </a:r>
+            <a:r>
+              <a:rPr lang="ja-JP" altLang="en-US" sz="3200" b="1">
+                <a:solidFill>
+                  <a:schemeClr val="tx2"/>
+                </a:solidFill>
+              </a:rPr>
+              <a:t>した</a:t>
+            </a:r>
+            <a:r>
+              <a:rPr lang="ja-JP" altLang="en-US" sz="3200" b="1" dirty="0">
+                <a:solidFill>
+                  <a:schemeClr val="tx2"/>
+                </a:solidFill>
+              </a:rPr>
+              <a:t>ところ</a:t>
+            </a:r>
+            <a:endParaRPr lang="ja-JP" sz="3200" dirty="0"/>
+          </a:p>
+        </p:txBody>
+      </p:sp>
+      <p:sp>
+        <p:nvSpPr>
+          <p:cNvPr id="4" name="直した1_評価"/>
+          <p:cNvSpPr/>
+          <p:nvPr/>
+        </p:nvSpPr>
+        <p:spPr>
+          <a:xfrm>
+            <a:off x="548640" y="1554480"/>
+            <a:ext cx="4023360" cy="2148840"/>
+          </a:xfrm>
+          <a:prstGeom prst="roundRect">
+            <a:avLst>
+              <a:gd name="adj" fmla="val 3404"/>
+            </a:avLst>
+          </a:prstGeom>
+          <a:solidFill>
+            <a:schemeClr val="bg2"/>
+          </a:solidFill>
+          <a:ln w="12700">
+            <a:solidFill>
+              <a:schemeClr val="bg2"/>
+            </a:solidFill>
+            <a:prstDash val="solid"/>
+          </a:ln>
+        </p:spPr>
+        <p:txBody>
+          <a:bodyPr/>
+          <a:lstStyle/>
+          <a:p>
+            <a:endParaRPr lang="ja-JP" altLang="en-US"/>
+          </a:p>
+        </p:txBody>
+      </p:sp>
+      <p:sp>
+        <p:nvSpPr>
+          <p:cNvPr id="5" name="直した1_評価_文字"/>
+          <p:cNvSpPr txBox="1"/>
+          <p:nvPr/>
+        </p:nvSpPr>
+        <p:spPr>
+          <a:xfrm>
+            <a:off x="822960" y="1554480"/>
+            <a:ext cx="3474720" cy="2148840"/>
+          </a:xfrm>
+          <a:prstGeom prst="rect">
+            <a:avLst/>
+          </a:prstGeom>
+          <a:noFill/>
+          <a:ln/>
+        </p:spPr>
+        <p:txBody>
+          <a:bodyPr wrap="square" lIns="0" tIns="0" rIns="0" bIns="0" rtlCol="0" anchor="ctr"/>
+          <a:lstStyle/>
+          <a:p>
+            <a:pPr marL="0" indent="0">
+              <a:buNone/>
+            </a:pPr>
+            <a:r>
+              <a:rPr lang="ja-JP" altLang="en-US" sz="1800" b="1" dirty="0">
+                <a:solidFill>
+                  <a:schemeClr val="tx2"/>
+                </a:solidFill>
+              </a:rPr>
+              <a:t>タッチを忘れる人がいた</a:t>
+            </a:r>
+            <a:endParaRPr lang="ja-JP" sz="1800" dirty="0"/>
+          </a:p>
+        </p:txBody>
+      </p:sp>
+      <p:sp>
+        <p:nvSpPr>
+          <p:cNvPr id="6" name="直した1_矢印"/>
+          <p:cNvSpPr/>
+          <p:nvPr/>
+        </p:nvSpPr>
+        <p:spPr>
+          <a:xfrm>
+            <a:off x="4709160" y="2427732"/>
+            <a:ext cx="457200" cy="402336"/>
+          </a:xfrm>
+          <a:prstGeom prst="rightArrow">
+            <a:avLst/>
+          </a:prstGeom>
+          <a:solidFill>
+            <a:schemeClr val="accent1"/>
+          </a:solidFill>
+          <a:ln w="12700">
+            <a:solidFill>
+              <a:schemeClr val="accent1"/>
+            </a:solidFill>
+            <a:prstDash val="solid"/>
+          </a:ln>
+        </p:spPr>
+        <p:txBody>
+          <a:bodyPr/>
+          <a:lstStyle/>
+          <a:p>
+            <a:endParaRPr lang="ja-JP" altLang="en-US"/>
+          </a:p>
+        </p:txBody>
+      </p:sp>
+      <p:sp>
+        <p:nvSpPr>
+          <p:cNvPr id="7" name="直した1_対応"/>
+          <p:cNvSpPr/>
+          <p:nvPr/>
+        </p:nvSpPr>
+        <p:spPr>
+          <a:xfrm>
+            <a:off x="5303520" y="1554480"/>
+            <a:ext cx="6339535" cy="2148840"/>
+          </a:xfrm>
+          <a:prstGeom prst="roundRect">
+            <a:avLst>
+              <a:gd name="adj" fmla="val 3404"/>
+            </a:avLst>
+          </a:prstGeom>
+          <a:solidFill>
+            <a:schemeClr val="accent5"/>
+          </a:solidFill>
+          <a:ln w="12700">
+            <a:solidFill>
+              <a:schemeClr val="accent5"/>
+            </a:solidFill>
+            <a:prstDash val="solid"/>
+          </a:ln>
+        </p:spPr>
+        <p:txBody>
+          <a:bodyPr/>
+          <a:lstStyle/>
+          <a:p>
+            <a:endParaRPr lang="ja-JP" altLang="en-US"/>
+          </a:p>
+        </p:txBody>
+      </p:sp>
+      <p:sp>
+        <p:nvSpPr>
+          <p:cNvPr id="8" name="直した1_札"/>
+          <p:cNvSpPr/>
+          <p:nvPr/>
+        </p:nvSpPr>
+        <p:spPr>
+          <a:xfrm>
+            <a:off x="5577840" y="1755648"/>
+            <a:ext cx="1554480" cy="384048"/>
+          </a:xfrm>
+          <a:prstGeom prst="roundRect">
+            <a:avLst>
+              <a:gd name="adj" fmla="val 47619"/>
+            </a:avLst>
+          </a:prstGeom>
+          <a:solidFill>
+            <a:schemeClr val="accent1"/>
+          </a:solidFill>
+          <a:ln w="12700">
+            <a:solidFill>
+              <a:schemeClr val="accent1"/>
+            </a:solidFill>
+            <a:prstDash val="solid"/>
+          </a:ln>
+        </p:spPr>
+        <p:txBody>
+          <a:bodyPr/>
+          <a:lstStyle/>
+          <a:p>
+            <a:endParaRPr lang="ja-JP" altLang="en-US"/>
+          </a:p>
+        </p:txBody>
+      </p:sp>
+      <p:sp>
+        <p:nvSpPr>
+          <p:cNvPr id="9" name="直した1_札_文字"/>
+          <p:cNvSpPr txBox="1"/>
+          <p:nvPr/>
+        </p:nvSpPr>
+        <p:spPr>
+          <a:xfrm>
+            <a:off x="5577840" y="1755648"/>
+            <a:ext cx="1554480" cy="384048"/>
+          </a:xfrm>
+          <a:prstGeom prst="rect">
+            <a:avLst/>
+          </a:prstGeom>
+          <a:noFill/>
+          <a:ln/>
+        </p:spPr>
+        <p:txBody>
+          <a:bodyPr wrap="square" lIns="0" tIns="0" rIns="0" bIns="0" rtlCol="0" anchor="ctr"/>
+          <a:lstStyle/>
+          <a:p>
+            <a:pPr marL="0" indent="0" algn="ctr">
+              <a:buNone/>
+            </a:pPr>
+            <a:r>
+              <a:rPr lang="ja-JP" altLang="en-US" sz="1600" b="1">
+                <a:solidFill>
+                  <a:schemeClr val="bg1"/>
+                </a:solidFill>
+              </a:rPr>
+              <a:t>改善方法</a:t>
+            </a:r>
+            <a:endParaRPr lang="ja-JP" sz="1600" dirty="0"/>
+          </a:p>
+        </p:txBody>
+      </p:sp>
+      <p:sp>
+        <p:nvSpPr>
+          <p:cNvPr id="10" name="直した1_対応_文字"/>
+          <p:cNvSpPr txBox="1"/>
+          <p:nvPr/>
+        </p:nvSpPr>
+        <p:spPr>
+          <a:xfrm>
+            <a:off x="5577840" y="2249424"/>
+            <a:ext cx="5790895" cy="1307592"/>
+          </a:xfrm>
+          <a:prstGeom prst="rect">
+            <a:avLst/>
+          </a:prstGeom>
+          <a:noFill/>
+          <a:ln/>
+        </p:spPr>
+        <p:txBody>
+          <a:bodyPr wrap="square" lIns="0" tIns="0" rIns="0" bIns="0" rtlCol="0" anchor="t"/>
+          <a:lstStyle/>
+          <a:p>
+            <a:pPr marL="203200" indent="-203200">
+              <a:buSzPct val="100000"/>
+              <a:buChar char="•"/>
+            </a:pPr>
+            <a:r>
+              <a:rPr lang="ja-JP" altLang="en-US" sz="1700" dirty="0">
+                <a:solidFill>
+                  <a:schemeClr val="tx1"/>
+                </a:solidFill>
+              </a:rPr>
+              <a:t>別</a:t>
+            </a:r>
+            <a:r>
+              <a:rPr lang="ja-JP" altLang="en-US" sz="1700">
+                <a:solidFill>
+                  <a:schemeClr val="tx1"/>
+                </a:solidFill>
+              </a:rPr>
+              <a:t>の機材で</a:t>
+            </a:r>
+            <a:r>
+              <a:rPr lang="ja-JP" altLang="en-US" sz="1700" dirty="0">
+                <a:solidFill>
+                  <a:schemeClr val="tx1"/>
+                </a:solidFill>
+              </a:rPr>
+              <a:t>タッチすると、前の作業を終えるか確認する</a:t>
+            </a:r>
+            <a:endParaRPr lang="ja-JP" sz="1700" dirty="0"/>
+          </a:p>
+          <a:p>
+            <a:pPr marL="203200" indent="-203200">
+              <a:spcBef>
+                <a:spcPts val="600"/>
+              </a:spcBef>
+              <a:buSzPct val="100000"/>
+              <a:buChar char="•"/>
+            </a:pPr>
+            <a:r>
+              <a:rPr lang="ja-JP" altLang="en-US" sz="1700" dirty="0">
+                <a:solidFill>
+                  <a:schemeClr val="tx1"/>
+                </a:solidFill>
+              </a:rPr>
+              <a:t>長く使用中のままなら、機材の画面と管理画面で知らせる</a:t>
+            </a:r>
+            <a:endParaRPr lang="ja-JP" sz="1700" dirty="0"/>
+          </a:p>
+          <a:p>
+            <a:pPr marL="203200" indent="-203200">
+              <a:spcBef>
+                <a:spcPts val="600"/>
+              </a:spcBef>
+              <a:buSzPct val="100000"/>
+              <a:buChar char="•"/>
+            </a:pPr>
+            <a:r>
+              <a:rPr lang="ja-JP" altLang="en-US" sz="1700" dirty="0">
+                <a:solidFill>
+                  <a:schemeClr val="tx1"/>
+                </a:solidFill>
+              </a:rPr>
+              <a:t>管理者が、終わった時刻を入れて代わりに終了できる</a:t>
+            </a:r>
+            <a:endParaRPr lang="ja-JP" sz="1700" dirty="0"/>
+          </a:p>
+        </p:txBody>
+      </p:sp>
+      <p:sp>
+        <p:nvSpPr>
+          <p:cNvPr id="11" name="直した2_評価"/>
+          <p:cNvSpPr/>
+          <p:nvPr/>
+        </p:nvSpPr>
+        <p:spPr>
+          <a:xfrm>
+            <a:off x="548640" y="3977640"/>
+            <a:ext cx="4023360" cy="2148840"/>
+          </a:xfrm>
+          <a:prstGeom prst="roundRect">
+            <a:avLst>
+              <a:gd name="adj" fmla="val 3404"/>
+            </a:avLst>
+          </a:prstGeom>
+          <a:solidFill>
+            <a:schemeClr val="bg2"/>
+          </a:solidFill>
+          <a:ln w="12700">
+            <a:solidFill>
+              <a:schemeClr val="bg2"/>
+            </a:solidFill>
+            <a:prstDash val="solid"/>
+          </a:ln>
+        </p:spPr>
+        <p:txBody>
+          <a:bodyPr/>
+          <a:lstStyle/>
+          <a:p>
+            <a:endParaRPr lang="ja-JP" altLang="en-US"/>
+          </a:p>
+        </p:txBody>
+      </p:sp>
+      <p:sp>
+        <p:nvSpPr>
+          <p:cNvPr id="12" name="直した2_評価_文字"/>
+          <p:cNvSpPr txBox="1"/>
+          <p:nvPr/>
+        </p:nvSpPr>
+        <p:spPr>
+          <a:xfrm>
+            <a:off x="822960" y="3977640"/>
+            <a:ext cx="3474720" cy="2148840"/>
+          </a:xfrm>
+          <a:prstGeom prst="rect">
+            <a:avLst/>
+          </a:prstGeom>
+          <a:noFill/>
+          <a:ln/>
+        </p:spPr>
+        <p:txBody>
+          <a:bodyPr wrap="square" lIns="0" tIns="0" rIns="0" bIns="0" rtlCol="0" anchor="ctr"/>
+          <a:lstStyle/>
+          <a:p>
+            <a:pPr marL="0" indent="0">
+              <a:buNone/>
+            </a:pPr>
+            <a:r>
+              <a:rPr lang="ja-JP" altLang="en-US" sz="1800" b="1" dirty="0">
+                <a:solidFill>
+                  <a:schemeClr val="tx2"/>
+                </a:solidFill>
+              </a:rPr>
+              <a:t>毎週</a:t>
+            </a:r>
+            <a:r>
+              <a:rPr lang="ja-JP" altLang="en-US" sz="1800" b="1">
+                <a:solidFill>
+                  <a:schemeClr val="tx2"/>
+                </a:solidFill>
+              </a:rPr>
+              <a:t>やるタスク</a:t>
+            </a:r>
+            <a:r>
+              <a:rPr lang="ja-JP" altLang="en-US" b="1">
+                <a:solidFill>
+                  <a:schemeClr val="tx2"/>
+                </a:solidFill>
+              </a:rPr>
+              <a:t>を</a:t>
+            </a:r>
+            <a:endParaRPr lang="ja-JP" sz="1800" dirty="0"/>
+          </a:p>
+          <a:p>
+            <a:pPr marL="0" indent="0">
+              <a:buNone/>
+            </a:pPr>
+            <a:r>
+              <a:rPr lang="ja-JP" altLang="en-US" sz="1800" b="1" dirty="0">
+                <a:solidFill>
+                  <a:schemeClr val="tx2"/>
+                </a:solidFill>
+              </a:rPr>
+              <a:t>毎回入れるのが面倒だった</a:t>
+            </a:r>
+            <a:endParaRPr lang="ja-JP" sz="1800" dirty="0"/>
+          </a:p>
+        </p:txBody>
+      </p:sp>
+      <p:sp>
+        <p:nvSpPr>
+          <p:cNvPr id="13" name="直した2_矢印"/>
+          <p:cNvSpPr/>
+          <p:nvPr/>
+        </p:nvSpPr>
+        <p:spPr>
+          <a:xfrm>
+            <a:off x="4709160" y="4850892"/>
+            <a:ext cx="457200" cy="402336"/>
+          </a:xfrm>
+          <a:prstGeom prst="rightArrow">
+            <a:avLst/>
+          </a:prstGeom>
+          <a:solidFill>
+            <a:schemeClr val="accent1"/>
+          </a:solidFill>
+          <a:ln w="12700">
+            <a:solidFill>
+              <a:schemeClr val="accent1"/>
+            </a:solidFill>
+            <a:prstDash val="solid"/>
+          </a:ln>
+        </p:spPr>
+        <p:txBody>
+          <a:bodyPr/>
+          <a:lstStyle/>
+          <a:p>
+            <a:endParaRPr lang="ja-JP" altLang="en-US"/>
+          </a:p>
+        </p:txBody>
+      </p:sp>
+      <p:sp>
+        <p:nvSpPr>
+          <p:cNvPr id="14" name="直した2_対応"/>
+          <p:cNvSpPr/>
+          <p:nvPr/>
+        </p:nvSpPr>
+        <p:spPr>
+          <a:xfrm>
+            <a:off x="5303520" y="3977640"/>
+            <a:ext cx="6339535" cy="2148840"/>
+          </a:xfrm>
+          <a:prstGeom prst="roundRect">
+            <a:avLst>
+              <a:gd name="adj" fmla="val 3404"/>
+            </a:avLst>
+          </a:prstGeom>
+          <a:solidFill>
+            <a:schemeClr val="accent5"/>
+          </a:solidFill>
+          <a:ln w="12700">
+            <a:solidFill>
+              <a:schemeClr val="accent5"/>
+            </a:solidFill>
+            <a:prstDash val="solid"/>
+          </a:ln>
+        </p:spPr>
+        <p:txBody>
+          <a:bodyPr/>
+          <a:lstStyle/>
+          <a:p>
+            <a:endParaRPr lang="ja-JP" altLang="en-US"/>
+          </a:p>
+        </p:txBody>
+      </p:sp>
+      <p:sp>
+        <p:nvSpPr>
+          <p:cNvPr id="15" name="直した2_札"/>
+          <p:cNvSpPr/>
+          <p:nvPr/>
+        </p:nvSpPr>
+        <p:spPr>
+          <a:xfrm>
+            <a:off x="5577840" y="4178808"/>
+            <a:ext cx="1554480" cy="384048"/>
+          </a:xfrm>
+          <a:prstGeom prst="roundRect">
+            <a:avLst>
+              <a:gd name="adj" fmla="val 47619"/>
+            </a:avLst>
+          </a:prstGeom>
+          <a:solidFill>
+            <a:schemeClr val="accent1"/>
+          </a:solidFill>
+          <a:ln w="12700">
+            <a:solidFill>
+              <a:schemeClr val="accent1"/>
+            </a:solidFill>
+            <a:prstDash val="solid"/>
+          </a:ln>
+        </p:spPr>
+        <p:txBody>
+          <a:bodyPr/>
+          <a:lstStyle/>
+          <a:p>
+            <a:endParaRPr lang="ja-JP" altLang="en-US"/>
+          </a:p>
+        </p:txBody>
+      </p:sp>
+      <p:sp>
+        <p:nvSpPr>
+          <p:cNvPr id="16" name="直した2_札_文字"/>
+          <p:cNvSpPr txBox="1"/>
+          <p:nvPr/>
+        </p:nvSpPr>
+        <p:spPr>
+          <a:xfrm>
+            <a:off x="5577840" y="4178808"/>
+            <a:ext cx="1554480" cy="384048"/>
+          </a:xfrm>
+          <a:prstGeom prst="rect">
+            <a:avLst/>
+          </a:prstGeom>
+          <a:noFill/>
+          <a:ln/>
+        </p:spPr>
+        <p:txBody>
+          <a:bodyPr wrap="square" lIns="0" tIns="0" rIns="0" bIns="0" rtlCol="0" anchor="ctr"/>
+          <a:lstStyle/>
+          <a:p>
+            <a:pPr algn="ctr"/>
+            <a:r>
+              <a:rPr lang="ja-JP" altLang="en-US" sz="1600" b="1">
+                <a:solidFill>
+                  <a:schemeClr val="bg1"/>
+                </a:solidFill>
+              </a:rPr>
+              <a:t>改善方法</a:t>
+            </a:r>
+            <a:endParaRPr lang="ja-JP" altLang="ja-JP" sz="1600" dirty="0"/>
+          </a:p>
+        </p:txBody>
+      </p:sp>
+      <p:sp>
+        <p:nvSpPr>
+          <p:cNvPr id="17" name="直した2_対応_文字"/>
+          <p:cNvSpPr txBox="1"/>
+          <p:nvPr/>
+        </p:nvSpPr>
+        <p:spPr>
+          <a:xfrm>
+            <a:off x="5577840" y="4672584"/>
+            <a:ext cx="5790895" cy="1307592"/>
+          </a:xfrm>
+          <a:prstGeom prst="rect">
+            <a:avLst/>
+          </a:prstGeom>
+          <a:noFill/>
+          <a:ln/>
+        </p:spPr>
+        <p:txBody>
+          <a:bodyPr wrap="square" lIns="0" tIns="0" rIns="0" bIns="0" rtlCol="0" anchor="t"/>
+          <a:lstStyle/>
+          <a:p>
+            <a:pPr marL="203200" indent="-203200">
+              <a:buSzPct val="100000"/>
+              <a:buChar char="•"/>
+            </a:pPr>
+            <a:r>
+              <a:rPr lang="ja-JP" altLang="en-US" sz="1700" dirty="0">
+                <a:solidFill>
+                  <a:schemeClr val="tx1"/>
+                </a:solidFill>
+              </a:rPr>
+              <a:t>毎週の仕事を一度登録すれば、予定日に自動で追加される</a:t>
+            </a:r>
+            <a:endParaRPr lang="ja-JP" sz="1700" dirty="0"/>
+          </a:p>
+          <a:p>
+            <a:pPr marL="203200" indent="-203200">
+              <a:spcBef>
+                <a:spcPts val="600"/>
+              </a:spcBef>
+              <a:buSzPct val="100000"/>
+              <a:buChar char="•"/>
+            </a:pPr>
+            <a:r>
+              <a:rPr lang="ja-JP" altLang="en-US" sz="1700" dirty="0">
+                <a:solidFill>
+                  <a:schemeClr val="tx1"/>
+                </a:solidFill>
+              </a:rPr>
+              <a:t>毎日・毎週（曜日）・毎月（日にち）から選べる</a:t>
+            </a:r>
+            <a:endParaRPr lang="ja-JP" sz="1700" dirty="0"/>
+          </a:p>
+          <a:p>
+            <a:pPr marL="203200" indent="-203200">
+              <a:spcBef>
+                <a:spcPts val="600"/>
+              </a:spcBef>
+              <a:buSzPct val="100000"/>
+              <a:buChar char="•"/>
+            </a:pPr>
+            <a:r>
+              <a:rPr lang="ja-JP" altLang="en-US" sz="1700" dirty="0">
+                <a:solidFill>
+                  <a:schemeClr val="tx1"/>
+                </a:solidFill>
+              </a:rPr>
+              <a:t>前の回が終わっていない間は、新しく追加しない</a:t>
+            </a:r>
+            <a:endParaRPr lang="ja-JP" sz="1700" dirty="0"/>
+          </a:p>
+        </p:txBody>
+      </p:sp>
+      <p:sp>
+        <p:nvSpPr>
+          <p:cNvPr id="25" name="Slide Number Placeholder 0"/>
+          <p:cNvSpPr>
+            <a:spLocks noGrp="1"/>
+          </p:cNvSpPr>
+          <p:nvPr>
+            <p:ph type="sldNum" sz="quarter" idx="4294967295"/>
+          </p:nvPr>
+        </p:nvSpPr>
+        <p:spPr>
+          <a:xfrm>
+            <a:off x="10911535" y="6400800"/>
+            <a:ext cx="731520" cy="274320"/>
+          </a:xfrm>
+          <a:prstGeom prst="rect">
+            <a:avLst/>
+          </a:prstGeom>
+          <a:extLst>
+            <a:ext uri="{C572A759-6A51-4108-AA02-DFA0A04FC94B}">
+              <ma14:wrappingTextBoxFlag xmlns:ma14="http://schemas.microsoft.com/office/mac/drawingml/2011/main" xmlns="" val="0"/>
+            </a:ext>
+          </a:extLst>
+        </p:spPr>
+        <p:txBody>
+          <a:bodyPr lIns="0" tIns="0" rIns="0" bIns="0"/>
+          <a:lstStyle>
+            <a:lvl1pPr>
+              <a:defRPr sz="1100">
+                <a:solidFill>
+                  <a:schemeClr val="accent3"/>
+                </a:solidFill>
+              </a:defRPr>
+            </a:lvl1pPr>
+          </a:lstStyle>
+          <a:p>
+            <a:pPr algn="r"/>
+            <a:fld id="{F7021451-1387-4CA6-816F-3879F97B5CBC}" type="slidenum">
+              <a:rPr lang="en-US" b="0"/>
+              <a:t>13</a:t>
+            </a:fld>
+            <a:endParaRPr lang="en-US"/>
+          </a:p>
+        </p:txBody>
+      </p:sp>
+    </p:spTree>
+  </p:cSld>
+  <p:clrMapOvr>
+    <a:masterClrMapping/>
+  </p:clrMapOvr>
+</p:sld>
+</file>
+
+<file path=ppt/slides/slide14.xml><?xml version="1.0" encoding="utf-8"?>
+<p:sld xmlns:a="http://schemas.openxmlformats.org/drawingml/2006/main" xmlns:r="http://schemas.openxmlformats.org/officeDocument/2006/relationships" xmlns:p="http://schemas.openxmlformats.org/presentationml/2006/main">
+  <p:cSld name="Slide 3">
+    <p:spTree>
+      <p:nvGrpSpPr>
+        <p:cNvPr id="1" name=""/>
+        <p:cNvGrpSpPr/>
+        <p:nvPr/>
+      </p:nvGrpSpPr>
+      <p:grpSpPr>
+        <a:xfrm>
+          <a:off x="0" y="0"/>
+          <a:ext cx="0" cy="0"/>
+          <a:chOff x="0" y="0"/>
+          <a:chExt cx="0" cy="0"/>
+        </a:xfrm>
+      </p:grpSpPr>
+      <p:sp>
+        <p:nvSpPr>
+          <p:cNvPr id="2" name="Text 0"/>
+          <p:cNvSpPr>
+            <a:spLocks noGrp="1"/>
+          </p:cNvSpPr>
+          <p:nvPr>
+            <p:ph type="body" idx="100" hasCustomPrompt="1"/>
+          </p:nvPr>
+        </p:nvSpPr>
+        <p:spPr>
+          <a:xfrm>
+            <a:off x="548640" y="274320"/>
+            <a:ext cx="11094415" cy="320040"/>
+          </a:xfrm>
+          <a:prstGeom prst="rect">
+            <a:avLst/>
+          </a:prstGeom>
+          <a:noFill/>
+          <a:ln/>
+        </p:spPr>
+        <p:txBody>
+          <a:bodyPr wrap="square" lIns="0" tIns="0" rIns="0" bIns="0" rtlCol="0" anchor="ctr"/>
+          <a:lstStyle/>
+          <a:p>
+            <a:pPr marL="0" indent="0" algn="l">
+              <a:buNone/>
+            </a:pPr>
+            <a:r>
+              <a:rPr lang="ja-JP" altLang="en-US" sz="1400" b="1" dirty="0">
+                <a:solidFill>
+                  <a:schemeClr val="accent1"/>
+                </a:solidFill>
+              </a:rPr>
+              <a:t>7. 導入先からの評価</a:t>
+            </a:r>
+            <a:endParaRPr lang="ja-JP" sz="1400" dirty="0"/>
+          </a:p>
+        </p:txBody>
+      </p:sp>
+      <p:sp>
+        <p:nvSpPr>
+          <p:cNvPr id="3" name="Text 0"/>
+          <p:cNvSpPr>
+            <a:spLocks noGrp="1"/>
+          </p:cNvSpPr>
+          <p:nvPr>
+            <p:ph type="title" idx="101" hasCustomPrompt="1"/>
+          </p:nvPr>
+        </p:nvSpPr>
+        <p:spPr>
+          <a:xfrm>
+            <a:off x="548640" y="594360"/>
+            <a:ext cx="11094415" cy="731520"/>
+          </a:xfrm>
+          <a:prstGeom prst="rect">
+            <a:avLst/>
+          </a:prstGeom>
+          <a:noFill/>
+          <a:ln/>
+        </p:spPr>
+        <p:txBody>
+          <a:bodyPr wrap="square" lIns="0" tIns="0" rIns="0" bIns="0" rtlCol="0" anchor="ctr"/>
+          <a:lstStyle/>
+          <a:p>
+            <a:pPr marL="0" indent="0" algn="l">
+              <a:buNone/>
+            </a:pPr>
+            <a:r>
+              <a:rPr lang="ja-JP" altLang="en-US" sz="3200" b="1" dirty="0">
+                <a:solidFill>
+                  <a:schemeClr val="tx2"/>
+                </a:solidFill>
+              </a:rPr>
+              <a:t>導入先の評価 </a:t>
+            </a:r>
+            <a:r>
+              <a:rPr lang="ja-JP" altLang="en-US" sz="3200" b="1">
+                <a:solidFill>
+                  <a:schemeClr val="tx2"/>
+                </a:solidFill>
+              </a:rPr>
+              <a:t>③　これから</a:t>
+            </a:r>
+            <a:r>
+              <a:rPr lang="ja-JP" altLang="en-US"/>
+              <a:t>改善する</a:t>
+            </a:r>
+            <a:r>
+              <a:rPr lang="ja-JP" altLang="en-US" sz="3200" b="1">
+                <a:solidFill>
+                  <a:schemeClr val="tx2"/>
+                </a:solidFill>
+              </a:rPr>
+              <a:t>ところ</a:t>
+            </a:r>
+            <a:endParaRPr lang="ja-JP" sz="3200" dirty="0"/>
+          </a:p>
+        </p:txBody>
+      </p:sp>
+      <p:sp>
+        <p:nvSpPr>
+          <p:cNvPr id="4" name="これから1_評価"/>
+          <p:cNvSpPr/>
+          <p:nvPr/>
+        </p:nvSpPr>
+        <p:spPr>
+          <a:xfrm>
+            <a:off x="548640" y="1508760"/>
+            <a:ext cx="5120640" cy="1417320"/>
+          </a:xfrm>
+          <a:prstGeom prst="roundRect">
+            <a:avLst>
+              <a:gd name="adj" fmla="val 5161"/>
+            </a:avLst>
+          </a:prstGeom>
+          <a:solidFill>
+            <a:schemeClr val="bg2"/>
+          </a:solidFill>
+          <a:ln w="12700">
+            <a:solidFill>
+              <a:schemeClr val="bg2"/>
+            </a:solidFill>
+            <a:prstDash val="solid"/>
+          </a:ln>
+        </p:spPr>
+        <p:txBody>
+          <a:bodyPr/>
+          <a:lstStyle/>
+          <a:p>
+            <a:endParaRPr lang="ja-JP" altLang="en-US"/>
+          </a:p>
+        </p:txBody>
+      </p:sp>
+      <p:sp>
+        <p:nvSpPr>
+          <p:cNvPr id="5" name="これから1_評価_文字"/>
+          <p:cNvSpPr txBox="1"/>
+          <p:nvPr/>
+        </p:nvSpPr>
+        <p:spPr>
+          <a:xfrm>
+            <a:off x="822960" y="1508760"/>
+            <a:ext cx="4572000" cy="1417320"/>
+          </a:xfrm>
+          <a:prstGeom prst="rect">
+            <a:avLst/>
+          </a:prstGeom>
+          <a:noFill/>
+          <a:ln/>
+        </p:spPr>
+        <p:txBody>
+          <a:bodyPr wrap="square" lIns="0" tIns="0" rIns="0" bIns="0" rtlCol="0" anchor="ctr"/>
+          <a:lstStyle/>
+          <a:p>
+            <a:pPr marL="0" indent="0">
+              <a:buNone/>
+            </a:pPr>
+            <a:r>
+              <a:rPr lang="ja-JP" altLang="en-US" sz="1600" b="1" dirty="0">
+                <a:solidFill>
+                  <a:schemeClr val="tx2"/>
+                </a:solidFill>
+              </a:rPr>
+              <a:t>ディスプレイが小さくて、</a:t>
+            </a:r>
+            <a:endParaRPr lang="ja-JP" sz="1600" dirty="0"/>
+          </a:p>
+          <a:p>
+            <a:pPr marL="0" indent="0">
+              <a:buNone/>
+            </a:pPr>
+            <a:r>
+              <a:rPr lang="ja-JP" altLang="en-US" sz="1600" b="1" dirty="0">
+                <a:solidFill>
+                  <a:schemeClr val="tx2"/>
+                </a:solidFill>
+              </a:rPr>
+              <a:t>老眼が始まっている私には文字が見づらかった</a:t>
+            </a:r>
+            <a:endParaRPr lang="ja-JP" sz="1600" dirty="0"/>
+          </a:p>
+        </p:txBody>
+      </p:sp>
+      <p:sp>
+        <p:nvSpPr>
+          <p:cNvPr id="6" name="これから1_矢印"/>
+          <p:cNvSpPr/>
+          <p:nvPr/>
+        </p:nvSpPr>
+        <p:spPr>
+          <a:xfrm>
+            <a:off x="5806440" y="2016252"/>
+            <a:ext cx="457200" cy="402336"/>
+          </a:xfrm>
+          <a:prstGeom prst="rightArrow">
+            <a:avLst/>
+          </a:prstGeom>
+          <a:solidFill>
+            <a:schemeClr val="accent2"/>
+          </a:solidFill>
+          <a:ln w="12700">
+            <a:solidFill>
+              <a:schemeClr val="accent2"/>
+            </a:solidFill>
+            <a:prstDash val="solid"/>
+          </a:ln>
+        </p:spPr>
+        <p:txBody>
+          <a:bodyPr/>
+          <a:lstStyle/>
+          <a:p>
+            <a:endParaRPr lang="ja-JP" altLang="en-US"/>
+          </a:p>
+        </p:txBody>
+      </p:sp>
+      <p:sp>
+        <p:nvSpPr>
+          <p:cNvPr id="7" name="これから1_対応"/>
+          <p:cNvSpPr/>
+          <p:nvPr/>
+        </p:nvSpPr>
+        <p:spPr>
+          <a:xfrm>
+            <a:off x="6400800" y="1508760"/>
+            <a:ext cx="5242255" cy="1417320"/>
+          </a:xfrm>
+          <a:prstGeom prst="roundRect">
+            <a:avLst>
+              <a:gd name="adj" fmla="val 5161"/>
+            </a:avLst>
+          </a:prstGeom>
+          <a:solidFill>
+            <a:schemeClr val="accent5"/>
+          </a:solidFill>
+          <a:ln w="12700">
+            <a:solidFill>
+              <a:schemeClr val="accent5"/>
+            </a:solidFill>
+            <a:prstDash val="solid"/>
+          </a:ln>
+        </p:spPr>
+        <p:txBody>
+          <a:bodyPr/>
+          <a:lstStyle/>
+          <a:p>
+            <a:endParaRPr lang="ja-JP" altLang="en-US"/>
+          </a:p>
+        </p:txBody>
+      </p:sp>
+      <p:sp>
+        <p:nvSpPr>
+          <p:cNvPr id="8" name="これから1_札"/>
+          <p:cNvSpPr/>
+          <p:nvPr/>
+        </p:nvSpPr>
+        <p:spPr>
+          <a:xfrm>
+            <a:off x="6675120" y="1709928"/>
+            <a:ext cx="1554480" cy="384048"/>
+          </a:xfrm>
+          <a:prstGeom prst="roundRect">
+            <a:avLst>
+              <a:gd name="adj" fmla="val 47619"/>
+            </a:avLst>
+          </a:prstGeom>
+          <a:solidFill>
+            <a:schemeClr val="accent2"/>
+          </a:solidFill>
+          <a:ln w="12700">
+            <a:solidFill>
+              <a:schemeClr val="accent2"/>
+            </a:solidFill>
+            <a:prstDash val="solid"/>
+          </a:ln>
+        </p:spPr>
+        <p:txBody>
+          <a:bodyPr/>
+          <a:lstStyle/>
+          <a:p>
+            <a:endParaRPr lang="ja-JP" altLang="en-US"/>
+          </a:p>
+        </p:txBody>
+      </p:sp>
+      <p:sp>
+        <p:nvSpPr>
+          <p:cNvPr id="9" name="これから1_札_文字"/>
+          <p:cNvSpPr txBox="1"/>
+          <p:nvPr/>
+        </p:nvSpPr>
+        <p:spPr>
+          <a:xfrm>
+            <a:off x="6675120" y="1709928"/>
+            <a:ext cx="1554480" cy="384048"/>
+          </a:xfrm>
+          <a:prstGeom prst="rect">
+            <a:avLst/>
+          </a:prstGeom>
+          <a:noFill/>
+          <a:ln/>
+        </p:spPr>
+        <p:txBody>
+          <a:bodyPr wrap="square" lIns="0" tIns="0" rIns="0" bIns="0" rtlCol="0" anchor="ctr"/>
+          <a:lstStyle/>
+          <a:p>
+            <a:pPr marL="0" indent="0" algn="ctr">
+              <a:buNone/>
+            </a:pPr>
+            <a:r>
+              <a:rPr lang="ja-JP" altLang="en-US" sz="1600" b="1" dirty="0">
+                <a:solidFill>
+                  <a:schemeClr val="bg1"/>
+                </a:solidFill>
+              </a:rPr>
+              <a:t>改善の方法</a:t>
+            </a:r>
+            <a:endParaRPr lang="ja-JP" sz="1600" dirty="0"/>
+          </a:p>
+        </p:txBody>
+      </p:sp>
+      <p:sp>
+        <p:nvSpPr>
+          <p:cNvPr id="10" name="これから1_対応_文字"/>
+          <p:cNvSpPr txBox="1"/>
+          <p:nvPr/>
+        </p:nvSpPr>
+        <p:spPr>
+          <a:xfrm>
+            <a:off x="6675120" y="2203704"/>
+            <a:ext cx="4693615" cy="576072"/>
+          </a:xfrm>
+          <a:prstGeom prst="rect">
+            <a:avLst/>
+          </a:prstGeom>
+          <a:noFill/>
+          <a:ln/>
+        </p:spPr>
+        <p:txBody>
+          <a:bodyPr wrap="square" lIns="0" tIns="0" rIns="0" bIns="0" rtlCol="0" anchor="t"/>
+          <a:lstStyle/>
+          <a:p>
+            <a:pPr marL="203200" indent="-203200">
+              <a:buSzPct val="100000"/>
+              <a:buChar char="•"/>
+            </a:pPr>
+            <a:r>
+              <a:rPr lang="ja-JP" altLang="en-US" sz="1600" dirty="0">
+                <a:solidFill>
+                  <a:schemeClr val="tx1"/>
+                </a:solidFill>
+              </a:rPr>
+              <a:t>大きい画面に替える</a:t>
+            </a:r>
+            <a:endParaRPr lang="ja-JP" sz="1600" dirty="0"/>
+          </a:p>
+          <a:p>
+            <a:pPr marL="203200" indent="-203200">
+              <a:spcBef>
+                <a:spcPts val="600"/>
+              </a:spcBef>
+              <a:buSzPct val="100000"/>
+              <a:buChar char="•"/>
+            </a:pPr>
+            <a:r>
+              <a:rPr lang="ja-JP" altLang="en-US" sz="1600" dirty="0">
+                <a:solidFill>
+                  <a:schemeClr val="tx1"/>
+                </a:solidFill>
+              </a:rPr>
+              <a:t>一度に出す文字を減らし、文字を大きくする</a:t>
+            </a:r>
+            <a:endParaRPr lang="ja-JP" sz="1600" dirty="0"/>
+          </a:p>
+        </p:txBody>
+      </p:sp>
+      <p:sp>
+        <p:nvSpPr>
+          <p:cNvPr id="11" name="これから2_評価"/>
+          <p:cNvSpPr/>
+          <p:nvPr/>
+        </p:nvSpPr>
+        <p:spPr>
+          <a:xfrm>
+            <a:off x="548640" y="3108960"/>
+            <a:ext cx="5120640" cy="1417320"/>
+          </a:xfrm>
+          <a:prstGeom prst="roundRect">
+            <a:avLst>
+              <a:gd name="adj" fmla="val 5161"/>
+            </a:avLst>
+          </a:prstGeom>
+          <a:solidFill>
+            <a:schemeClr val="bg2"/>
+          </a:solidFill>
+          <a:ln w="12700">
+            <a:solidFill>
+              <a:schemeClr val="bg2"/>
+            </a:solidFill>
+            <a:prstDash val="solid"/>
+          </a:ln>
+        </p:spPr>
+        <p:txBody>
+          <a:bodyPr/>
+          <a:lstStyle/>
+          <a:p>
+            <a:endParaRPr lang="ja-JP" altLang="en-US"/>
+          </a:p>
+        </p:txBody>
+      </p:sp>
+      <p:sp>
+        <p:nvSpPr>
+          <p:cNvPr id="12" name="これから2_評価_文字"/>
+          <p:cNvSpPr txBox="1"/>
+          <p:nvPr/>
+        </p:nvSpPr>
+        <p:spPr>
+          <a:xfrm>
+            <a:off x="822960" y="3108960"/>
+            <a:ext cx="4572000" cy="1417320"/>
+          </a:xfrm>
+          <a:prstGeom prst="rect">
+            <a:avLst/>
+          </a:prstGeom>
+          <a:noFill/>
+          <a:ln/>
+        </p:spPr>
+        <p:txBody>
+          <a:bodyPr wrap="square" lIns="0" tIns="0" rIns="0" bIns="0" rtlCol="0" anchor="ctr"/>
+          <a:lstStyle/>
+          <a:p>
+            <a:pPr marL="0" indent="0">
+              <a:buNone/>
+            </a:pPr>
+            <a:r>
+              <a:rPr lang="ja-JP" altLang="en-US" sz="1600" b="1" dirty="0">
+                <a:solidFill>
+                  <a:schemeClr val="tx2"/>
+                </a:solidFill>
+              </a:rPr>
+              <a:t>側面に IC タグをかざすのが、</a:t>
+            </a:r>
+            <a:endParaRPr lang="ja-JP" sz="1600" dirty="0"/>
+          </a:p>
+          <a:p>
+            <a:pPr marL="0" indent="0">
+              <a:buNone/>
+            </a:pPr>
+            <a:r>
+              <a:rPr lang="ja-JP" altLang="en-US" sz="1600" b="1" dirty="0">
+                <a:solidFill>
+                  <a:schemeClr val="tx2"/>
+                </a:solidFill>
+              </a:rPr>
+              <a:t>直感に反していて分かりづらかった</a:t>
+            </a:r>
+            <a:endParaRPr lang="ja-JP" sz="1600" dirty="0"/>
+          </a:p>
+        </p:txBody>
+      </p:sp>
+      <p:sp>
+        <p:nvSpPr>
+          <p:cNvPr id="13" name="これから2_矢印"/>
+          <p:cNvSpPr/>
+          <p:nvPr/>
+        </p:nvSpPr>
+        <p:spPr>
+          <a:xfrm>
+            <a:off x="5806440" y="3616452"/>
+            <a:ext cx="457200" cy="402336"/>
+          </a:xfrm>
+          <a:prstGeom prst="rightArrow">
+            <a:avLst/>
+          </a:prstGeom>
+          <a:solidFill>
+            <a:schemeClr val="accent2"/>
+          </a:solidFill>
+          <a:ln w="12700">
+            <a:solidFill>
+              <a:schemeClr val="accent2"/>
+            </a:solidFill>
+            <a:prstDash val="solid"/>
+          </a:ln>
+        </p:spPr>
+        <p:txBody>
+          <a:bodyPr/>
+          <a:lstStyle/>
+          <a:p>
+            <a:endParaRPr lang="ja-JP" altLang="en-US"/>
+          </a:p>
+        </p:txBody>
+      </p:sp>
+      <p:sp>
+        <p:nvSpPr>
+          <p:cNvPr id="14" name="これから2_対応"/>
+          <p:cNvSpPr/>
+          <p:nvPr/>
+        </p:nvSpPr>
+        <p:spPr>
+          <a:xfrm>
+            <a:off x="6400800" y="3108960"/>
+            <a:ext cx="5242255" cy="1417320"/>
+          </a:xfrm>
+          <a:prstGeom prst="roundRect">
+            <a:avLst>
+              <a:gd name="adj" fmla="val 5161"/>
+            </a:avLst>
+          </a:prstGeom>
+          <a:solidFill>
+            <a:schemeClr val="accent5"/>
+          </a:solidFill>
+          <a:ln w="12700">
+            <a:solidFill>
+              <a:schemeClr val="accent5"/>
+            </a:solidFill>
+            <a:prstDash val="solid"/>
+          </a:ln>
+        </p:spPr>
+        <p:txBody>
+          <a:bodyPr/>
+          <a:lstStyle/>
+          <a:p>
+            <a:endParaRPr lang="ja-JP" altLang="en-US"/>
+          </a:p>
+        </p:txBody>
+      </p:sp>
+      <p:sp>
+        <p:nvSpPr>
+          <p:cNvPr id="15" name="これから2_札"/>
+          <p:cNvSpPr/>
+          <p:nvPr/>
+        </p:nvSpPr>
+        <p:spPr>
+          <a:xfrm>
+            <a:off x="6675120" y="3310128"/>
+            <a:ext cx="1554480" cy="384048"/>
+          </a:xfrm>
+          <a:prstGeom prst="roundRect">
+            <a:avLst>
+              <a:gd name="adj" fmla="val 47619"/>
+            </a:avLst>
+          </a:prstGeom>
+          <a:solidFill>
+            <a:schemeClr val="accent2"/>
+          </a:solidFill>
+          <a:ln w="12700">
+            <a:solidFill>
+              <a:schemeClr val="accent2"/>
+            </a:solidFill>
+            <a:prstDash val="solid"/>
+          </a:ln>
+        </p:spPr>
+        <p:txBody>
+          <a:bodyPr/>
+          <a:lstStyle/>
+          <a:p>
+            <a:endParaRPr lang="ja-JP" altLang="en-US"/>
+          </a:p>
+        </p:txBody>
+      </p:sp>
+      <p:sp>
+        <p:nvSpPr>
+          <p:cNvPr id="16" name="これから2_札_文字"/>
+          <p:cNvSpPr txBox="1"/>
+          <p:nvPr/>
+        </p:nvSpPr>
+        <p:spPr>
+          <a:xfrm>
+            <a:off x="6675120" y="3310128"/>
+            <a:ext cx="1554480" cy="384048"/>
+          </a:xfrm>
+          <a:prstGeom prst="rect">
+            <a:avLst/>
+          </a:prstGeom>
+          <a:noFill/>
+          <a:ln/>
+        </p:spPr>
+        <p:txBody>
+          <a:bodyPr wrap="square" lIns="0" tIns="0" rIns="0" bIns="0" rtlCol="0" anchor="ctr"/>
+          <a:lstStyle/>
+          <a:p>
+            <a:pPr marL="0" indent="0" algn="ctr">
+              <a:buNone/>
+            </a:pPr>
+            <a:r>
+              <a:rPr lang="ja-JP" altLang="en-US" sz="1600" b="1" dirty="0">
+                <a:solidFill>
+                  <a:schemeClr val="bg1"/>
+                </a:solidFill>
+              </a:rPr>
+              <a:t>改善の方法</a:t>
+            </a:r>
+            <a:endParaRPr lang="ja-JP" sz="1600" dirty="0"/>
+          </a:p>
+        </p:txBody>
+      </p:sp>
+      <p:sp>
+        <p:nvSpPr>
+          <p:cNvPr id="17" name="これから2_対応_文字"/>
+          <p:cNvSpPr txBox="1"/>
+          <p:nvPr/>
+        </p:nvSpPr>
+        <p:spPr>
+          <a:xfrm>
+            <a:off x="6675120" y="3803904"/>
+            <a:ext cx="4693615" cy="576072"/>
+          </a:xfrm>
+          <a:prstGeom prst="rect">
+            <a:avLst/>
+          </a:prstGeom>
+          <a:noFill/>
+          <a:ln/>
+        </p:spPr>
+        <p:txBody>
+          <a:bodyPr wrap="square" lIns="0" tIns="0" rIns="0" bIns="0" rtlCol="0" anchor="t"/>
+          <a:lstStyle/>
+          <a:p>
+            <a:pPr marL="203200" indent="-203200">
+              <a:buSzPct val="100000"/>
+              <a:buChar char="•"/>
+            </a:pPr>
+            <a:r>
+              <a:rPr lang="ja-JP" altLang="en-US" sz="1600" dirty="0">
+                <a:solidFill>
+                  <a:schemeClr val="tx1"/>
+                </a:solidFill>
+              </a:rPr>
+              <a:t>読み取る部分を正面に移す</a:t>
+            </a:r>
+            <a:endParaRPr lang="ja-JP" sz="1600" dirty="0"/>
+          </a:p>
+          <a:p>
+            <a:pPr marL="203200" indent="-203200">
+              <a:spcBef>
+                <a:spcPts val="600"/>
+              </a:spcBef>
+              <a:buSzPct val="100000"/>
+              <a:buChar char="•"/>
+            </a:pPr>
+            <a:r>
+              <a:rPr lang="ja-JP" altLang="en-US" sz="1600" dirty="0">
+                <a:solidFill>
+                  <a:schemeClr val="tx1"/>
+                </a:solidFill>
+              </a:rPr>
+              <a:t>かざす場所に目印を付ける</a:t>
+            </a:r>
+            <a:endParaRPr lang="ja-JP" sz="1600" dirty="0"/>
+          </a:p>
+        </p:txBody>
+      </p:sp>
+      <p:sp>
+        <p:nvSpPr>
+          <p:cNvPr id="18" name="これから3_評価"/>
+          <p:cNvSpPr/>
+          <p:nvPr/>
+        </p:nvSpPr>
+        <p:spPr>
+          <a:xfrm>
+            <a:off x="548640" y="4709160"/>
+            <a:ext cx="5120640" cy="1417320"/>
+          </a:xfrm>
+          <a:prstGeom prst="roundRect">
+            <a:avLst>
+              <a:gd name="adj" fmla="val 5161"/>
+            </a:avLst>
+          </a:prstGeom>
+          <a:solidFill>
+            <a:schemeClr val="bg2"/>
+          </a:solidFill>
+          <a:ln w="12700">
+            <a:solidFill>
+              <a:schemeClr val="bg2"/>
+            </a:solidFill>
+            <a:prstDash val="solid"/>
+          </a:ln>
+        </p:spPr>
+        <p:txBody>
+          <a:bodyPr/>
+          <a:lstStyle/>
+          <a:p>
+            <a:endParaRPr lang="ja-JP" altLang="en-US"/>
+          </a:p>
+        </p:txBody>
+      </p:sp>
+      <p:sp>
+        <p:nvSpPr>
+          <p:cNvPr id="19" name="これから3_評価_文字"/>
+          <p:cNvSpPr txBox="1"/>
+          <p:nvPr/>
+        </p:nvSpPr>
+        <p:spPr>
+          <a:xfrm>
+            <a:off x="822960" y="4709160"/>
+            <a:ext cx="4572000" cy="1417320"/>
+          </a:xfrm>
+          <a:prstGeom prst="rect">
+            <a:avLst/>
+          </a:prstGeom>
+          <a:noFill/>
+          <a:ln/>
+        </p:spPr>
+        <p:txBody>
+          <a:bodyPr wrap="square" lIns="0" tIns="0" rIns="0" bIns="0" rtlCol="0" anchor="ctr"/>
+          <a:lstStyle/>
+          <a:p>
+            <a:pPr marL="0" indent="0">
+              <a:buNone/>
+            </a:pPr>
+            <a:r>
+              <a:rPr lang="ja-JP" altLang="en-US" sz="1600" b="1" dirty="0">
+                <a:solidFill>
+                  <a:schemeClr val="tx2"/>
+                </a:solidFill>
+              </a:rPr>
+              <a:t>管理者側から、</a:t>
+            </a:r>
+            <a:endParaRPr lang="ja-JP" sz="1600" dirty="0"/>
+          </a:p>
+          <a:p>
+            <a:pPr marL="0" indent="0">
+              <a:buNone/>
+            </a:pPr>
+            <a:r>
+              <a:rPr lang="ja-JP" altLang="en-US" sz="1600" b="1" dirty="0">
+                <a:solidFill>
+                  <a:schemeClr val="tx2"/>
+                </a:solidFill>
+              </a:rPr>
+              <a:t>モジュールに通知できる機能があればよかった</a:t>
+            </a:r>
+            <a:endParaRPr lang="ja-JP" sz="1600" dirty="0"/>
+          </a:p>
+          <a:p>
+            <a:pPr marL="0" indent="0">
+              <a:buNone/>
+            </a:pPr>
+            <a:r>
+              <a:rPr lang="ja-JP" altLang="en-US" sz="1600" b="1" dirty="0">
+                <a:solidFill>
+                  <a:schemeClr val="tx2"/>
+                </a:solidFill>
+              </a:rPr>
+              <a:t>（</a:t>
+            </a:r>
+            <a:r>
+              <a:rPr lang="ja-JP" altLang="en-US" sz="1600" b="1">
+                <a:solidFill>
+                  <a:schemeClr val="tx2"/>
+                </a:solidFill>
+              </a:rPr>
+              <a:t>ブザーなどを使って通知する）</a:t>
+            </a:r>
+            <a:endParaRPr lang="ja-JP" sz="1600" dirty="0"/>
+          </a:p>
+        </p:txBody>
+      </p:sp>
+      <p:sp>
+        <p:nvSpPr>
+          <p:cNvPr id="20" name="これから3_矢印"/>
+          <p:cNvSpPr/>
+          <p:nvPr/>
+        </p:nvSpPr>
+        <p:spPr>
+          <a:xfrm>
+            <a:off x="5806440" y="5216652"/>
+            <a:ext cx="457200" cy="402336"/>
+          </a:xfrm>
+          <a:prstGeom prst="rightArrow">
+            <a:avLst/>
+          </a:prstGeom>
+          <a:solidFill>
+            <a:schemeClr val="accent2"/>
+          </a:solidFill>
+          <a:ln w="12700">
+            <a:solidFill>
+              <a:schemeClr val="accent2"/>
+            </a:solidFill>
+            <a:prstDash val="solid"/>
+          </a:ln>
+        </p:spPr>
+        <p:txBody>
+          <a:bodyPr/>
+          <a:lstStyle/>
+          <a:p>
+            <a:endParaRPr lang="ja-JP" altLang="en-US"/>
+          </a:p>
+        </p:txBody>
+      </p:sp>
+      <p:sp>
+        <p:nvSpPr>
+          <p:cNvPr id="21" name="これから3_対応"/>
+          <p:cNvSpPr/>
+          <p:nvPr/>
+        </p:nvSpPr>
+        <p:spPr>
+          <a:xfrm>
+            <a:off x="6400800" y="4709160"/>
+            <a:ext cx="5242255" cy="1417320"/>
+          </a:xfrm>
+          <a:prstGeom prst="roundRect">
+            <a:avLst>
+              <a:gd name="adj" fmla="val 5161"/>
+            </a:avLst>
+          </a:prstGeom>
+          <a:solidFill>
+            <a:schemeClr val="accent5"/>
+          </a:solidFill>
+          <a:ln w="12700">
+            <a:solidFill>
+              <a:schemeClr val="accent5"/>
+            </a:solidFill>
+            <a:prstDash val="solid"/>
+          </a:ln>
+        </p:spPr>
+        <p:txBody>
+          <a:bodyPr/>
+          <a:lstStyle/>
+          <a:p>
+            <a:endParaRPr lang="ja-JP" altLang="en-US"/>
+          </a:p>
+        </p:txBody>
+      </p:sp>
+      <p:sp>
+        <p:nvSpPr>
+          <p:cNvPr id="22" name="これから3_札"/>
+          <p:cNvSpPr/>
+          <p:nvPr/>
+        </p:nvSpPr>
+        <p:spPr>
+          <a:xfrm>
+            <a:off x="6675120" y="4910328"/>
+            <a:ext cx="1554480" cy="384048"/>
+          </a:xfrm>
+          <a:prstGeom prst="roundRect">
+            <a:avLst>
+              <a:gd name="adj" fmla="val 47619"/>
+            </a:avLst>
+          </a:prstGeom>
+          <a:solidFill>
+            <a:schemeClr val="accent2"/>
+          </a:solidFill>
+          <a:ln w="12700">
+            <a:solidFill>
+              <a:schemeClr val="accent2"/>
+            </a:solidFill>
+            <a:prstDash val="solid"/>
+          </a:ln>
+        </p:spPr>
+        <p:txBody>
+          <a:bodyPr/>
+          <a:lstStyle/>
+          <a:p>
+            <a:endParaRPr lang="ja-JP" altLang="en-US"/>
+          </a:p>
+        </p:txBody>
+      </p:sp>
+      <p:sp>
+        <p:nvSpPr>
+          <p:cNvPr id="23" name="これから3_札_文字"/>
+          <p:cNvSpPr txBox="1"/>
+          <p:nvPr/>
+        </p:nvSpPr>
+        <p:spPr>
+          <a:xfrm>
+            <a:off x="6675120" y="4910328"/>
+            <a:ext cx="1554480" cy="384048"/>
+          </a:xfrm>
+          <a:prstGeom prst="rect">
+            <a:avLst/>
+          </a:prstGeom>
+          <a:noFill/>
+          <a:ln/>
+        </p:spPr>
+        <p:txBody>
+          <a:bodyPr wrap="square" lIns="0" tIns="0" rIns="0" bIns="0" rtlCol="0" anchor="ctr"/>
+          <a:lstStyle/>
+          <a:p>
+            <a:pPr marL="0" indent="0" algn="ctr">
+              <a:buNone/>
+            </a:pPr>
+            <a:r>
+              <a:rPr lang="ja-JP" altLang="en-US" sz="1600" b="1" dirty="0">
+                <a:solidFill>
+                  <a:schemeClr val="bg1"/>
+                </a:solidFill>
+              </a:rPr>
+              <a:t>改善の方法</a:t>
+            </a:r>
+            <a:endParaRPr lang="ja-JP" sz="1600" dirty="0"/>
+          </a:p>
+        </p:txBody>
+      </p:sp>
+      <p:sp>
+        <p:nvSpPr>
+          <p:cNvPr id="24" name="これから3_対応_文字"/>
+          <p:cNvSpPr txBox="1"/>
+          <p:nvPr/>
+        </p:nvSpPr>
+        <p:spPr>
+          <a:xfrm>
+            <a:off x="6675120" y="5404104"/>
+            <a:ext cx="4693615" cy="576072"/>
+          </a:xfrm>
+          <a:prstGeom prst="rect">
+            <a:avLst/>
+          </a:prstGeom>
+          <a:noFill/>
+          <a:ln/>
+        </p:spPr>
+        <p:txBody>
+          <a:bodyPr wrap="square" lIns="0" tIns="0" rIns="0" bIns="0" rtlCol="0" anchor="t"/>
+          <a:lstStyle/>
+          <a:p>
+            <a:pPr marL="203200" indent="-203200">
+              <a:buSzPct val="100000"/>
+              <a:buChar char="•"/>
+            </a:pPr>
+            <a:r>
+              <a:rPr lang="ja-JP" altLang="en-US" sz="1600" dirty="0">
+                <a:solidFill>
+                  <a:schemeClr val="tx1"/>
+                </a:solidFill>
+              </a:rPr>
+              <a:t>モジュールにブザーを付ける</a:t>
+            </a:r>
+            <a:endParaRPr lang="ja-JP" sz="1600" dirty="0"/>
+          </a:p>
+          <a:p>
+            <a:pPr marL="203200" indent="-203200">
+              <a:spcBef>
+                <a:spcPts val="600"/>
+              </a:spcBef>
+              <a:buSzPct val="100000"/>
+              <a:buChar char="•"/>
+            </a:pPr>
+            <a:r>
+              <a:rPr lang="ja-JP" altLang="en-US" sz="1600" dirty="0">
+                <a:solidFill>
+                  <a:schemeClr val="tx1"/>
+                </a:solidFill>
+              </a:rPr>
+              <a:t>管理画面から、音と文字で呼び出せるようにする</a:t>
+            </a:r>
+            <a:endParaRPr lang="ja-JP" sz="1600" dirty="0"/>
+          </a:p>
+        </p:txBody>
+      </p:sp>
+      <p:sp>
+        <p:nvSpPr>
+          <p:cNvPr id="25" name="Slide Number Placeholder 0"/>
+          <p:cNvSpPr>
+            <a:spLocks noGrp="1"/>
+          </p:cNvSpPr>
+          <p:nvPr>
+            <p:ph type="sldNum" sz="quarter" idx="4294967295"/>
+          </p:nvPr>
+        </p:nvSpPr>
+        <p:spPr>
+          <a:xfrm>
+            <a:off x="10911535" y="6400800"/>
+            <a:ext cx="731520" cy="274320"/>
+          </a:xfrm>
+          <a:prstGeom prst="rect">
+            <a:avLst/>
+          </a:prstGeom>
+          <a:extLst>
+            <a:ext uri="{C572A759-6A51-4108-AA02-DFA0A04FC94B}">
+              <ma14:wrappingTextBoxFlag xmlns:ma14="http://schemas.microsoft.com/office/mac/drawingml/2011/main" xmlns="" val="0"/>
+            </a:ext>
+          </a:extLst>
+        </p:spPr>
+        <p:txBody>
+          <a:bodyPr lIns="0" tIns="0" rIns="0" bIns="0"/>
+          <a:lstStyle>
+            <a:lvl1pPr>
+              <a:defRPr sz="1100">
+                <a:solidFill>
+                  <a:schemeClr val="accent3"/>
+                </a:solidFill>
+              </a:defRPr>
+            </a:lvl1pPr>
+          </a:lstStyle>
+          <a:p>
+            <a:pPr algn="r"/>
+            <a:fld id="{F7021451-1387-4CA6-816F-3879F97B5CBC}" type="slidenum">
+              <a:rPr lang="en-US" b="0"/>
+              <a:t>14</a:t>
+            </a:fld>
+            <a:endParaRPr lang="en-US"/>
+          </a:p>
+        </p:txBody>
+      </p:sp>
+    </p:spTree>
+  </p:cSld>
+  <p:clrMapOvr>
+    <a:masterClrMapping/>
+  </p:clrMapOvr>
+</p:sld>
+</file>
+
+<file path=ppt/slides/slide15.xml><?xml version="1.0" encoding="utf-8"?>
 <p:sld xmlns:a="http://schemas.openxmlformats.org/drawingml/2006/main" xmlns:r="http://schemas.openxmlformats.org/officeDocument/2006/relationships" xmlns:p="http://schemas.openxmlformats.org/presentationml/2006/main">
   <p:cSld name="Slide 12">
     <p:spTree>
@@ -7245,12 +9991,20 @@
               <a:buChar char="•"/>
             </a:pPr>
             <a:r>
+              <a:rPr lang="ja-JP" altLang="en-US" sz="1600">
+                <a:solidFill>
+                  <a:schemeClr val="tx1"/>
+                </a:solidFill>
+              </a:rPr>
+              <a:t>長期間実際</a:t>
+            </a:r>
+            <a:r>
               <a:rPr lang="ja-JP" altLang="en-US" sz="1600" dirty="0">
                 <a:solidFill>
                   <a:schemeClr val="tx1"/>
                 </a:solidFill>
               </a:rPr>
-              <a:t>実際の工場で作業ログを集めて評価する</a:t>
+              <a:t>の工場で作業ログを集めて評価する</a:t>
             </a:r>
             <a:endParaRPr lang="ja-JP" sz="2000" dirty="0"/>
           </a:p>
@@ -7344,7 +10098,7 @@
           </a:prstGeom>
           <a:extLst>
             <a:ext uri="{C572A759-6A51-4108-AA02-DFA0A04FC94B}">
-              <ma14:wrappingTextBoxFlag xmlns:ma14="http://schemas.microsoft.com/office/mac/drawingml/2011/main" xmlns="" val="0"/>
+              <ma14:wrappingTextBoxFlag xmlns="" xmlns:ma14="http://schemas.microsoft.com/office/mac/drawingml/2011/main" val="0"/>
             </a:ext>
           </a:extLst>
         </p:spPr>
@@ -7363,7 +10117,7 @@
             <a:pPr algn="r"/>
             <a:fld id="{F7021451-1387-4CA6-816F-3879F97B5CBC}" type="slidenum">
               <a:rPr lang="en-US" b="0"/>
-              <a:t>12</a:t>
+              <a:t>15</a:t>
             </a:fld>
             <a:endParaRPr lang="en-US"/>
           </a:p>
@@ -7377,7 +10131,7 @@
 </p:sld>
 </file>
 
-<file path=ppt/slides/slide13.xml><?xml version="1.0" encoding="utf-8"?>
+<file path=ppt/slides/slide16.xml><?xml version="1.0" encoding="utf-8"?>
 <p:sld xmlns:a="http://schemas.openxmlformats.org/drawingml/2006/main" xmlns:r="http://schemas.openxmlformats.org/officeDocument/2006/relationships" xmlns:p="http://schemas.openxmlformats.org/presentationml/2006/main">
   <p:cSld>
     <p:spTree>
@@ -8459,7 +11213,7 @@
           </a:prstGeom>
           <a:extLst>
             <a:ext uri="{C572A759-6A51-4108-AA02-DFA0A04FC94B}">
-              <ma14:wrappingTextBoxFlag xmlns:ma14="http://schemas.microsoft.com/office/mac/drawingml/2011/main" xmlns="" val="0"/>
+              <ma14:wrappingTextBoxFlag xmlns="" xmlns:ma14="http://schemas.microsoft.com/office/mac/drawingml/2011/main" val="0"/>
             </a:ext>
           </a:extLst>
         </p:spPr>
@@ -8478,7 +11232,7 @@
             <a:pPr algn="r"/>
             <a:fld id="{F7021451-1387-4CA6-816F-3879F97B5CBC}" type="slidenum">
               <a:rPr lang="en-US" b="0"/>
-              <a:t>13</a:t>
+              <a:t>16</a:t>
             </a:fld>
             <a:endParaRPr lang="en-US"/>
           </a:p>
@@ -8497,7 +11251,7 @@
 </p:sld>
 </file>
 
-<file path=ppt/slides/slide14.xml><?xml version="1.0" encoding="utf-8"?>
+<file path=ppt/slides/slide17.xml><?xml version="1.0" encoding="utf-8"?>
 <p:sld xmlns:a="http://schemas.openxmlformats.org/drawingml/2006/main" xmlns:r="http://schemas.openxmlformats.org/officeDocument/2006/relationships" xmlns:p="http://schemas.openxmlformats.org/presentationml/2006/main">
   <p:cSld name="Slide 1">
     <p:spTree>
@@ -8546,7 +11300,7 @@
                   <a:schemeClr val="accent1"/>
                 </a:solidFill>
               </a:rPr>
-              <a:t>7. 導入先からの評価</a:t>
+              <a:t>6. AI の妥当性</a:t>
             </a:r>
             <a:endParaRPr lang="ja-JP" sz="1400" dirty="0"/>
           </a:p>
@@ -8584,70 +11338,53 @@
                   <a:schemeClr val="tx2"/>
                 </a:solidFill>
               </a:rPr>
-              <a:t>導入先の評価 ①　良かった点</a:t>
+              <a:t>評価：工場内の動きをシミュレーション</a:t>
             </a:r>
             <a:endParaRPr lang="ja-JP" sz="3200" dirty="0"/>
           </a:p>
         </p:txBody>
       </p:sp>
-      <p:sp>
-        <p:nvSpPr>
-          <p:cNvPr id="4" name="良かった点_前置き"/>
-          <p:cNvSpPr txBox="1"/>
+      <p:pic>
+        <p:nvPicPr>
+          <p:cNvPr id="4" name="動きの比較_画像" descr="従来運用とシステム＋AI割当で、作業者の動線とムダ時間を比べたシミュレーション">    </p:cNvPr>
+          <p:cNvPicPr>
+            <a:picLocks noChangeAspect="1"/>
+          </p:cNvPicPr>
           <p:nvPr/>
-        </p:nvSpPr>
-        <p:spPr>
-          <a:xfrm>
-            <a:off x="548640" y="1463040"/>
-            <a:ext cx="11094415" cy="457200"/>
+        </p:nvPicPr>
+        <p:blipFill>
+          <a:blip r:embed="rId1"/>
+          <a:stretch>
+            <a:fillRect/>
+          </a:stretch>
+        </p:blipFill>
+        <p:spPr>
+          <a:xfrm>
+            <a:off x="548640" y="1417320"/>
+            <a:ext cx="8046720" cy="4526280"/>
           </a:xfrm>
           <a:prstGeom prst="rect">
             <a:avLst/>
           </a:prstGeom>
-          <a:noFill/>
-          <a:ln/>
-        </p:spPr>
-        <p:txBody>
-          <a:bodyPr wrap="square" lIns="0" tIns="0" rIns="0" bIns="0" rtlCol="0" anchor="ctr"/>
-          <a:lstStyle/>
-          <a:p>
-            <a:pPr indent="0" marL="0">
-              <a:buNone/>
-            </a:pPr>
-            <a:r>
-              <a:rPr lang="ja-JP" altLang="en-US" sz="1800" dirty="0">
-                <a:solidFill>
-                  <a:schemeClr val="accent4"/>
-                </a:solidFill>
-              </a:rPr>
-              <a:t>導入先の工場で使っていただいた方から、次の評価をいただきました</a:t>
-            </a:r>
-            <a:endParaRPr lang="ja-JP" sz="1800" dirty="0"/>
-          </a:p>
-        </p:txBody>
-      </p:sp>
-      <p:sp>
-        <p:nvSpPr>
-          <p:cNvPr id="5" name="良かった点1"/>
+        </p:spPr>
+      </p:pic>
+      <p:sp>
+        <p:nvSpPr>
+          <p:cNvPr id="5" name="動きの比較_画像枠"/>
           <p:cNvSpPr/>
           <p:nvPr/>
         </p:nvSpPr>
         <p:spPr>
           <a:xfrm>
-            <a:off x="548640" y="2103120"/>
-            <a:ext cx="11094415" cy="713232"/>
-          </a:xfrm>
-          <a:prstGeom prst="roundRect">
-            <a:avLst>
-              <a:gd name="adj" fmla="val 10256"/>
-            </a:avLst>
-          </a:prstGeom>
-          <a:solidFill>
-            <a:schemeClr val="bg2"/>
-          </a:solidFill>
-          <a:ln w="12700">
+            <a:off x="548640" y="1417320"/>
+            <a:ext cx="8046720" cy="4526280"/>
+          </a:xfrm>
+          <a:prstGeom prst="rect">
+            <a:avLst/>
+          </a:prstGeom>
+          <a:ln w="9525">
             <a:solidFill>
-              <a:schemeClr val="bg2"/>
+              <a:schemeClr val="accent3"/>
             </a:solidFill>
             <a:prstDash val="solid"/>
           </a:ln>
@@ -8655,845 +11392,18 @@
       </p:sp>
       <p:sp>
         <p:nvSpPr>
-          <p:cNvPr id="6" name="良かった点1_印"/>
+          <p:cNvPr id="6" name="動きの比較_要点1"/>
           <p:cNvSpPr/>
           <p:nvPr/>
         </p:nvSpPr>
         <p:spPr>
           <a:xfrm>
-            <a:off x="777240" y="2231136"/>
-            <a:ext cx="457200" cy="457200"/>
-          </a:xfrm>
-          <a:prstGeom prst="ellipse">
-            <a:avLst/>
-          </a:prstGeom>
-          <a:solidFill>
-            <a:schemeClr val="accent1"/>
-          </a:solidFill>
-          <a:ln w="12700">
-            <a:solidFill>
-              <a:schemeClr val="accent1"/>
-            </a:solidFill>
-            <a:prstDash val="solid"/>
-          </a:ln>
-        </p:spPr>
-      </p:sp>
-      <p:sp>
-        <p:nvSpPr>
-          <p:cNvPr id="7" name="良かった点1_印_文字"/>
-          <p:cNvSpPr txBox="1"/>
-          <p:nvPr/>
-        </p:nvSpPr>
-        <p:spPr>
-          <a:xfrm>
-            <a:off x="777240" y="2231136"/>
-            <a:ext cx="457200" cy="457200"/>
-          </a:xfrm>
-          <a:prstGeom prst="rect">
-            <a:avLst/>
-          </a:prstGeom>
-          <a:noFill/>
-          <a:ln/>
-        </p:spPr>
-        <p:txBody>
-          <a:bodyPr wrap="square" lIns="0" tIns="0" rIns="0" bIns="0" rtlCol="0" anchor="ctr"/>
-          <a:lstStyle/>
-          <a:p>
-            <a:pPr algn="ctr" indent="0" marL="0">
-              <a:buNone/>
-            </a:pPr>
-            <a:r>
-              <a:rPr lang="ja-JP" altLang="en-US" sz="1300" b="1" dirty="0">
-                <a:solidFill>
-                  <a:schemeClr val="bg1"/>
-                </a:solidFill>
-              </a:rPr>
-              <a:t>✓</a:t>
-            </a:r>
-            <a:endParaRPr lang="ja-JP" sz="1300" dirty="0"/>
-          </a:p>
-        </p:txBody>
-      </p:sp>
-      <p:sp>
-        <p:nvSpPr>
-          <p:cNvPr id="8" name="良かった点1_文字"/>
-          <p:cNvSpPr txBox="1"/>
-          <p:nvPr/>
-        </p:nvSpPr>
-        <p:spPr>
-          <a:xfrm>
-            <a:off x="1463040" y="2103120"/>
-            <a:ext cx="9905695" cy="713232"/>
-          </a:xfrm>
-          <a:prstGeom prst="rect">
-            <a:avLst/>
-          </a:prstGeom>
-          <a:noFill/>
-          <a:ln/>
-        </p:spPr>
-        <p:txBody>
-          <a:bodyPr wrap="square" lIns="0" tIns="0" rIns="0" bIns="0" rtlCol="0" anchor="ctr"/>
-          <a:lstStyle/>
-          <a:p>
-            <a:pPr indent="0" marL="0">
-              <a:buNone/>
-            </a:pPr>
-            <a:r>
-              <a:rPr lang="ja-JP" altLang="en-US" sz="2100" b="1" dirty="0">
-                <a:solidFill>
-                  <a:schemeClr val="tx2"/>
-                </a:solidFill>
-              </a:rPr>
-              <a:t>導入が簡単だった</a:t>
-            </a:r>
-            <a:endParaRPr lang="ja-JP" sz="2100" dirty="0"/>
-          </a:p>
-        </p:txBody>
-      </p:sp>
-      <p:sp>
-        <p:nvSpPr>
-          <p:cNvPr id="9" name="良かった点2"/>
-          <p:cNvSpPr/>
-          <p:nvPr/>
-        </p:nvSpPr>
-        <p:spPr>
-          <a:xfrm>
-            <a:off x="548640" y="2962656"/>
-            <a:ext cx="11094415" cy="713232"/>
+            <a:off x="8869680" y="1417320"/>
+            <a:ext cx="2773375" cy="1371600"/>
           </a:xfrm>
           <a:prstGeom prst="roundRect">
             <a:avLst>
-              <a:gd name="adj" fmla="val 10256"/>
-            </a:avLst>
-          </a:prstGeom>
-          <a:solidFill>
-            <a:schemeClr val="bg2"/>
-          </a:solidFill>
-          <a:ln w="12700">
-            <a:solidFill>
-              <a:schemeClr val="bg2"/>
-            </a:solidFill>
-            <a:prstDash val="solid"/>
-          </a:ln>
-        </p:spPr>
-      </p:sp>
-      <p:sp>
-        <p:nvSpPr>
-          <p:cNvPr id="10" name="良かった点2_印"/>
-          <p:cNvSpPr/>
-          <p:nvPr/>
-        </p:nvSpPr>
-        <p:spPr>
-          <a:xfrm>
-            <a:off x="777240" y="3090672"/>
-            <a:ext cx="457200" cy="457200"/>
-          </a:xfrm>
-          <a:prstGeom prst="ellipse">
-            <a:avLst/>
-          </a:prstGeom>
-          <a:solidFill>
-            <a:schemeClr val="accent1"/>
-          </a:solidFill>
-          <a:ln w="12700">
-            <a:solidFill>
-              <a:schemeClr val="accent1"/>
-            </a:solidFill>
-            <a:prstDash val="solid"/>
-          </a:ln>
-        </p:spPr>
-      </p:sp>
-      <p:sp>
-        <p:nvSpPr>
-          <p:cNvPr id="11" name="良かった点2_印_文字"/>
-          <p:cNvSpPr txBox="1"/>
-          <p:nvPr/>
-        </p:nvSpPr>
-        <p:spPr>
-          <a:xfrm>
-            <a:off x="777240" y="3090672"/>
-            <a:ext cx="457200" cy="457200"/>
-          </a:xfrm>
-          <a:prstGeom prst="rect">
-            <a:avLst/>
-          </a:prstGeom>
-          <a:noFill/>
-          <a:ln/>
-        </p:spPr>
-        <p:txBody>
-          <a:bodyPr wrap="square" lIns="0" tIns="0" rIns="0" bIns="0" rtlCol="0" anchor="ctr"/>
-          <a:lstStyle/>
-          <a:p>
-            <a:pPr algn="ctr" indent="0" marL="0">
-              <a:buNone/>
-            </a:pPr>
-            <a:r>
-              <a:rPr lang="ja-JP" altLang="en-US" sz="1300" b="1" dirty="0">
-                <a:solidFill>
-                  <a:schemeClr val="bg1"/>
-                </a:solidFill>
-              </a:rPr>
-              <a:t>✓</a:t>
-            </a:r>
-            <a:endParaRPr lang="ja-JP" sz="1300" dirty="0"/>
-          </a:p>
-        </p:txBody>
-      </p:sp>
-      <p:sp>
-        <p:nvSpPr>
-          <p:cNvPr id="12" name="良かった点2_文字"/>
-          <p:cNvSpPr txBox="1"/>
-          <p:nvPr/>
-        </p:nvSpPr>
-        <p:spPr>
-          <a:xfrm>
-            <a:off x="1463040" y="2962656"/>
-            <a:ext cx="9905695" cy="713232"/>
-          </a:xfrm>
-          <a:prstGeom prst="rect">
-            <a:avLst/>
-          </a:prstGeom>
-          <a:noFill/>
-          <a:ln/>
-        </p:spPr>
-        <p:txBody>
-          <a:bodyPr wrap="square" lIns="0" tIns="0" rIns="0" bIns="0" rtlCol="0" anchor="ctr"/>
-          <a:lstStyle/>
-          <a:p>
-            <a:pPr indent="0" marL="0">
-              <a:buNone/>
-            </a:pPr>
-            <a:r>
-              <a:rPr lang="ja-JP" altLang="en-US" sz="2100" b="1" dirty="0">
-                <a:solidFill>
-                  <a:schemeClr val="tx2"/>
-                </a:solidFill>
-              </a:rPr>
-              <a:t>操作が分かりやすかった</a:t>
-            </a:r>
-            <a:endParaRPr lang="ja-JP" sz="2100" dirty="0"/>
-          </a:p>
-        </p:txBody>
-      </p:sp>
-      <p:sp>
-        <p:nvSpPr>
-          <p:cNvPr id="13" name="良かった点3"/>
-          <p:cNvSpPr/>
-          <p:nvPr/>
-        </p:nvSpPr>
-        <p:spPr>
-          <a:xfrm>
-            <a:off x="548640" y="3822192"/>
-            <a:ext cx="11094415" cy="713232"/>
-          </a:xfrm>
-          <a:prstGeom prst="roundRect">
-            <a:avLst>
-              <a:gd name="adj" fmla="val 10256"/>
-            </a:avLst>
-          </a:prstGeom>
-          <a:solidFill>
-            <a:schemeClr val="bg2"/>
-          </a:solidFill>
-          <a:ln w="12700">
-            <a:solidFill>
-              <a:schemeClr val="bg2"/>
-            </a:solidFill>
-            <a:prstDash val="solid"/>
-          </a:ln>
-        </p:spPr>
-      </p:sp>
-      <p:sp>
-        <p:nvSpPr>
-          <p:cNvPr id="14" name="良かった点3_印"/>
-          <p:cNvSpPr/>
-          <p:nvPr/>
-        </p:nvSpPr>
-        <p:spPr>
-          <a:xfrm>
-            <a:off x="777240" y="3950208"/>
-            <a:ext cx="457200" cy="457200"/>
-          </a:xfrm>
-          <a:prstGeom prst="ellipse">
-            <a:avLst/>
-          </a:prstGeom>
-          <a:solidFill>
-            <a:schemeClr val="accent1"/>
-          </a:solidFill>
-          <a:ln w="12700">
-            <a:solidFill>
-              <a:schemeClr val="accent1"/>
-            </a:solidFill>
-            <a:prstDash val="solid"/>
-          </a:ln>
-        </p:spPr>
-      </p:sp>
-      <p:sp>
-        <p:nvSpPr>
-          <p:cNvPr id="15" name="良かった点3_印_文字"/>
-          <p:cNvSpPr txBox="1"/>
-          <p:nvPr/>
-        </p:nvSpPr>
-        <p:spPr>
-          <a:xfrm>
-            <a:off x="777240" y="3950208"/>
-            <a:ext cx="457200" cy="457200"/>
-          </a:xfrm>
-          <a:prstGeom prst="rect">
-            <a:avLst/>
-          </a:prstGeom>
-          <a:noFill/>
-          <a:ln/>
-        </p:spPr>
-        <p:txBody>
-          <a:bodyPr wrap="square" lIns="0" tIns="0" rIns="0" bIns="0" rtlCol="0" anchor="ctr"/>
-          <a:lstStyle/>
-          <a:p>
-            <a:pPr algn="ctr" indent="0" marL="0">
-              <a:buNone/>
-            </a:pPr>
-            <a:r>
-              <a:rPr lang="ja-JP" altLang="en-US" sz="1300" b="1" dirty="0">
-                <a:solidFill>
-                  <a:schemeClr val="bg1"/>
-                </a:solidFill>
-              </a:rPr>
-              <a:t>✓</a:t>
-            </a:r>
-            <a:endParaRPr lang="ja-JP" sz="1300" dirty="0"/>
-          </a:p>
-        </p:txBody>
-      </p:sp>
-      <p:sp>
-        <p:nvSpPr>
-          <p:cNvPr id="16" name="良かった点3_文字"/>
-          <p:cNvSpPr txBox="1"/>
-          <p:nvPr/>
-        </p:nvSpPr>
-        <p:spPr>
-          <a:xfrm>
-            <a:off x="1463040" y="3822192"/>
-            <a:ext cx="9905695" cy="713232"/>
-          </a:xfrm>
-          <a:prstGeom prst="rect">
-            <a:avLst/>
-          </a:prstGeom>
-          <a:noFill/>
-          <a:ln/>
-        </p:spPr>
-        <p:txBody>
-          <a:bodyPr wrap="square" lIns="0" tIns="0" rIns="0" bIns="0" rtlCol="0" anchor="ctr"/>
-          <a:lstStyle/>
-          <a:p>
-            <a:pPr indent="0" marL="0">
-              <a:buNone/>
-            </a:pPr>
-            <a:r>
-              <a:rPr lang="ja-JP" altLang="en-US" sz="2100" b="1" dirty="0">
-                <a:solidFill>
-                  <a:schemeClr val="tx2"/>
-                </a:solidFill>
-              </a:rPr>
-              <a:t>作業にかかった時間が記録されるのが便利</a:t>
-            </a:r>
-            <a:endParaRPr lang="ja-JP" sz="2100" dirty="0"/>
-          </a:p>
-        </p:txBody>
-      </p:sp>
-      <p:sp>
-        <p:nvSpPr>
-          <p:cNvPr id="17" name="良かった点4"/>
-          <p:cNvSpPr/>
-          <p:nvPr/>
-        </p:nvSpPr>
-        <p:spPr>
-          <a:xfrm>
-            <a:off x="548640" y="4681728"/>
-            <a:ext cx="11094415" cy="713232"/>
-          </a:xfrm>
-          <a:prstGeom prst="roundRect">
-            <a:avLst>
-              <a:gd name="adj" fmla="val 10256"/>
-            </a:avLst>
-          </a:prstGeom>
-          <a:solidFill>
-            <a:schemeClr val="bg2"/>
-          </a:solidFill>
-          <a:ln w="12700">
-            <a:solidFill>
-              <a:schemeClr val="bg2"/>
-            </a:solidFill>
-            <a:prstDash val="solid"/>
-          </a:ln>
-        </p:spPr>
-      </p:sp>
-      <p:sp>
-        <p:nvSpPr>
-          <p:cNvPr id="18" name="良かった点4_印"/>
-          <p:cNvSpPr/>
-          <p:nvPr/>
-        </p:nvSpPr>
-        <p:spPr>
-          <a:xfrm>
-            <a:off x="777240" y="4809744"/>
-            <a:ext cx="457200" cy="457200"/>
-          </a:xfrm>
-          <a:prstGeom prst="ellipse">
-            <a:avLst/>
-          </a:prstGeom>
-          <a:solidFill>
-            <a:schemeClr val="accent1"/>
-          </a:solidFill>
-          <a:ln w="12700">
-            <a:solidFill>
-              <a:schemeClr val="accent1"/>
-            </a:solidFill>
-            <a:prstDash val="solid"/>
-          </a:ln>
-        </p:spPr>
-      </p:sp>
-      <p:sp>
-        <p:nvSpPr>
-          <p:cNvPr id="19" name="良かった点4_印_文字"/>
-          <p:cNvSpPr txBox="1"/>
-          <p:nvPr/>
-        </p:nvSpPr>
-        <p:spPr>
-          <a:xfrm>
-            <a:off x="777240" y="4809744"/>
-            <a:ext cx="457200" cy="457200"/>
-          </a:xfrm>
-          <a:prstGeom prst="rect">
-            <a:avLst/>
-          </a:prstGeom>
-          <a:noFill/>
-          <a:ln/>
-        </p:spPr>
-        <p:txBody>
-          <a:bodyPr wrap="square" lIns="0" tIns="0" rIns="0" bIns="0" rtlCol="0" anchor="ctr"/>
-          <a:lstStyle/>
-          <a:p>
-            <a:pPr algn="ctr" indent="0" marL="0">
-              <a:buNone/>
-            </a:pPr>
-            <a:r>
-              <a:rPr lang="ja-JP" altLang="en-US" sz="1300" b="1" dirty="0">
-                <a:solidFill>
-                  <a:schemeClr val="bg1"/>
-                </a:solidFill>
-              </a:rPr>
-              <a:t>✓</a:t>
-            </a:r>
-            <a:endParaRPr lang="ja-JP" sz="1300" dirty="0"/>
-          </a:p>
-        </p:txBody>
-      </p:sp>
-      <p:sp>
-        <p:nvSpPr>
-          <p:cNvPr id="20" name="良かった点4_文字"/>
-          <p:cNvSpPr txBox="1"/>
-          <p:nvPr/>
-        </p:nvSpPr>
-        <p:spPr>
-          <a:xfrm>
-            <a:off x="1463040" y="4681728"/>
-            <a:ext cx="9905695" cy="713232"/>
-          </a:xfrm>
-          <a:prstGeom prst="rect">
-            <a:avLst/>
-          </a:prstGeom>
-          <a:noFill/>
-          <a:ln/>
-        </p:spPr>
-        <p:txBody>
-          <a:bodyPr wrap="square" lIns="0" tIns="0" rIns="0" bIns="0" rtlCol="0" anchor="ctr"/>
-          <a:lstStyle/>
-          <a:p>
-            <a:pPr indent="0" marL="0">
-              <a:buNone/>
-            </a:pPr>
-            <a:r>
-              <a:rPr lang="ja-JP" altLang="en-US" sz="2100" b="1" dirty="0">
-                <a:solidFill>
-                  <a:schemeClr val="tx2"/>
-                </a:solidFill>
-              </a:rPr>
-              <a:t>急ぎの仕事を見落とさないのが便利</a:t>
-            </a:r>
-            <a:endParaRPr lang="ja-JP" sz="2100" dirty="0"/>
-          </a:p>
-        </p:txBody>
-      </p:sp>
-      <p:sp>
-        <p:nvSpPr>
-          <p:cNvPr id="21" name="良かった点5"/>
-          <p:cNvSpPr/>
-          <p:nvPr/>
-        </p:nvSpPr>
-        <p:spPr>
-          <a:xfrm>
-            <a:off x="548640" y="5541264"/>
-            <a:ext cx="11094415" cy="713232"/>
-          </a:xfrm>
-          <a:prstGeom prst="roundRect">
-            <a:avLst>
-              <a:gd name="adj" fmla="val 10256"/>
-            </a:avLst>
-          </a:prstGeom>
-          <a:solidFill>
-            <a:schemeClr val="bg2"/>
-          </a:solidFill>
-          <a:ln w="12700">
-            <a:solidFill>
-              <a:schemeClr val="bg2"/>
-            </a:solidFill>
-            <a:prstDash val="solid"/>
-          </a:ln>
-        </p:spPr>
-      </p:sp>
-      <p:sp>
-        <p:nvSpPr>
-          <p:cNvPr id="22" name="良かった点5_印"/>
-          <p:cNvSpPr/>
-          <p:nvPr/>
-        </p:nvSpPr>
-        <p:spPr>
-          <a:xfrm>
-            <a:off x="777240" y="5669280"/>
-            <a:ext cx="457200" cy="457200"/>
-          </a:xfrm>
-          <a:prstGeom prst="ellipse">
-            <a:avLst/>
-          </a:prstGeom>
-          <a:solidFill>
-            <a:schemeClr val="accent1"/>
-          </a:solidFill>
-          <a:ln w="12700">
-            <a:solidFill>
-              <a:schemeClr val="accent1"/>
-            </a:solidFill>
-            <a:prstDash val="solid"/>
-          </a:ln>
-        </p:spPr>
-      </p:sp>
-      <p:sp>
-        <p:nvSpPr>
-          <p:cNvPr id="23" name="良かった点5_印_文字"/>
-          <p:cNvSpPr txBox="1"/>
-          <p:nvPr/>
-        </p:nvSpPr>
-        <p:spPr>
-          <a:xfrm>
-            <a:off x="777240" y="5669280"/>
-            <a:ext cx="457200" cy="457200"/>
-          </a:xfrm>
-          <a:prstGeom prst="rect">
-            <a:avLst/>
-          </a:prstGeom>
-          <a:noFill/>
-          <a:ln/>
-        </p:spPr>
-        <p:txBody>
-          <a:bodyPr wrap="square" lIns="0" tIns="0" rIns="0" bIns="0" rtlCol="0" anchor="ctr"/>
-          <a:lstStyle/>
-          <a:p>
-            <a:pPr algn="ctr" indent="0" marL="0">
-              <a:buNone/>
-            </a:pPr>
-            <a:r>
-              <a:rPr lang="ja-JP" altLang="en-US" sz="1300" b="1" dirty="0">
-                <a:solidFill>
-                  <a:schemeClr val="bg1"/>
-                </a:solidFill>
-              </a:rPr>
-              <a:t>✓</a:t>
-            </a:r>
-            <a:endParaRPr lang="ja-JP" sz="1300" dirty="0"/>
-          </a:p>
-        </p:txBody>
-      </p:sp>
-      <p:sp>
-        <p:nvSpPr>
-          <p:cNvPr id="24" name="良かった点5_文字"/>
-          <p:cNvSpPr txBox="1"/>
-          <p:nvPr/>
-        </p:nvSpPr>
-        <p:spPr>
-          <a:xfrm>
-            <a:off x="1463040" y="5541264"/>
-            <a:ext cx="9905695" cy="713232"/>
-          </a:xfrm>
-          <a:prstGeom prst="rect">
-            <a:avLst/>
-          </a:prstGeom>
-          <a:noFill/>
-          <a:ln/>
-        </p:spPr>
-        <p:txBody>
-          <a:bodyPr wrap="square" lIns="0" tIns="0" rIns="0" bIns="0" rtlCol="0" anchor="ctr"/>
-          <a:lstStyle/>
-          <a:p>
-            <a:pPr indent="0" marL="0">
-              <a:buNone/>
-            </a:pPr>
-            <a:r>
-              <a:rPr lang="ja-JP" altLang="en-US" sz="2100" b="1" dirty="0">
-                <a:solidFill>
-                  <a:schemeClr val="tx2"/>
-                </a:solidFill>
-              </a:rPr>
-              <a:t>ダッシュボードを見て、空いている機械がすぐ見つかるのが便利だった</a:t>
-            </a:r>
-            <a:endParaRPr lang="ja-JP" sz="2100" dirty="0"/>
-          </a:p>
-        </p:txBody>
-      </p:sp>
-      <p:sp>
-        <p:nvSpPr>
-          <p:cNvPr id="25" name="Slide Number Placeholder 0"/>
-          <p:cNvSpPr>
-            <a:spLocks noGrp="1"/>
-          </p:cNvSpPr>
-          <p:nvPr>
-            <p:ph type="sldNum" sz="quarter" idx="4294967295"/>
-          </p:nvPr>
-        </p:nvSpPr>
-        <p:spPr>
-          <a:xfrm>
-            <a:off x="10911535" y="6400800"/>
-            <a:ext cx="731520" cy="274320"/>
-          </a:xfrm>
-          <a:prstGeom prst="rect">
-            <a:avLst/>
-          </a:prstGeom>
-          <a:extLst>
-            <a:ext uri="{C572A759-6A51-4108-AA02-DFA0A04FC94B}">
-              <ma14:wrappingTextBoxFlag xmlns:ma14="http://schemas.microsoft.com/office/mac/drawingml/2011/main" val="0"/>
-            </a:ext>
-          </a:extLst>
-        </p:spPr>
-        <p:txBody>
-          <a:bodyPr lIns="0" tIns="0" rIns="0" bIns="0"/>
-          <a:lstStyle>
-            <a:lvl1pPr>
-              <a:defRPr sz="1100">
-                <a:solidFill>
-                  <a:schemeClr val="accent3"/>
-                </a:solidFill>
-              </a:defRPr>
-            </a:lvl1pPr>
-          </a:lstStyle>
-          <a:p>
-            <a:pPr algn="r"/>
-            <a:fld id="{F7021451-1387-4CA6-816F-3879F97B5CBC}" type="slidenum">
-              <a:rPr b="0" lang="en-US"/>
-              <a:t>1</a:t>
-            </a:fld>
-            <a:endParaRPr lang="en-US"/>
-          </a:p>
-        </p:txBody>
-      </p:sp>
-    </p:spTree>
-  </p:cSld>
-  <p:clrMapOvr>
-    <a:masterClrMapping/>
-  </p:clrMapOvr>
-</p:sld>
-</file>
-
-<file path=ppt/slides/slide15.xml><?xml version="1.0" encoding="utf-8"?>
-<p:sld xmlns:a="http://schemas.openxmlformats.org/drawingml/2006/main" xmlns:r="http://schemas.openxmlformats.org/officeDocument/2006/relationships" xmlns:p="http://schemas.openxmlformats.org/presentationml/2006/main">
-  <p:cSld name="Slide 2">
-    <p:spTree>
-      <p:nvGrpSpPr>
-        <p:cNvPr id="1" name=""/>
-        <p:cNvGrpSpPr/>
-        <p:nvPr/>
-      </p:nvGrpSpPr>
-      <p:grpSpPr>
-        <a:xfrm>
-          <a:off x="0" y="0"/>
-          <a:ext cx="0" cy="0"/>
-          <a:chOff x="0" y="0"/>
-          <a:chExt cx="0" cy="0"/>
-        </a:xfrm>
-      </p:grpSpPr>
-      <p:sp>
-        <p:nvSpPr>
-          <p:cNvPr id="2" name="Text 0"/>
-          <p:cNvSpPr/>
-          <p:nvPr>
-            <p:ph idx="100" type="body" hasCustomPrompt="1"/>
-          </p:nvPr>
-        </p:nvSpPr>
-        <p:spPr>
-          <a:xfrm>
-            <a:off x="548640" y="274320"/>
-            <a:ext cx="11094415" cy="320040"/>
-          </a:xfrm>
-          <a:prstGeom prst="rect">
-            <a:avLst/>
-          </a:prstGeom>
-          <a:noFill/>
-          <a:ln/>
-        </p:spPr>
-        <p:txBody>
-          <a:bodyPr wrap="square" lIns="0" tIns="0" rIns="0" bIns="0" rtlCol="0" anchor="ctr"/>
-          <a:lstStyle/>
-          <a:p>
-            <a:pPr algn="l" indent="0" marL="0">
-              <a:buNone/>
-            </a:pPr>
-            <a:r>
-              <a:rPr lang="ja-JP" altLang="en-US" sz="1400" b="1" dirty="0">
-                <a:solidFill>
-                  <a:schemeClr val="accent1"/>
-                </a:solidFill>
-              </a:rPr>
-              <a:t>7. 導入先からの評価</a:t>
-            </a:r>
-            <a:endParaRPr lang="ja-JP" sz="1400" dirty="0"/>
-          </a:p>
-        </p:txBody>
-      </p:sp>
-      <p:sp>
-        <p:nvSpPr>
-          <p:cNvPr id="3" name="Text 0"/>
-          <p:cNvSpPr/>
-          <p:nvPr>
-            <p:ph idx="101" type="title" hasCustomPrompt="1"/>
-          </p:nvPr>
-        </p:nvSpPr>
-        <p:spPr>
-          <a:xfrm>
-            <a:off x="548640" y="594360"/>
-            <a:ext cx="11094415" cy="731520"/>
-          </a:xfrm>
-          <a:prstGeom prst="rect">
-            <a:avLst/>
-          </a:prstGeom>
-          <a:noFill/>
-          <a:ln/>
-        </p:spPr>
-        <p:txBody>
-          <a:bodyPr wrap="square" lIns="0" tIns="0" rIns="0" bIns="0" rtlCol="0" anchor="ctr"/>
-          <a:lstStyle/>
-          <a:p>
-            <a:pPr algn="l" indent="0" marL="0">
-              <a:buNone/>
-            </a:pPr>
-            <a:r>
-              <a:rPr lang="ja-JP" altLang="en-US" sz="3200" b="1" dirty="0">
-                <a:solidFill>
-                  <a:schemeClr val="tx2"/>
-                </a:solidFill>
-              </a:rPr>
-              <a:t>導入先の評価 ②　悪かった点と、直したところ</a:t>
-            </a:r>
-            <a:endParaRPr lang="ja-JP" sz="3200" dirty="0"/>
-          </a:p>
-        </p:txBody>
-      </p:sp>
-      <p:sp>
-        <p:nvSpPr>
-          <p:cNvPr id="4" name="直した1_評価"/>
-          <p:cNvSpPr/>
-          <p:nvPr/>
-        </p:nvSpPr>
-        <p:spPr>
-          <a:xfrm>
-            <a:off x="548640" y="1554480"/>
-            <a:ext cx="4023360" cy="2148840"/>
-          </a:xfrm>
-          <a:prstGeom prst="roundRect">
-            <a:avLst>
-              <a:gd name="adj" fmla="val 3404"/>
-            </a:avLst>
-          </a:prstGeom>
-          <a:solidFill>
-            <a:schemeClr val="bg2"/>
-          </a:solidFill>
-          <a:ln w="12700">
-            <a:solidFill>
-              <a:schemeClr val="bg2"/>
-            </a:solidFill>
-            <a:prstDash val="solid"/>
-          </a:ln>
-        </p:spPr>
-      </p:sp>
-      <p:sp>
-        <p:nvSpPr>
-          <p:cNvPr id="5" name="直した1_評価_文字"/>
-          <p:cNvSpPr txBox="1"/>
-          <p:nvPr/>
-        </p:nvSpPr>
-        <p:spPr>
-          <a:xfrm>
-            <a:off x="822960" y="1554480"/>
-            <a:ext cx="3474720" cy="2148840"/>
-          </a:xfrm>
-          <a:prstGeom prst="rect">
-            <a:avLst/>
-          </a:prstGeom>
-          <a:noFill/>
-          <a:ln/>
-        </p:spPr>
-        <p:txBody>
-          <a:bodyPr wrap="square" lIns="0" tIns="0" rIns="0" bIns="0" rtlCol="0" anchor="ctr"/>
-          <a:lstStyle/>
-          <a:p>
-            <a:pPr indent="0" marL="0">
-              <a:buNone/>
-            </a:pPr>
-            <a:r>
-              <a:rPr lang="ja-JP" altLang="en-US" sz="1800" b="1" dirty="0">
-                <a:solidFill>
-                  <a:schemeClr val="tx2"/>
-                </a:solidFill>
-              </a:rPr>
-              <a:t>タッチを忘れる人がいた</a:t>
-            </a:r>
-            <a:endParaRPr lang="ja-JP" sz="1800" dirty="0"/>
-          </a:p>
-        </p:txBody>
-      </p:sp>
-      <p:sp>
-        <p:nvSpPr>
-          <p:cNvPr id="6" name="直した1_矢印"/>
-          <p:cNvSpPr/>
-          <p:nvPr/>
-        </p:nvSpPr>
-        <p:spPr>
-          <a:xfrm>
-            <a:off x="4709160" y="2427732"/>
-            <a:ext cx="457200" cy="402336"/>
-          </a:xfrm>
-          <a:prstGeom prst="rightArrow">
-            <a:avLst/>
-          </a:prstGeom>
-          <a:solidFill>
-            <a:schemeClr val="accent1"/>
-          </a:solidFill>
-          <a:ln w="12700">
-            <a:solidFill>
-              <a:schemeClr val="accent1"/>
-            </a:solidFill>
-            <a:prstDash val="solid"/>
-          </a:ln>
-        </p:spPr>
-      </p:sp>
-      <p:sp>
-        <p:nvSpPr>
-          <p:cNvPr id="7" name="直した1_対応"/>
-          <p:cNvSpPr/>
-          <p:nvPr/>
-        </p:nvSpPr>
-        <p:spPr>
-          <a:xfrm>
-            <a:off x="5303520" y="1554480"/>
-            <a:ext cx="6339535" cy="2148840"/>
-          </a:xfrm>
-          <a:prstGeom prst="roundRect">
-            <a:avLst>
-              <a:gd name="adj" fmla="val 3404"/>
+              <a:gd name="adj" fmla="val 5333"/>
             </a:avLst>
           </a:prstGeom>
           <a:solidFill>
@@ -9509,177 +11419,14 @@
       </p:sp>
       <p:sp>
         <p:nvSpPr>
-          <p:cNvPr id="8" name="直した1_札"/>
-          <p:cNvSpPr/>
-          <p:nvPr/>
-        </p:nvSpPr>
-        <p:spPr>
-          <a:xfrm>
-            <a:off x="5577840" y="1755648"/>
-            <a:ext cx="1554480" cy="384048"/>
-          </a:xfrm>
-          <a:prstGeom prst="roundRect">
-            <a:avLst>
-              <a:gd name="adj" fmla="val 47619"/>
-            </a:avLst>
-          </a:prstGeom>
-          <a:solidFill>
-            <a:schemeClr val="accent1"/>
-          </a:solidFill>
-          <a:ln w="12700">
-            <a:solidFill>
-              <a:schemeClr val="accent1"/>
-            </a:solidFill>
-            <a:prstDash val="solid"/>
-          </a:ln>
-        </p:spPr>
-      </p:sp>
-      <p:sp>
-        <p:nvSpPr>
-          <p:cNvPr id="9" name="直した1_札_文字"/>
+          <p:cNvPr id="7" name="動きの比較_要点1_文字"/>
           <p:cNvSpPr txBox="1"/>
           <p:nvPr/>
         </p:nvSpPr>
         <p:spPr>
           <a:xfrm>
-            <a:off x="5577840" y="1755648"/>
-            <a:ext cx="1554480" cy="384048"/>
-          </a:xfrm>
-          <a:prstGeom prst="rect">
-            <a:avLst/>
-          </a:prstGeom>
-          <a:noFill/>
-          <a:ln/>
-        </p:spPr>
-        <p:txBody>
-          <a:bodyPr wrap="square" lIns="0" tIns="0" rIns="0" bIns="0" rtlCol="0" anchor="ctr"/>
-          <a:lstStyle/>
-          <a:p>
-            <a:pPr algn="ctr" indent="0" marL="0">
-              <a:buNone/>
-            </a:pPr>
-            <a:r>
-              <a:rPr lang="ja-JP" altLang="en-US" sz="1600" b="1" dirty="0">
-                <a:solidFill>
-                  <a:schemeClr val="bg1"/>
-                </a:solidFill>
-              </a:rPr>
-              <a:t>直しました</a:t>
-            </a:r>
-            <a:endParaRPr lang="ja-JP" sz="1600" dirty="0"/>
-          </a:p>
-        </p:txBody>
-      </p:sp>
-      <p:sp>
-        <p:nvSpPr>
-          <p:cNvPr id="10" name="直した1_対応_文字"/>
-          <p:cNvSpPr txBox="1"/>
-          <p:nvPr/>
-        </p:nvSpPr>
-        <p:spPr>
-          <a:xfrm>
-            <a:off x="5577840" y="2249424"/>
-            <a:ext cx="5790895" cy="1307592"/>
-          </a:xfrm>
-          <a:prstGeom prst="rect">
-            <a:avLst/>
-          </a:prstGeom>
-          <a:noFill/>
-          <a:ln/>
-        </p:spPr>
-        <p:txBody>
-          <a:bodyPr wrap="square" lIns="0" tIns="0" rIns="0" bIns="0" rtlCol="0" anchor="t"/>
-          <a:lstStyle/>
-          <a:p>
-            <a:pPr marL="203200" indent="-203200">
-              <a:buSzPct val="100000"/>
-              <a:buChar char="•"/>
-            </a:pPr>
-            <a:r>
-              <a:rPr lang="ja-JP" altLang="en-US" sz="1700" dirty="0">
-                <a:solidFill>
-                  <a:schemeClr val="tx1"/>
-                </a:solidFill>
-              </a:rPr>
-              <a:t>別の機材でタッチすると、前の作業を終えるか確認する</a:t>
-            </a:r>
-            <a:endParaRPr lang="ja-JP" sz="1700" dirty="0"/>
-          </a:p>
-          <a:p>
-            <a:pPr marL="203200" indent="-203200">
-              <a:spcBef>
-                <a:spcPts val="600"/>
-              </a:spcBef>
-              <a:buSzPct val="100000"/>
-              <a:buChar char="•"/>
-            </a:pPr>
-            <a:r>
-              <a:rPr lang="ja-JP" altLang="en-US" sz="1700" dirty="0">
-                <a:solidFill>
-                  <a:schemeClr val="tx1"/>
-                </a:solidFill>
-              </a:rPr>
-              <a:t>長く使用中のままなら、機材の画面と管理画面で知らせる</a:t>
-            </a:r>
-            <a:endParaRPr lang="ja-JP" sz="1700" dirty="0"/>
-          </a:p>
-          <a:p>
-            <a:pPr marL="203200" indent="-203200">
-              <a:spcBef>
-                <a:spcPts val="600"/>
-              </a:spcBef>
-              <a:buSzPct val="100000"/>
-              <a:buChar char="•"/>
-            </a:pPr>
-            <a:r>
-              <a:rPr lang="ja-JP" altLang="en-US" sz="1700" dirty="0">
-                <a:solidFill>
-                  <a:schemeClr val="tx1"/>
-                </a:solidFill>
-              </a:rPr>
-              <a:t>管理者が、終わった時刻を入れて代わりに終了できる</a:t>
-            </a:r>
-            <a:endParaRPr lang="ja-JP" sz="1700" dirty="0"/>
-          </a:p>
-        </p:txBody>
-      </p:sp>
-      <p:sp>
-        <p:nvSpPr>
-          <p:cNvPr id="11" name="直した2_評価"/>
-          <p:cNvSpPr/>
-          <p:nvPr/>
-        </p:nvSpPr>
-        <p:spPr>
-          <a:xfrm>
-            <a:off x="548640" y="3977640"/>
-            <a:ext cx="4023360" cy="2148840"/>
-          </a:xfrm>
-          <a:prstGeom prst="roundRect">
-            <a:avLst>
-              <a:gd name="adj" fmla="val 3404"/>
-            </a:avLst>
-          </a:prstGeom>
-          <a:solidFill>
-            <a:schemeClr val="bg2"/>
-          </a:solidFill>
-          <a:ln w="12700">
-            <a:solidFill>
-              <a:schemeClr val="bg2"/>
-            </a:solidFill>
-            <a:prstDash val="solid"/>
-          </a:ln>
-        </p:spPr>
-      </p:sp>
-      <p:sp>
-        <p:nvSpPr>
-          <p:cNvPr id="12" name="直した2_評価_文字"/>
-          <p:cNvSpPr txBox="1"/>
-          <p:nvPr/>
-        </p:nvSpPr>
-        <p:spPr>
-          <a:xfrm>
-            <a:off x="822960" y="3977640"/>
-            <a:ext cx="3474720" cy="2148840"/>
+            <a:off x="9052560" y="1417320"/>
+            <a:ext cx="2407615" cy="1371600"/>
           </a:xfrm>
           <a:prstGeom prst="rect">
             <a:avLst/>
@@ -9695,70 +11442,65 @@
               <a:buNone/>
             </a:pPr>
             <a:r>
-              <a:rPr lang="ja-JP" altLang="en-US" sz="1800" b="1" dirty="0">
-                <a:solidFill>
-                  <a:schemeClr val="tx2"/>
-                </a:solidFill>
-              </a:rPr>
-              <a:t>毎週やるタスクも、</a:t>
-            </a:r>
-            <a:endParaRPr lang="ja-JP" sz="1800" dirty="0"/>
+              <a:rPr lang="ja-JP" altLang="en-US" sz="1400" dirty="0">
+                <a:solidFill>
+                  <a:schemeClr val="accent4"/>
+                </a:solidFill>
+              </a:rPr>
+              <a:t>全タスクの完了</a:t>
+            </a:r>
+            <a:endParaRPr lang="ja-JP" sz="1400" dirty="0"/>
           </a:p>
           <a:p>
             <a:pPr indent="0" marL="0">
+              <a:spcBef>
+                <a:spcPts val="400"/>
+              </a:spcBef>
               <a:buNone/>
             </a:pPr>
             <a:r>
-              <a:rPr lang="ja-JP" altLang="en-US" sz="1800" b="1" dirty="0">
-                <a:solidFill>
-                  <a:schemeClr val="tx2"/>
-                </a:solidFill>
-              </a:rPr>
-              <a:t>毎回入れるのが面倒だった</a:t>
-            </a:r>
-            <a:endParaRPr lang="ja-JP" sz="1800" dirty="0"/>
-          </a:p>
-        </p:txBody>
-      </p:sp>
-      <p:sp>
-        <p:nvSpPr>
-          <p:cNvPr id="13" name="直した2_矢印"/>
+              <a:rPr lang="ja-JP" altLang="en-US" sz="2800" b="1" dirty="0">
+                <a:solidFill>
+                  <a:schemeClr val="accent1"/>
+                </a:solidFill>
+              </a:rPr>
+              <a:t>約2時間早い</a:t>
+            </a:r>
+            <a:endParaRPr lang="ja-JP" sz="1400" dirty="0"/>
+          </a:p>
+          <a:p>
+            <a:pPr indent="0" marL="0">
+              <a:spcBef>
+                <a:spcPts val="400"/>
+              </a:spcBef>
+              <a:buNone/>
+            </a:pPr>
+            <a:r>
+              <a:rPr lang="ja-JP" altLang="en-US" sz="1400" dirty="0">
+                <a:solidFill>
+                  <a:schemeClr val="tx1"/>
+                </a:solidFill>
+              </a:rPr>
+              <a:t>18:45 → 16:44</a:t>
+            </a:r>
+            <a:endParaRPr lang="ja-JP" sz="1400" dirty="0"/>
+          </a:p>
+        </p:txBody>
+      </p:sp>
+      <p:sp>
+        <p:nvSpPr>
+          <p:cNvPr id="8" name="動きの比較_要点2"/>
           <p:cNvSpPr/>
           <p:nvPr/>
         </p:nvSpPr>
         <p:spPr>
           <a:xfrm>
-            <a:off x="4709160" y="4850892"/>
-            <a:ext cx="457200" cy="402336"/>
-          </a:xfrm>
-          <a:prstGeom prst="rightArrow">
-            <a:avLst/>
-          </a:prstGeom>
-          <a:solidFill>
-            <a:schemeClr val="accent1"/>
-          </a:solidFill>
-          <a:ln w="12700">
-            <a:solidFill>
-              <a:schemeClr val="accent1"/>
-            </a:solidFill>
-            <a:prstDash val="solid"/>
-          </a:ln>
-        </p:spPr>
-      </p:sp>
-      <p:sp>
-        <p:nvSpPr>
-          <p:cNvPr id="14" name="直した2_対応"/>
-          <p:cNvSpPr/>
-          <p:nvPr/>
-        </p:nvSpPr>
-        <p:spPr>
-          <a:xfrm>
-            <a:off x="5303520" y="3977640"/>
-            <a:ext cx="6339535" cy="2148840"/>
+            <a:off x="8869680" y="2994660"/>
+            <a:ext cx="2773375" cy="1371600"/>
           </a:xfrm>
           <a:prstGeom prst="roundRect">
             <a:avLst>
-              <a:gd name="adj" fmla="val 3404"/>
+              <a:gd name="adj" fmla="val 5333"/>
             </a:avLst>
           </a:prstGeom>
           <a:solidFill>
@@ -9774,323 +11516,14 @@
       </p:sp>
       <p:sp>
         <p:nvSpPr>
-          <p:cNvPr id="15" name="直した2_札"/>
-          <p:cNvSpPr/>
-          <p:nvPr/>
-        </p:nvSpPr>
-        <p:spPr>
-          <a:xfrm>
-            <a:off x="5577840" y="4178808"/>
-            <a:ext cx="1554480" cy="384048"/>
-          </a:xfrm>
-          <a:prstGeom prst="roundRect">
-            <a:avLst>
-              <a:gd name="adj" fmla="val 47619"/>
-            </a:avLst>
-          </a:prstGeom>
-          <a:solidFill>
-            <a:schemeClr val="accent1"/>
-          </a:solidFill>
-          <a:ln w="12700">
-            <a:solidFill>
-              <a:schemeClr val="accent1"/>
-            </a:solidFill>
-            <a:prstDash val="solid"/>
-          </a:ln>
-        </p:spPr>
-      </p:sp>
-      <p:sp>
-        <p:nvSpPr>
-          <p:cNvPr id="16" name="直した2_札_文字"/>
+          <p:cNvPr id="9" name="動きの比較_要点2_文字"/>
           <p:cNvSpPr txBox="1"/>
           <p:nvPr/>
         </p:nvSpPr>
         <p:spPr>
           <a:xfrm>
-            <a:off x="5577840" y="4178808"/>
-            <a:ext cx="1554480" cy="384048"/>
-          </a:xfrm>
-          <a:prstGeom prst="rect">
-            <a:avLst/>
-          </a:prstGeom>
-          <a:noFill/>
-          <a:ln/>
-        </p:spPr>
-        <p:txBody>
-          <a:bodyPr wrap="square" lIns="0" tIns="0" rIns="0" bIns="0" rtlCol="0" anchor="ctr"/>
-          <a:lstStyle/>
-          <a:p>
-            <a:pPr algn="ctr" indent="0" marL="0">
-              <a:buNone/>
-            </a:pPr>
-            <a:r>
-              <a:rPr lang="ja-JP" altLang="en-US" sz="1600" b="1" dirty="0">
-                <a:solidFill>
-                  <a:schemeClr val="bg1"/>
-                </a:solidFill>
-              </a:rPr>
-              <a:t>直しました</a:t>
-            </a:r>
-            <a:endParaRPr lang="ja-JP" sz="1600" dirty="0"/>
-          </a:p>
-        </p:txBody>
-      </p:sp>
-      <p:sp>
-        <p:nvSpPr>
-          <p:cNvPr id="17" name="直した2_対応_文字"/>
-          <p:cNvSpPr txBox="1"/>
-          <p:nvPr/>
-        </p:nvSpPr>
-        <p:spPr>
-          <a:xfrm>
-            <a:off x="5577840" y="4672584"/>
-            <a:ext cx="5790895" cy="1307592"/>
-          </a:xfrm>
-          <a:prstGeom prst="rect">
-            <a:avLst/>
-          </a:prstGeom>
-          <a:noFill/>
-          <a:ln/>
-        </p:spPr>
-        <p:txBody>
-          <a:bodyPr wrap="square" lIns="0" tIns="0" rIns="0" bIns="0" rtlCol="0" anchor="t"/>
-          <a:lstStyle/>
-          <a:p>
-            <a:pPr marL="203200" indent="-203200">
-              <a:buSzPct val="100000"/>
-              <a:buChar char="•"/>
-            </a:pPr>
-            <a:r>
-              <a:rPr lang="ja-JP" altLang="en-US" sz="1700" dirty="0">
-                <a:solidFill>
-                  <a:schemeClr val="tx1"/>
-                </a:solidFill>
-              </a:rPr>
-              <a:t>毎週の仕事を一度登録すれば、予定日に自動で追加される</a:t>
-            </a:r>
-            <a:endParaRPr lang="ja-JP" sz="1700" dirty="0"/>
-          </a:p>
-          <a:p>
-            <a:pPr marL="203200" indent="-203200">
-              <a:spcBef>
-                <a:spcPts val="600"/>
-              </a:spcBef>
-              <a:buSzPct val="100000"/>
-              <a:buChar char="•"/>
-            </a:pPr>
-            <a:r>
-              <a:rPr lang="ja-JP" altLang="en-US" sz="1700" dirty="0">
-                <a:solidFill>
-                  <a:schemeClr val="tx1"/>
-                </a:solidFill>
-              </a:rPr>
-              <a:t>毎日・毎週（曜日）・毎月（日にち）から選べる</a:t>
-            </a:r>
-            <a:endParaRPr lang="ja-JP" sz="1700" dirty="0"/>
-          </a:p>
-          <a:p>
-            <a:pPr marL="203200" indent="-203200">
-              <a:spcBef>
-                <a:spcPts val="600"/>
-              </a:spcBef>
-              <a:buSzPct val="100000"/>
-              <a:buChar char="•"/>
-            </a:pPr>
-            <a:r>
-              <a:rPr lang="ja-JP" altLang="en-US" sz="1700" dirty="0">
-                <a:solidFill>
-                  <a:schemeClr val="tx1"/>
-                </a:solidFill>
-              </a:rPr>
-              <a:t>前の回が終わっていない間は、新しく追加しない</a:t>
-            </a:r>
-            <a:endParaRPr lang="ja-JP" sz="1700" dirty="0"/>
-          </a:p>
-        </p:txBody>
-      </p:sp>
-      <p:sp>
-        <p:nvSpPr>
-          <p:cNvPr id="25" name="Slide Number Placeholder 0"/>
-          <p:cNvSpPr>
-            <a:spLocks noGrp="1"/>
-          </p:cNvSpPr>
-          <p:nvPr>
-            <p:ph type="sldNum" sz="quarter" idx="4294967295"/>
-          </p:nvPr>
-        </p:nvSpPr>
-        <p:spPr>
-          <a:xfrm>
-            <a:off x="10911535" y="6400800"/>
-            <a:ext cx="731520" cy="274320"/>
-          </a:xfrm>
-          <a:prstGeom prst="rect">
-            <a:avLst/>
-          </a:prstGeom>
-          <a:extLst>
-            <a:ext uri="{C572A759-6A51-4108-AA02-DFA0A04FC94B}">
-              <ma14:wrappingTextBoxFlag xmlns:ma14="http://schemas.microsoft.com/office/mac/drawingml/2011/main" val="0"/>
-            </a:ext>
-          </a:extLst>
-        </p:spPr>
-        <p:txBody>
-          <a:bodyPr lIns="0" tIns="0" rIns="0" bIns="0"/>
-          <a:lstStyle>
-            <a:lvl1pPr>
-              <a:defRPr sz="1100">
-                <a:solidFill>
-                  <a:schemeClr val="accent3"/>
-                </a:solidFill>
-              </a:defRPr>
-            </a:lvl1pPr>
-          </a:lstStyle>
-          <a:p>
-            <a:pPr algn="r"/>
-            <a:fld id="{F7021451-1387-4CA6-816F-3879F97B5CBC}" type="slidenum">
-              <a:rPr b="0" lang="en-US"/>
-              <a:t>2</a:t>
-            </a:fld>
-            <a:endParaRPr lang="en-US"/>
-          </a:p>
-        </p:txBody>
-      </p:sp>
-    </p:spTree>
-  </p:cSld>
-  <p:clrMapOvr>
-    <a:masterClrMapping/>
-  </p:clrMapOvr>
-</p:sld>
-</file>
-
-<file path=ppt/slides/slide16.xml><?xml version="1.0" encoding="utf-8"?>
-<p:sld xmlns:a="http://schemas.openxmlformats.org/drawingml/2006/main" xmlns:r="http://schemas.openxmlformats.org/officeDocument/2006/relationships" xmlns:p="http://schemas.openxmlformats.org/presentationml/2006/main">
-  <p:cSld name="Slide 3">
-    <p:spTree>
-      <p:nvGrpSpPr>
-        <p:cNvPr id="1" name=""/>
-        <p:cNvGrpSpPr/>
-        <p:nvPr/>
-      </p:nvGrpSpPr>
-      <p:grpSpPr>
-        <a:xfrm>
-          <a:off x="0" y="0"/>
-          <a:ext cx="0" cy="0"/>
-          <a:chOff x="0" y="0"/>
-          <a:chExt cx="0" cy="0"/>
-        </a:xfrm>
-      </p:grpSpPr>
-      <p:sp>
-        <p:nvSpPr>
-          <p:cNvPr id="2" name="Text 0"/>
-          <p:cNvSpPr/>
-          <p:nvPr>
-            <p:ph idx="100" type="body" hasCustomPrompt="1"/>
-          </p:nvPr>
-        </p:nvSpPr>
-        <p:spPr>
-          <a:xfrm>
-            <a:off x="548640" y="274320"/>
-            <a:ext cx="11094415" cy="320040"/>
-          </a:xfrm>
-          <a:prstGeom prst="rect">
-            <a:avLst/>
-          </a:prstGeom>
-          <a:noFill/>
-          <a:ln/>
-        </p:spPr>
-        <p:txBody>
-          <a:bodyPr wrap="square" lIns="0" tIns="0" rIns="0" bIns="0" rtlCol="0" anchor="ctr"/>
-          <a:lstStyle/>
-          <a:p>
-            <a:pPr algn="l" indent="0" marL="0">
-              <a:buNone/>
-            </a:pPr>
-            <a:r>
-              <a:rPr lang="ja-JP" altLang="en-US" sz="1400" b="1" dirty="0">
-                <a:solidFill>
-                  <a:schemeClr val="accent1"/>
-                </a:solidFill>
-              </a:rPr>
-              <a:t>7. 導入先からの評価</a:t>
-            </a:r>
-            <a:endParaRPr lang="ja-JP" sz="1400" dirty="0"/>
-          </a:p>
-        </p:txBody>
-      </p:sp>
-      <p:sp>
-        <p:nvSpPr>
-          <p:cNvPr id="3" name="Text 0"/>
-          <p:cNvSpPr/>
-          <p:nvPr>
-            <p:ph idx="101" type="title" hasCustomPrompt="1"/>
-          </p:nvPr>
-        </p:nvSpPr>
-        <p:spPr>
-          <a:xfrm>
-            <a:off x="548640" y="594360"/>
-            <a:ext cx="11094415" cy="731520"/>
-          </a:xfrm>
-          <a:prstGeom prst="rect">
-            <a:avLst/>
-          </a:prstGeom>
-          <a:noFill/>
-          <a:ln/>
-        </p:spPr>
-        <p:txBody>
-          <a:bodyPr wrap="square" lIns="0" tIns="0" rIns="0" bIns="0" rtlCol="0" anchor="ctr"/>
-          <a:lstStyle/>
-          <a:p>
-            <a:pPr algn="l" indent="0" marL="0">
-              <a:buNone/>
-            </a:pPr>
-            <a:r>
-              <a:rPr lang="ja-JP" altLang="en-US" sz="3200" b="1" dirty="0">
-                <a:solidFill>
-                  <a:schemeClr val="tx2"/>
-                </a:solidFill>
-              </a:rPr>
-              <a:t>導入先の評価 ③　これから直すところ</a:t>
-            </a:r>
-            <a:endParaRPr lang="ja-JP" sz="3200" dirty="0"/>
-          </a:p>
-        </p:txBody>
-      </p:sp>
-      <p:sp>
-        <p:nvSpPr>
-          <p:cNvPr id="4" name="これから1_評価"/>
-          <p:cNvSpPr/>
-          <p:nvPr/>
-        </p:nvSpPr>
-        <p:spPr>
-          <a:xfrm>
-            <a:off x="548640" y="1508760"/>
-            <a:ext cx="5120640" cy="1417320"/>
-          </a:xfrm>
-          <a:prstGeom prst="roundRect">
-            <a:avLst>
-              <a:gd name="adj" fmla="val 5161"/>
-            </a:avLst>
-          </a:prstGeom>
-          <a:solidFill>
-            <a:schemeClr val="bg2"/>
-          </a:solidFill>
-          <a:ln w="12700">
-            <a:solidFill>
-              <a:schemeClr val="bg2"/>
-            </a:solidFill>
-            <a:prstDash val="solid"/>
-          </a:ln>
-        </p:spPr>
-      </p:sp>
-      <p:sp>
-        <p:nvSpPr>
-          <p:cNvPr id="5" name="これから1_評価_文字"/>
-          <p:cNvSpPr txBox="1"/>
-          <p:nvPr/>
-        </p:nvSpPr>
-        <p:spPr>
-          <a:xfrm>
-            <a:off x="822960" y="1508760"/>
-            <a:ext cx="4572000" cy="1417320"/>
+            <a:off x="9052560" y="2994660"/>
+            <a:ext cx="2407615" cy="1371600"/>
           </a:xfrm>
           <a:prstGeom prst="rect">
             <a:avLst/>
@@ -10106,70 +11539,65 @@
               <a:buNone/>
             </a:pPr>
             <a:r>
-              <a:rPr lang="ja-JP" altLang="en-US" sz="1600" b="1" dirty="0">
-                <a:solidFill>
-                  <a:schemeClr val="tx2"/>
-                </a:solidFill>
-              </a:rPr>
-              <a:t>ディスプレイが小さくて、</a:t>
-            </a:r>
-            <a:endParaRPr lang="ja-JP" sz="1600" dirty="0"/>
+              <a:rPr lang="ja-JP" altLang="en-US" sz="1400" dirty="0">
+                <a:solidFill>
+                  <a:schemeClr val="accent4"/>
+                </a:solidFill>
+              </a:rPr>
+              <a:t>歩いた距離</a:t>
+            </a:r>
+            <a:endParaRPr lang="ja-JP" sz="1400" dirty="0"/>
           </a:p>
           <a:p>
             <a:pPr indent="0" marL="0">
+              <a:spcBef>
+                <a:spcPts val="400"/>
+              </a:spcBef>
               <a:buNone/>
             </a:pPr>
             <a:r>
-              <a:rPr lang="ja-JP" altLang="en-US" sz="1600" b="1" dirty="0">
-                <a:solidFill>
-                  <a:schemeClr val="tx2"/>
-                </a:solidFill>
-              </a:rPr>
-              <a:t>老眼が始まっている私には文字が見づらかった</a:t>
-            </a:r>
-            <a:endParaRPr lang="ja-JP" sz="1600" dirty="0"/>
-          </a:p>
-        </p:txBody>
-      </p:sp>
-      <p:sp>
-        <p:nvSpPr>
-          <p:cNvPr id="6" name="これから1_矢印"/>
+              <a:rPr lang="ja-JP" altLang="en-US" sz="2800" b="1" dirty="0">
+                <a:solidFill>
+                  <a:schemeClr val="accent1"/>
+                </a:solidFill>
+              </a:rPr>
+              <a:t>73% 減</a:t>
+            </a:r>
+            <a:endParaRPr lang="ja-JP" sz="1400" dirty="0"/>
+          </a:p>
+          <a:p>
+            <a:pPr indent="0" marL="0">
+              <a:spcBef>
+                <a:spcPts val="400"/>
+              </a:spcBef>
+              <a:buNone/>
+            </a:pPr>
+            <a:r>
+              <a:rPr lang="ja-JP" altLang="en-US" sz="1400" dirty="0">
+                <a:solidFill>
+                  <a:schemeClr val="tx1"/>
+                </a:solidFill>
+              </a:rPr>
+              <a:t>19.19 km → 5.24 km</a:t>
+            </a:r>
+            <a:endParaRPr lang="ja-JP" sz="1400" dirty="0"/>
+          </a:p>
+        </p:txBody>
+      </p:sp>
+      <p:sp>
+        <p:nvSpPr>
+          <p:cNvPr id="10" name="動きの比較_要点3"/>
           <p:cNvSpPr/>
           <p:nvPr/>
         </p:nvSpPr>
         <p:spPr>
           <a:xfrm>
-            <a:off x="5806440" y="2016252"/>
-            <a:ext cx="457200" cy="402336"/>
-          </a:xfrm>
-          <a:prstGeom prst="rightArrow">
-            <a:avLst/>
-          </a:prstGeom>
-          <a:solidFill>
-            <a:schemeClr val="accent2"/>
-          </a:solidFill>
-          <a:ln w="12700">
-            <a:solidFill>
-              <a:schemeClr val="accent2"/>
-            </a:solidFill>
-            <a:prstDash val="solid"/>
-          </a:ln>
-        </p:spPr>
-      </p:sp>
-      <p:sp>
-        <p:nvSpPr>
-          <p:cNvPr id="7" name="これから1_対応"/>
-          <p:cNvSpPr/>
-          <p:nvPr/>
-        </p:nvSpPr>
-        <p:spPr>
-          <a:xfrm>
-            <a:off x="6400800" y="1508760"/>
-            <a:ext cx="5242255" cy="1417320"/>
+            <a:off x="8869680" y="4572000"/>
+            <a:ext cx="2773375" cy="1371600"/>
           </a:xfrm>
           <a:prstGeom prst="roundRect">
             <a:avLst>
-              <a:gd name="adj" fmla="val 5161"/>
+              <a:gd name="adj" fmla="val 5333"/>
             </a:avLst>
           </a:prstGeom>
           <a:solidFill>
@@ -10185,159 +11613,14 @@
       </p:sp>
       <p:sp>
         <p:nvSpPr>
-          <p:cNvPr id="8" name="これから1_札"/>
-          <p:cNvSpPr/>
-          <p:nvPr/>
-        </p:nvSpPr>
-        <p:spPr>
-          <a:xfrm>
-            <a:off x="6675120" y="1709928"/>
-            <a:ext cx="1554480" cy="384048"/>
-          </a:xfrm>
-          <a:prstGeom prst="roundRect">
-            <a:avLst>
-              <a:gd name="adj" fmla="val 47619"/>
-            </a:avLst>
-          </a:prstGeom>
-          <a:solidFill>
-            <a:schemeClr val="accent2"/>
-          </a:solidFill>
-          <a:ln w="12700">
-            <a:solidFill>
-              <a:schemeClr val="accent2"/>
-            </a:solidFill>
-            <a:prstDash val="solid"/>
-          </a:ln>
-        </p:spPr>
-      </p:sp>
-      <p:sp>
-        <p:nvSpPr>
-          <p:cNvPr id="9" name="これから1_札_文字"/>
+          <p:cNvPr id="11" name="動きの比較_要点3_文字"/>
           <p:cNvSpPr txBox="1"/>
           <p:nvPr/>
         </p:nvSpPr>
         <p:spPr>
           <a:xfrm>
-            <a:off x="6675120" y="1709928"/>
-            <a:ext cx="1554480" cy="384048"/>
-          </a:xfrm>
-          <a:prstGeom prst="rect">
-            <a:avLst/>
-          </a:prstGeom>
-          <a:noFill/>
-          <a:ln/>
-        </p:spPr>
-        <p:txBody>
-          <a:bodyPr wrap="square" lIns="0" tIns="0" rIns="0" bIns="0" rtlCol="0" anchor="ctr"/>
-          <a:lstStyle/>
-          <a:p>
-            <a:pPr algn="ctr" indent="0" marL="0">
-              <a:buNone/>
-            </a:pPr>
-            <a:r>
-              <a:rPr lang="ja-JP" altLang="en-US" sz="1600" b="1" dirty="0">
-                <a:solidFill>
-                  <a:schemeClr val="bg1"/>
-                </a:solidFill>
-              </a:rPr>
-              <a:t>改善の方法</a:t>
-            </a:r>
-            <a:endParaRPr lang="ja-JP" sz="1600" dirty="0"/>
-          </a:p>
-        </p:txBody>
-      </p:sp>
-      <p:sp>
-        <p:nvSpPr>
-          <p:cNvPr id="10" name="これから1_対応_文字"/>
-          <p:cNvSpPr txBox="1"/>
-          <p:nvPr/>
-        </p:nvSpPr>
-        <p:spPr>
-          <a:xfrm>
-            <a:off x="6675120" y="2203704"/>
-            <a:ext cx="4693615" cy="576072"/>
-          </a:xfrm>
-          <a:prstGeom prst="rect">
-            <a:avLst/>
-          </a:prstGeom>
-          <a:noFill/>
-          <a:ln/>
-        </p:spPr>
-        <p:txBody>
-          <a:bodyPr wrap="square" lIns="0" tIns="0" rIns="0" bIns="0" rtlCol="0" anchor="t"/>
-          <a:lstStyle/>
-          <a:p>
-            <a:pPr marL="203200" indent="-203200">
-              <a:buSzPct val="100000"/>
-              <a:buChar char="•"/>
-            </a:pPr>
-            <a:r>
-              <a:rPr lang="ja-JP" altLang="en-US" sz="1600" dirty="0">
-                <a:solidFill>
-                  <a:schemeClr val="tx1"/>
-                </a:solidFill>
-              </a:rPr>
-              <a:t>大きい画面に替える</a:t>
-            </a:r>
-            <a:endParaRPr lang="ja-JP" sz="1600" dirty="0"/>
-          </a:p>
-          <a:p>
-            <a:pPr marL="203200" indent="-203200">
-              <a:spcBef>
-                <a:spcPts val="600"/>
-              </a:spcBef>
-              <a:buSzPct val="100000"/>
-              <a:buChar char="•"/>
-            </a:pPr>
-            <a:r>
-              <a:rPr lang="ja-JP" altLang="en-US" sz="1600" dirty="0">
-                <a:solidFill>
-                  <a:schemeClr val="tx1"/>
-                </a:solidFill>
-              </a:rPr>
-              <a:t>一度に出す文字を減らし、文字を大きくする</a:t>
-            </a:r>
-            <a:endParaRPr lang="ja-JP" sz="1600" dirty="0"/>
-          </a:p>
-        </p:txBody>
-      </p:sp>
-      <p:sp>
-        <p:nvSpPr>
-          <p:cNvPr id="11" name="これから2_評価"/>
-          <p:cNvSpPr/>
-          <p:nvPr/>
-        </p:nvSpPr>
-        <p:spPr>
-          <a:xfrm>
-            <a:off x="548640" y="3108960"/>
-            <a:ext cx="5120640" cy="1417320"/>
-          </a:xfrm>
-          <a:prstGeom prst="roundRect">
-            <a:avLst>
-              <a:gd name="adj" fmla="val 5161"/>
-            </a:avLst>
-          </a:prstGeom>
-          <a:solidFill>
-            <a:schemeClr val="bg2"/>
-          </a:solidFill>
-          <a:ln w="12700">
-            <a:solidFill>
-              <a:schemeClr val="bg2"/>
-            </a:solidFill>
-            <a:prstDash val="solid"/>
-          </a:ln>
-        </p:spPr>
-      </p:sp>
-      <p:sp>
-        <p:nvSpPr>
-          <p:cNvPr id="12" name="これから2_評価_文字"/>
-          <p:cNvSpPr txBox="1"/>
-          <p:nvPr/>
-        </p:nvSpPr>
-        <p:spPr>
-          <a:xfrm>
-            <a:off x="822960" y="3108960"/>
-            <a:ext cx="4572000" cy="1417320"/>
+            <a:off x="9052560" y="4572000"/>
+            <a:ext cx="2407615" cy="1371600"/>
           </a:xfrm>
           <a:prstGeom prst="rect">
             <a:avLst/>
@@ -10353,459 +11636,84 @@
               <a:buNone/>
             </a:pPr>
             <a:r>
-              <a:rPr lang="ja-JP" altLang="en-US" sz="1600" b="1" dirty="0">
-                <a:solidFill>
-                  <a:schemeClr val="tx2"/>
-                </a:solidFill>
-              </a:rPr>
-              <a:t>側面に IC タグをかざすのが、</a:t>
-            </a:r>
-            <a:endParaRPr lang="ja-JP" sz="1600" dirty="0"/>
-          </a:p>
+              <a:rPr lang="ja-JP" altLang="en-US" sz="1400" dirty="0">
+                <a:solidFill>
+                  <a:schemeClr val="accent4"/>
+                </a:solidFill>
+              </a:rPr>
+              <a:t>ムダな時間（15人の合計）</a:t>
+            </a:r>
+            <a:endParaRPr lang="ja-JP" sz="1400" dirty="0"/>
+          </a:p>
+          <a:p>
+            <a:pPr indent="0" marL="0">
+              <a:spcBef>
+                <a:spcPts val="400"/>
+              </a:spcBef>
+              <a:buNone/>
+            </a:pPr>
+            <a:r>
+              <a:rPr lang="ja-JP" altLang="en-US" sz="2800" b="1" dirty="0">
+                <a:solidFill>
+                  <a:schemeClr val="accent1"/>
+                </a:solidFill>
+              </a:rPr>
+              <a:t>57% 減</a:t>
+            </a:r>
+            <a:endParaRPr lang="ja-JP" sz="1400" dirty="0"/>
+          </a:p>
+          <a:p>
+            <a:pPr indent="0" marL="0">
+              <a:spcBef>
+                <a:spcPts val="400"/>
+              </a:spcBef>
+              <a:buNone/>
+            </a:pPr>
+            <a:r>
+              <a:rPr lang="ja-JP" altLang="en-US" sz="1400" dirty="0">
+                <a:solidFill>
+                  <a:schemeClr val="tx1"/>
+                </a:solidFill>
+              </a:rPr>
+              <a:t>1352 → 588 人分</a:t>
+            </a:r>
+            <a:endParaRPr lang="ja-JP" sz="1400" dirty="0"/>
+          </a:p>
+        </p:txBody>
+      </p:sp>
+      <p:sp>
+        <p:nvSpPr>
+          <p:cNvPr id="12" name="動きの比較_注記"/>
+          <p:cNvSpPr txBox="1"/>
+          <p:nvPr/>
+        </p:nvSpPr>
+        <p:spPr>
+          <a:xfrm>
+            <a:off x="548640" y="6016752"/>
+            <a:ext cx="11094415" cy="292608"/>
+          </a:xfrm>
+          <a:prstGeom prst="rect">
+            <a:avLst/>
+          </a:prstGeom>
+          <a:noFill/>
+          <a:ln/>
+        </p:spPr>
+        <p:txBody>
+          <a:bodyPr wrap="square" lIns="0" tIns="0" rIns="0" bIns="0" rtlCol="0" anchor="ctr"/>
+          <a:lstStyle/>
           <a:p>
             <a:pPr indent="0" marL="0">
               <a:buNone/>
             </a:pPr>
             <a:r>
-              <a:rPr lang="ja-JP" altLang="en-US" sz="1600" b="1" dirty="0">
-                <a:solidFill>
-                  <a:schemeClr val="tx2"/>
-                </a:solidFill>
-              </a:rPr>
-              <a:t>直感に反していて分かりづらかった</a:t>
-            </a:r>
-            <a:endParaRPr lang="ja-JP" sz="1600" dirty="0"/>
-          </a:p>
-        </p:txBody>
-      </p:sp>
-      <p:sp>
-        <p:nvSpPr>
-          <p:cNvPr id="13" name="これから2_矢印"/>
-          <p:cNvSpPr/>
-          <p:nvPr/>
-        </p:nvSpPr>
-        <p:spPr>
-          <a:xfrm>
-            <a:off x="5806440" y="3616452"/>
-            <a:ext cx="457200" cy="402336"/>
-          </a:xfrm>
-          <a:prstGeom prst="rightArrow">
-            <a:avLst/>
-          </a:prstGeom>
-          <a:solidFill>
-            <a:schemeClr val="accent2"/>
-          </a:solidFill>
-          <a:ln w="12700">
-            <a:solidFill>
-              <a:schemeClr val="accent2"/>
-            </a:solidFill>
-            <a:prstDash val="solid"/>
-          </a:ln>
-        </p:spPr>
-      </p:sp>
-      <p:sp>
-        <p:nvSpPr>
-          <p:cNvPr id="14" name="これから2_対応"/>
-          <p:cNvSpPr/>
-          <p:nvPr/>
-        </p:nvSpPr>
-        <p:spPr>
-          <a:xfrm>
-            <a:off x="6400800" y="3108960"/>
-            <a:ext cx="5242255" cy="1417320"/>
-          </a:xfrm>
-          <a:prstGeom prst="roundRect">
-            <a:avLst>
-              <a:gd name="adj" fmla="val 5161"/>
-            </a:avLst>
-          </a:prstGeom>
-          <a:solidFill>
-            <a:schemeClr val="accent5"/>
-          </a:solidFill>
-          <a:ln w="12700">
-            <a:solidFill>
-              <a:schemeClr val="accent5"/>
-            </a:solidFill>
-            <a:prstDash val="solid"/>
-          </a:ln>
-        </p:spPr>
-      </p:sp>
-      <p:sp>
-        <p:nvSpPr>
-          <p:cNvPr id="15" name="これから2_札"/>
-          <p:cNvSpPr/>
-          <p:nvPr/>
-        </p:nvSpPr>
-        <p:spPr>
-          <a:xfrm>
-            <a:off x="6675120" y="3310128"/>
-            <a:ext cx="1554480" cy="384048"/>
-          </a:xfrm>
-          <a:prstGeom prst="roundRect">
-            <a:avLst>
-              <a:gd name="adj" fmla="val 47619"/>
-            </a:avLst>
-          </a:prstGeom>
-          <a:solidFill>
-            <a:schemeClr val="accent2"/>
-          </a:solidFill>
-          <a:ln w="12700">
-            <a:solidFill>
-              <a:schemeClr val="accent2"/>
-            </a:solidFill>
-            <a:prstDash val="solid"/>
-          </a:ln>
-        </p:spPr>
-      </p:sp>
-      <p:sp>
-        <p:nvSpPr>
-          <p:cNvPr id="16" name="これから2_札_文字"/>
-          <p:cNvSpPr txBox="1"/>
-          <p:nvPr/>
-        </p:nvSpPr>
-        <p:spPr>
-          <a:xfrm>
-            <a:off x="6675120" y="3310128"/>
-            <a:ext cx="1554480" cy="384048"/>
-          </a:xfrm>
-          <a:prstGeom prst="rect">
-            <a:avLst/>
-          </a:prstGeom>
-          <a:noFill/>
-          <a:ln/>
-        </p:spPr>
-        <p:txBody>
-          <a:bodyPr wrap="square" lIns="0" tIns="0" rIns="0" bIns="0" rtlCol="0" anchor="ctr"/>
-          <a:lstStyle/>
-          <a:p>
-            <a:pPr algn="ctr" indent="0" marL="0">
-              <a:buNone/>
-            </a:pPr>
-            <a:r>
-              <a:rPr lang="ja-JP" altLang="en-US" sz="1600" b="1" dirty="0">
-                <a:solidFill>
-                  <a:schemeClr val="bg1"/>
-                </a:solidFill>
-              </a:rPr>
-              <a:t>改善の方法</a:t>
-            </a:r>
-            <a:endParaRPr lang="ja-JP" sz="1600" dirty="0"/>
-          </a:p>
-        </p:txBody>
-      </p:sp>
-      <p:sp>
-        <p:nvSpPr>
-          <p:cNvPr id="17" name="これから2_対応_文字"/>
-          <p:cNvSpPr txBox="1"/>
-          <p:nvPr/>
-        </p:nvSpPr>
-        <p:spPr>
-          <a:xfrm>
-            <a:off x="6675120" y="3803904"/>
-            <a:ext cx="4693615" cy="576072"/>
-          </a:xfrm>
-          <a:prstGeom prst="rect">
-            <a:avLst/>
-          </a:prstGeom>
-          <a:noFill/>
-          <a:ln/>
-        </p:spPr>
-        <p:txBody>
-          <a:bodyPr wrap="square" lIns="0" tIns="0" rIns="0" bIns="0" rtlCol="0" anchor="t"/>
-          <a:lstStyle/>
-          <a:p>
-            <a:pPr marL="203200" indent="-203200">
-              <a:buSzPct val="100000"/>
-              <a:buChar char="•"/>
-            </a:pPr>
-            <a:r>
-              <a:rPr lang="ja-JP" altLang="en-US" sz="1600" dirty="0">
-                <a:solidFill>
-                  <a:schemeClr val="tx1"/>
-                </a:solidFill>
-              </a:rPr>
-              <a:t>読み取る部分を正面に移す</a:t>
-            </a:r>
-            <a:endParaRPr lang="ja-JP" sz="1600" dirty="0"/>
-          </a:p>
-          <a:p>
-            <a:pPr marL="203200" indent="-203200">
-              <a:spcBef>
-                <a:spcPts val="600"/>
-              </a:spcBef>
-              <a:buSzPct val="100000"/>
-              <a:buChar char="•"/>
-            </a:pPr>
-            <a:r>
-              <a:rPr lang="ja-JP" altLang="en-US" sz="1600" dirty="0">
-                <a:solidFill>
-                  <a:schemeClr val="tx1"/>
-                </a:solidFill>
-              </a:rPr>
-              <a:t>かざす場所に目印を付ける</a:t>
-            </a:r>
-            <a:endParaRPr lang="ja-JP" sz="1600" dirty="0"/>
-          </a:p>
-        </p:txBody>
-      </p:sp>
-      <p:sp>
-        <p:nvSpPr>
-          <p:cNvPr id="18" name="これから3_評価"/>
-          <p:cNvSpPr/>
-          <p:nvPr/>
-        </p:nvSpPr>
-        <p:spPr>
-          <a:xfrm>
-            <a:off x="548640" y="4709160"/>
-            <a:ext cx="5120640" cy="1417320"/>
-          </a:xfrm>
-          <a:prstGeom prst="roundRect">
-            <a:avLst>
-              <a:gd name="adj" fmla="val 5161"/>
-            </a:avLst>
-          </a:prstGeom>
-          <a:solidFill>
-            <a:schemeClr val="bg2"/>
-          </a:solidFill>
-          <a:ln w="12700">
-            <a:solidFill>
-              <a:schemeClr val="bg2"/>
-            </a:solidFill>
-            <a:prstDash val="solid"/>
-          </a:ln>
-        </p:spPr>
-      </p:sp>
-      <p:sp>
-        <p:nvSpPr>
-          <p:cNvPr id="19" name="これから3_評価_文字"/>
-          <p:cNvSpPr txBox="1"/>
-          <p:nvPr/>
-        </p:nvSpPr>
-        <p:spPr>
-          <a:xfrm>
-            <a:off x="822960" y="4709160"/>
-            <a:ext cx="4572000" cy="1417320"/>
-          </a:xfrm>
-          <a:prstGeom prst="rect">
-            <a:avLst/>
-          </a:prstGeom>
-          <a:noFill/>
-          <a:ln/>
-        </p:spPr>
-        <p:txBody>
-          <a:bodyPr wrap="square" lIns="0" tIns="0" rIns="0" bIns="0" rtlCol="0" anchor="ctr"/>
-          <a:lstStyle/>
-          <a:p>
-            <a:pPr indent="0" marL="0">
-              <a:buNone/>
-            </a:pPr>
-            <a:r>
-              <a:rPr lang="ja-JP" altLang="en-US" sz="1600" b="1" dirty="0">
-                <a:solidFill>
-                  <a:schemeClr val="tx2"/>
-                </a:solidFill>
-              </a:rPr>
-              <a:t>管理者側から、</a:t>
-            </a:r>
-            <a:endParaRPr lang="ja-JP" sz="1600" dirty="0"/>
-          </a:p>
-          <a:p>
-            <a:pPr indent="0" marL="0">
-              <a:buNone/>
-            </a:pPr>
-            <a:r>
-              <a:rPr lang="ja-JP" altLang="en-US" sz="1600" b="1" dirty="0">
-                <a:solidFill>
-                  <a:schemeClr val="tx2"/>
-                </a:solidFill>
-              </a:rPr>
-              <a:t>モジュールに通知できる機能があればよかった</a:t>
-            </a:r>
-            <a:endParaRPr lang="ja-JP" sz="1600" dirty="0"/>
-          </a:p>
-          <a:p>
-            <a:pPr indent="0" marL="0">
-              <a:buNone/>
-            </a:pPr>
-            <a:r>
-              <a:rPr lang="ja-JP" altLang="en-US" sz="1600" b="1" dirty="0">
-                <a:solidFill>
-                  <a:schemeClr val="tx2"/>
-                </a:solidFill>
-              </a:rPr>
-              <a:t>（ブザーなど）</a:t>
-            </a:r>
-            <a:endParaRPr lang="ja-JP" sz="1600" dirty="0"/>
-          </a:p>
-        </p:txBody>
-      </p:sp>
-      <p:sp>
-        <p:nvSpPr>
-          <p:cNvPr id="20" name="これから3_矢印"/>
-          <p:cNvSpPr/>
-          <p:nvPr/>
-        </p:nvSpPr>
-        <p:spPr>
-          <a:xfrm>
-            <a:off x="5806440" y="5216652"/>
-            <a:ext cx="457200" cy="402336"/>
-          </a:xfrm>
-          <a:prstGeom prst="rightArrow">
-            <a:avLst/>
-          </a:prstGeom>
-          <a:solidFill>
-            <a:schemeClr val="accent2"/>
-          </a:solidFill>
-          <a:ln w="12700">
-            <a:solidFill>
-              <a:schemeClr val="accent2"/>
-            </a:solidFill>
-            <a:prstDash val="solid"/>
-          </a:ln>
-        </p:spPr>
-      </p:sp>
-      <p:sp>
-        <p:nvSpPr>
-          <p:cNvPr id="21" name="これから3_対応"/>
-          <p:cNvSpPr/>
-          <p:nvPr/>
-        </p:nvSpPr>
-        <p:spPr>
-          <a:xfrm>
-            <a:off x="6400800" y="4709160"/>
-            <a:ext cx="5242255" cy="1417320"/>
-          </a:xfrm>
-          <a:prstGeom prst="roundRect">
-            <a:avLst>
-              <a:gd name="adj" fmla="val 5161"/>
-            </a:avLst>
-          </a:prstGeom>
-          <a:solidFill>
-            <a:schemeClr val="accent5"/>
-          </a:solidFill>
-          <a:ln w="12700">
-            <a:solidFill>
-              <a:schemeClr val="accent5"/>
-            </a:solidFill>
-            <a:prstDash val="solid"/>
-          </a:ln>
-        </p:spPr>
-      </p:sp>
-      <p:sp>
-        <p:nvSpPr>
-          <p:cNvPr id="22" name="これから3_札"/>
-          <p:cNvSpPr/>
-          <p:nvPr/>
-        </p:nvSpPr>
-        <p:spPr>
-          <a:xfrm>
-            <a:off x="6675120" y="4910328"/>
-            <a:ext cx="1554480" cy="384048"/>
-          </a:xfrm>
-          <a:prstGeom prst="roundRect">
-            <a:avLst>
-              <a:gd name="adj" fmla="val 47619"/>
-            </a:avLst>
-          </a:prstGeom>
-          <a:solidFill>
-            <a:schemeClr val="accent2"/>
-          </a:solidFill>
-          <a:ln w="12700">
-            <a:solidFill>
-              <a:schemeClr val="accent2"/>
-            </a:solidFill>
-            <a:prstDash val="solid"/>
-          </a:ln>
-        </p:spPr>
-      </p:sp>
-      <p:sp>
-        <p:nvSpPr>
-          <p:cNvPr id="23" name="これから3_札_文字"/>
-          <p:cNvSpPr txBox="1"/>
-          <p:nvPr/>
-        </p:nvSpPr>
-        <p:spPr>
-          <a:xfrm>
-            <a:off x="6675120" y="4910328"/>
-            <a:ext cx="1554480" cy="384048"/>
-          </a:xfrm>
-          <a:prstGeom prst="rect">
-            <a:avLst/>
-          </a:prstGeom>
-          <a:noFill/>
-          <a:ln/>
-        </p:spPr>
-        <p:txBody>
-          <a:bodyPr wrap="square" lIns="0" tIns="0" rIns="0" bIns="0" rtlCol="0" anchor="ctr"/>
-          <a:lstStyle/>
-          <a:p>
-            <a:pPr algn="ctr" indent="0" marL="0">
-              <a:buNone/>
-            </a:pPr>
-            <a:r>
-              <a:rPr lang="ja-JP" altLang="en-US" sz="1600" b="1" dirty="0">
-                <a:solidFill>
-                  <a:schemeClr val="bg1"/>
-                </a:solidFill>
-              </a:rPr>
-              <a:t>改善の方法</a:t>
-            </a:r>
-            <a:endParaRPr lang="ja-JP" sz="1600" dirty="0"/>
-          </a:p>
-        </p:txBody>
-      </p:sp>
-      <p:sp>
-        <p:nvSpPr>
-          <p:cNvPr id="24" name="これから3_対応_文字"/>
-          <p:cNvSpPr txBox="1"/>
-          <p:nvPr/>
-        </p:nvSpPr>
-        <p:spPr>
-          <a:xfrm>
-            <a:off x="6675120" y="5404104"/>
-            <a:ext cx="4693615" cy="576072"/>
-          </a:xfrm>
-          <a:prstGeom prst="rect">
-            <a:avLst/>
-          </a:prstGeom>
-          <a:noFill/>
-          <a:ln/>
-        </p:spPr>
-        <p:txBody>
-          <a:bodyPr wrap="square" lIns="0" tIns="0" rIns="0" bIns="0" rtlCol="0" anchor="t"/>
-          <a:lstStyle/>
-          <a:p>
-            <a:pPr marL="203200" indent="-203200">
-              <a:buSzPct val="100000"/>
-              <a:buChar char="•"/>
-            </a:pPr>
-            <a:r>
-              <a:rPr lang="ja-JP" altLang="en-US" sz="1600" dirty="0">
-                <a:solidFill>
-                  <a:schemeClr val="tx1"/>
-                </a:solidFill>
-              </a:rPr>
-              <a:t>モジュールにブザーを付ける</a:t>
-            </a:r>
-            <a:endParaRPr lang="ja-JP" sz="1600" dirty="0"/>
-          </a:p>
-          <a:p>
-            <a:pPr marL="203200" indent="-203200">
-              <a:spcBef>
-                <a:spcPts val="600"/>
-              </a:spcBef>
-              <a:buSzPct val="100000"/>
-              <a:buChar char="•"/>
-            </a:pPr>
-            <a:r>
-              <a:rPr lang="ja-JP" altLang="en-US" sz="1600" dirty="0">
-                <a:solidFill>
-                  <a:schemeClr val="tx1"/>
-                </a:solidFill>
-              </a:rPr>
-              <a:t>管理画面から、音と文字で呼び出せるようにする</a:t>
-            </a:r>
-            <a:endParaRPr lang="ja-JP" sz="1600" dirty="0"/>
+              <a:rPr lang="ja-JP" altLang="en-US" sz="1200" dirty="0">
+                <a:solidFill>
+                  <a:schemeClr val="accent4"/>
+                </a:solidFill>
+              </a:rPr>
+              <a:t>※ シミュレーションで再現した1日の例（作業者15人・機材30台・タスク151件）。上が従来の運用、下が Gemmba＋AI 割当</a:t>
+            </a:r>
+            <a:endParaRPr lang="ja-JP" sz="1200" dirty="0"/>
           </a:p>
         </p:txBody>
       </p:sp>
@@ -10848,7 +11756,7 @@
             <a:pPr algn="r"/>
             <a:fld id="{F7021451-1387-4CA6-816F-3879F97B5CBC}" type="slidenum">
               <a:rPr b="0" lang="en-US"/>
-              <a:t>3</a:t>
+              <a:t>1</a:t>
             </a:fld>
             <a:endParaRPr lang="en-US"/>
           </a:p>
@@ -11641,7 +12549,7 @@
           </a:prstGeom>
           <a:extLst>
             <a:ext uri="{C572A759-6A51-4108-AA02-DFA0A04FC94B}">
-              <ma14:wrappingTextBoxFlag xmlns:ma14="http://schemas.microsoft.com/office/mac/drawingml/2011/main" xmlns="" val="0"/>
+              <ma14:wrappingTextBoxFlag xmlns="" xmlns:ma14="http://schemas.microsoft.com/office/mac/drawingml/2011/main" val="0"/>
             </a:ext>
           </a:extLst>
         </p:spPr>
@@ -12463,7 +13371,7 @@
           </a:prstGeom>
           <a:extLst>
             <a:ext uri="{C572A759-6A51-4108-AA02-DFA0A04FC94B}">
-              <ma14:wrappingTextBoxFlag xmlns:ma14="http://schemas.microsoft.com/office/mac/drawingml/2011/main" xmlns="" val="0"/>
+              <ma14:wrappingTextBoxFlag xmlns="" xmlns:ma14="http://schemas.microsoft.com/office/mac/drawingml/2011/main" val="0"/>
             </a:ext>
           </a:extLst>
         </p:spPr>
@@ -13369,7 +14277,7 @@
           </a:prstGeom>
           <a:extLst>
             <a:ext uri="{C572A759-6A51-4108-AA02-DFA0A04FC94B}">
-              <ma14:wrappingTextBoxFlag xmlns:ma14="http://schemas.microsoft.com/office/mac/drawingml/2011/main" xmlns="" val="0"/>
+              <ma14:wrappingTextBoxFlag xmlns="" xmlns:ma14="http://schemas.microsoft.com/office/mac/drawingml/2011/main" val="0"/>
             </a:ext>
           </a:extLst>
         </p:spPr>
@@ -14054,7 +14962,7 @@
           </a:prstGeom>
           <a:extLst>
             <a:ext uri="{C572A759-6A51-4108-AA02-DFA0A04FC94B}">
-              <ma14:wrappingTextBoxFlag xmlns:ma14="http://schemas.microsoft.com/office/mac/drawingml/2011/main" xmlns="" val="0"/>
+              <ma14:wrappingTextBoxFlag xmlns="" xmlns:ma14="http://schemas.microsoft.com/office/mac/drawingml/2011/main" val="0"/>
             </a:ext>
           </a:extLst>
         </p:spPr>
@@ -14935,7 +15843,7 @@
           </a:prstGeom>
           <a:extLst>
             <a:ext uri="{C572A759-6A51-4108-AA02-DFA0A04FC94B}">
-              <ma14:wrappingTextBoxFlag xmlns:ma14="http://schemas.microsoft.com/office/mac/drawingml/2011/main" xmlns="" val="0"/>
+              <ma14:wrappingTextBoxFlag xmlns="" xmlns:ma14="http://schemas.microsoft.com/office/mac/drawingml/2011/main" val="0"/>
             </a:ext>
           </a:extLst>
         </p:spPr>
@@ -15816,7 +16724,7 @@
           </a:prstGeom>
           <a:extLst>
             <a:ext uri="{C572A759-6A51-4108-AA02-DFA0A04FC94B}">
-              <ma14:wrappingTextBoxFlag xmlns:ma14="http://schemas.microsoft.com/office/mac/drawingml/2011/main" xmlns="" val="0"/>
+              <ma14:wrappingTextBoxFlag xmlns="" xmlns:ma14="http://schemas.microsoft.com/office/mac/drawingml/2011/main" val="0"/>
             </a:ext>
           </a:extLst>
         </p:spPr>
@@ -15955,7 +16863,7 @@
           <p:nvPr>
             <p:extLst>
               <p:ext uri="{D42A27DB-BD31-4B8C-83A1-F6EECF244321}">
-                <p14:modId xmlns:p14="http://schemas.microsoft.com/office/powerpoint/2010/main" val="2167279485"/>
+                <p14:modId xmlns:p14="http://schemas.microsoft.com/office/powerpoint/2010/main" val="455411667"/>
               </p:ext>
             </p:extLst>
           </p:nvPr>
@@ -17154,6 +18062,39 @@
                         <a:buNone/>
                       </a:pPr>
                       <a:r>
+                        <a:rPr lang="en-US" sz="1600" b="1">
+                          <a:solidFill>
+                            <a:schemeClr val="tx2"/>
+                          </a:solidFill>
+                          <a:latin typeface="BIZ UDPGothic" pitchFamily="34" charset="0"/>
+                          <a:ea typeface="BIZ UDPGothic" pitchFamily="34" charset="-122"/>
+                          <a:cs typeface="BIZ UDPGothic" pitchFamily="34" charset="-120"/>
+                        </a:rPr>
+                        <a:t>タッチだけ</a:t>
+                      </a:r>
+                      <a:r>
+                        <a:rPr lang="ja-JP" altLang="en-US" sz="1600" b="1">
+                          <a:solidFill>
+                            <a:schemeClr val="tx2"/>
+                          </a:solidFill>
+                          <a:latin typeface="BIZ UDPGothic" pitchFamily="34" charset="0"/>
+                          <a:ea typeface="BIZ UDPGothic" pitchFamily="34" charset="-122"/>
+                          <a:cs typeface="BIZ UDPGothic" pitchFamily="34" charset="-120"/>
+                        </a:rPr>
+                        <a:t>で済む</a:t>
+                      </a:r>
+                      <a:r>
+                        <a:rPr lang="en-US" sz="1600" b="1">
+                          <a:solidFill>
+                            <a:schemeClr val="tx2"/>
+                          </a:solidFill>
+                          <a:latin typeface="BIZ UDPGothic" pitchFamily="34" charset="0"/>
+                          <a:ea typeface="BIZ UDPGothic" pitchFamily="34" charset="-122"/>
+                          <a:cs typeface="BIZ UDPGothic" pitchFamily="34" charset="-120"/>
+                        </a:rPr>
+                        <a:t>。</a:t>
+                      </a:r>
+                      <a:r>
                         <a:rPr lang="en-US" sz="1600" b="1" dirty="0">
                           <a:solidFill>
                             <a:schemeClr val="tx2"/>
@@ -17162,7 +18103,7 @@
                           <a:ea typeface="BIZ UDPGothic" pitchFamily="34" charset="-122"/>
                           <a:cs typeface="BIZ UDPGothic" pitchFamily="34" charset="-120"/>
                         </a:rPr>
-                        <a:t>タッチだけ。既存の機材に後付け</a:t>
+                        <a:t>既存の機材に後付け</a:t>
                       </a:r>
                       <a:endParaRPr lang="en-US" sz="1600" dirty="0">
                         <a:latin typeface="BIZ UDPGothic" charset="0"/>
@@ -17240,7 +18181,7 @@
           </a:prstGeom>
           <a:extLst>
             <a:ext uri="{C572A759-6A51-4108-AA02-DFA0A04FC94B}">
-              <ma14:wrappingTextBoxFlag xmlns:ma14="http://schemas.microsoft.com/office/mac/drawingml/2011/main" xmlns="" val="0"/>
+              <ma14:wrappingTextBoxFlag xmlns="" xmlns:ma14="http://schemas.microsoft.com/office/mac/drawingml/2011/main" val="0"/>
             </a:ext>
           </a:extLst>
         </p:spPr>
@@ -19398,7 +20339,7 @@
           </a:prstGeom>
           <a:extLst>
             <a:ext uri="{C572A759-6A51-4108-AA02-DFA0A04FC94B}">
-              <ma14:wrappingTextBoxFlag xmlns:ma14="http://schemas.microsoft.com/office/mac/drawingml/2011/main" xmlns="" val="0"/>
+              <ma14:wrappingTextBoxFlag xmlns="" xmlns:ma14="http://schemas.microsoft.com/office/mac/drawingml/2011/main" val="0"/>
             </a:ext>
           </a:extLst>
         </p:spPr>
